--- a/slides-v3.pptx
+++ b/slides-v3.pptx
@@ -11117,7 +11117,7 @@
                           <a:ea typeface="Malgun Gothic" pitchFamily="34" charset="-122"/>
                           <a:cs typeface="Malgun Gothic" pitchFamily="34" charset="-120"/>
                         </a:rPr>
-                        <a:t>2020년 다음 유입</a:t>
+                        <a:t>2020년 644 − 지금 131 (2026, 10-06까지)</a:t>
                       </a:r>
                       <a:endParaRPr lang="en-US" sz="1150" dirty="0">
                         <a:latin typeface="Malgun Gothic" charset="0"/>
@@ -11167,7 +11167,7 @@
                           <a:ea typeface="Malgun Gothic" pitchFamily="34" charset="-122"/>
                           <a:cs typeface="Malgun Gothic" pitchFamily="34" charset="-120"/>
                         </a:rPr>
-                        <a:t>연 644</a:t>
+                        <a:t>연 약 513</a:t>
                       </a:r>
                       <a:endParaRPr lang="en-US" sz="1150" dirty="0">
                         <a:latin typeface="Malgun Gothic" charset="0"/>
@@ -11269,7 +11269,7 @@
                           <a:ea typeface="Malgun Gothic" pitchFamily="34" charset="-122"/>
                           <a:cs typeface="Malgun Gothic" pitchFamily="34" charset="-120"/>
                         </a:rPr>
-                        <a:t>644 × 방문당 신청률 4.6%</a:t>
+                        <a:t>513 × 방문당 신청률 4.6%</a:t>
                       </a:r>
                       <a:endParaRPr lang="en-US" sz="1150" dirty="0">
                         <a:latin typeface="Malgun Gothic" charset="0"/>
@@ -11319,7 +11319,7 @@
                           <a:ea typeface="Malgun Gothic" pitchFamily="34" charset="-122"/>
                           <a:cs typeface="Malgun Gothic" pitchFamily="34" charset="-120"/>
                         </a:rPr>
-                        <a:t>연 30건</a:t>
+                        <a:t>연 24건</a:t>
                       </a:r>
                       <a:endParaRPr lang="en-US" sz="1150" dirty="0">
                         <a:latin typeface="Malgun Gothic" charset="0"/>
@@ -11421,7 +11421,7 @@
                           <a:ea typeface="Malgun Gothic" pitchFamily="34" charset="-122"/>
                           <a:cs typeface="Malgun Gothic" pitchFamily="34" charset="-120"/>
                         </a:rPr>
-                        <a:t>30건 × 수임률 10~20%</a:t>
+                        <a:t>24건 × 수임률 10~20%</a:t>
                       </a:r>
                       <a:endParaRPr lang="en-US" sz="1150" dirty="0">
                         <a:latin typeface="Malgun Gothic" charset="0"/>
@@ -11471,7 +11471,7 @@
                           <a:ea typeface="Malgun Gothic" pitchFamily="34" charset="-122"/>
                           <a:cs typeface="Malgun Gothic" pitchFamily="34" charset="-120"/>
                         </a:rPr>
-                        <a:t>3~6건</a:t>
+                        <a:t>2~5건</a:t>
                       </a:r>
                       <a:endParaRPr lang="en-US" sz="1150" dirty="0">
                         <a:latin typeface="Malgun Gothic" charset="0"/>
@@ -11573,7 +11573,7 @@
                           <a:ea typeface="Malgun Gothic" pitchFamily="34" charset="-122"/>
                           <a:cs typeface="Malgun Gothic" pitchFamily="34" charset="-120"/>
                         </a:rPr>
-                        <a:t>3~6건 × 출원 수수료 300만 원</a:t>
+                        <a:t>2~5건 × 출원 수수료 300만 원</a:t>
                       </a:r>
                       <a:endParaRPr lang="en-US" sz="1150" dirty="0">
                         <a:latin typeface="Malgun Gothic" charset="0"/>
@@ -11623,7 +11623,7 @@
                           <a:ea typeface="Malgun Gothic" pitchFamily="34" charset="-122"/>
                           <a:cs typeface="Malgun Gothic" pitchFamily="34" charset="-120"/>
                         </a:rPr>
-                        <a:t>연 900만~1,800만 원</a:t>
+                        <a:t>연 700만~1,400만 원</a:t>
                       </a:r>
                       <a:endParaRPr lang="en-US" sz="1150" dirty="0">
                         <a:latin typeface="Malgun Gothic" charset="0"/>
@@ -11725,7 +11725,7 @@
                           <a:ea typeface="Malgun Gothic" pitchFamily="34" charset="-122"/>
                           <a:cs typeface="Malgun Gothic" pitchFamily="34" charset="-120"/>
                         </a:rPr>
-                        <a:t>644클릭 × 네이버 클릭당 1,891원</a:t>
+                        <a:t>513클릭 × 네이버 클릭당 1,891원</a:t>
                       </a:r>
                       <a:endParaRPr lang="en-US" sz="1150" dirty="0">
                         <a:latin typeface="Malgun Gothic" charset="0"/>
@@ -11775,7 +11775,7 @@
                           <a:ea typeface="Malgun Gothic" pitchFamily="34" charset="-122"/>
                           <a:cs typeface="Malgun Gothic" pitchFamily="34" charset="-120"/>
                         </a:rPr>
-                        <a:t>연 약 120만 원</a:t>
+                        <a:t>연 약 97만 원</a:t>
                       </a:r>
                       <a:endParaRPr lang="en-US" sz="1150" dirty="0">
                         <a:latin typeface="Malgun Gothic" charset="0"/>
@@ -11877,7 +11877,7 @@
                           <a:ea typeface="Malgun Gothic" pitchFamily="34" charset="-122"/>
                           <a:cs typeface="Malgun Gothic" pitchFamily="34" charset="-120"/>
                         </a:rPr>
-                        <a:t>매출 ÷ 644클릭</a:t>
+                        <a:t>매출 ÷ 513클릭</a:t>
                       </a:r>
                       <a:endParaRPr lang="en-US" sz="1150" dirty="0">
                         <a:latin typeface="Malgun Gothic" charset="0"/>
@@ -12138,7 +12138,7 @@
                 <a:ea typeface="Malgun Gothic" pitchFamily="34" charset="-122"/>
                 <a:cs typeface="Malgun Gothic" pitchFamily="34" charset="-120"/>
               </a:rPr>
-              <a:t>출처: 접속자통계 유입 도메인별 방문(다음 2020년 644), 신청률·수임률·수수료는 2장·변리사 답, 클릭당 비용은 네이버 광고 90일. 다음 중단은 변리사 답</a:t>
+              <a:t>출처: 접속자통계 유입 도메인별 방문(다음 2020년 644, 2026년 131), 신청률·수임률·수수료는 2장·변리사 답, 클릭당 비용은 네이버 광고 90일. 다음 중단은 변리사 답</a:t>
             </a:r>
             <a:endParaRPr lang="en-US" sz="800" dirty="0"/>
           </a:p>

--- a/slides-v3.pptx
+++ b/slides-v3.pptx
@@ -7085,7 +7085,7 @@
               <a:buNone/>
             </a:pPr>
             <a:r>
-              <a:rPr lang="en-US" sz="2000" b="1" dirty="0">
+              <a:rPr lang="en-US" sz="1800" b="1" dirty="0">
                 <a:solidFill>
                   <a:srgbClr val="2A78D6"/>
                 </a:solidFill>
@@ -7095,7 +7095,7 @@
               </a:rPr>
               <a:t>300만 원</a:t>
             </a:r>
-            <a:endParaRPr lang="en-US" sz="2000" dirty="0"/>
+            <a:endParaRPr lang="en-US" sz="1800" dirty="0"/>
           </a:p>
         </p:txBody>
       </p:sp>
@@ -7227,7 +7227,7 @@
               <a:buNone/>
             </a:pPr>
             <a:r>
-              <a:rPr lang="en-US" sz="2000" b="1" dirty="0">
+              <a:rPr lang="en-US" sz="1800" b="1" dirty="0">
                 <a:solidFill>
                   <a:srgbClr val="EB6834"/>
                 </a:solidFill>
@@ -7237,7 +7237,7 @@
               </a:rPr>
               <a:t>2,000만 원</a:t>
             </a:r>
-            <a:endParaRPr lang="en-US" sz="2000" dirty="0"/>
+            <a:endParaRPr lang="en-US" sz="1800" dirty="0"/>
           </a:p>
         </p:txBody>
       </p:sp>
@@ -7573,46 +7573,7 @@
       </p:sp>
       <p:sp>
         <p:nvSpPr>
-          <p:cNvPr id="4" name="Text 2"/>
-          <p:cNvSpPr txBox="1"/>
-          <p:nvPr/>
-        </p:nvSpPr>
-        <p:spPr>
-          <a:xfrm>
-            <a:off x="411480" y="1005840"/>
-            <a:ext cx="8321040" cy="274320"/>
-          </a:xfrm>
-          <a:prstGeom prst="rect">
-            <a:avLst/>
-          </a:prstGeom>
-          <a:noFill/>
-          <a:ln/>
-        </p:spPr>
-        <p:txBody>
-          <a:bodyPr wrap="square" lIns="0" tIns="0" rIns="0" bIns="0" rtlCol="0" anchor="t"/>
-          <a:lstStyle/>
-          <a:p>
-            <a:pPr indent="0" marL="0">
-              <a:buNone/>
-            </a:pPr>
-            <a:r>
-              <a:rPr lang="en-US" sz="1200" dirty="0">
-                <a:solidFill>
-                  <a:srgbClr val="52514E"/>
-                </a:solidFill>
-                <a:latin typeface="Malgun Gothic" pitchFamily="34" charset="0"/>
-                <a:ea typeface="Malgun Gothic" pitchFamily="34" charset="-122"/>
-                <a:cs typeface="Malgun Gothic" pitchFamily="34" charset="-120"/>
-              </a:rPr>
-              <a:t>네 칸 중 어디가 무너졌는지 찾는다. 칸마다 데이터가 왜 어려운가</a:t>
-            </a:r>
-            <a:endParaRPr lang="en-US" sz="1200" dirty="0"/>
-          </a:p>
-        </p:txBody>
-      </p:sp>
-      <p:sp>
-        <p:nvSpPr>
-          <p:cNvPr id="5" name="Shape 3"/>
+          <p:cNvPr id="4" name="Shape 2"/>
           <p:cNvSpPr/>
           <p:nvPr/>
         </p:nvSpPr>
@@ -7637,14 +7598,14 @@
       </p:sp>
       <p:sp>
         <p:nvSpPr>
-          <p:cNvPr id="6" name="Text 4"/>
+          <p:cNvPr id="5" name="Text 3"/>
           <p:cNvSpPr txBox="1"/>
           <p:nvPr/>
         </p:nvSpPr>
         <p:spPr>
           <a:xfrm>
-            <a:off x="548640" y="1554480"/>
-            <a:ext cx="1668780" cy="320040"/>
+            <a:off x="548640" y="1417320"/>
+            <a:ext cx="1668780" cy="2194560"/>
           </a:xfrm>
           <a:prstGeom prst="rect">
             <a:avLst/>
@@ -7656,11 +7617,11 @@
           <a:bodyPr wrap="square" lIns="0" tIns="0" rIns="0" bIns="0" rtlCol="0" anchor="ctr"/>
           <a:lstStyle/>
           <a:p>
-            <a:pPr indent="0" marL="0">
+            <a:pPr algn="ctr" indent="0" marL="0">
               <a:buNone/>
             </a:pPr>
             <a:r>
-              <a:rPr lang="en-US" sz="1400" b="1" dirty="0">
+              <a:rPr lang="en-US" sz="1600" b="1" dirty="0">
                 <a:solidFill>
                   <a:srgbClr val="0B0B0B"/>
                 </a:solidFill>
@@ -7670,91 +7631,13 @@
               </a:rPr>
               <a:t>방문수</a:t>
             </a:r>
-            <a:endParaRPr lang="en-US" sz="1400" dirty="0"/>
-          </a:p>
-        </p:txBody>
-      </p:sp>
-      <p:sp>
-        <p:nvSpPr>
-          <p:cNvPr id="7" name="Text 5"/>
-          <p:cNvSpPr txBox="1"/>
-          <p:nvPr/>
-        </p:nvSpPr>
-        <p:spPr>
-          <a:xfrm>
-            <a:off x="548640" y="1965960"/>
-            <a:ext cx="1668780" cy="640080"/>
-          </a:xfrm>
-          <a:prstGeom prst="rect">
-            <a:avLst/>
-          </a:prstGeom>
-          <a:noFill/>
-          <a:ln/>
-        </p:spPr>
-        <p:txBody>
-          <a:bodyPr wrap="square" lIns="0" tIns="0" rIns="0" bIns="0" rtlCol="0" anchor="t"/>
-          <a:lstStyle/>
-          <a:p>
-            <a:pPr indent="0" marL="0">
-              <a:buNone/>
-            </a:pPr>
-            <a:r>
-              <a:rPr lang="en-US" sz="1100" dirty="0">
-                <a:solidFill>
-                  <a:srgbClr val="0B0B0B"/>
-                </a:solidFill>
-                <a:latin typeface="Malgun Gothic" pitchFamily="34" charset="0"/>
-                <a:ea typeface="Malgun Gothic" pitchFamily="34" charset="-122"/>
-                <a:cs typeface="Malgun Gothic" pitchFamily="34" charset="-120"/>
-              </a:rPr>
-              <a:t>서버 통계에 봇이 섞이고 유입 경로를 놓침</a:t>
-            </a:r>
-            <a:endParaRPr lang="en-US" sz="1100" dirty="0"/>
-          </a:p>
-        </p:txBody>
-      </p:sp>
-      <p:sp>
-        <p:nvSpPr>
-          <p:cNvPr id="8" name="Text 6"/>
-          <p:cNvSpPr txBox="1"/>
-          <p:nvPr/>
-        </p:nvSpPr>
-        <p:spPr>
-          <a:xfrm>
-            <a:off x="548640" y="2697480"/>
-            <a:ext cx="1668780" cy="640080"/>
-          </a:xfrm>
-          <a:prstGeom prst="rect">
-            <a:avLst/>
-          </a:prstGeom>
-          <a:noFill/>
-          <a:ln/>
-        </p:spPr>
-        <p:txBody>
-          <a:bodyPr wrap="square" lIns="0" tIns="0" rIns="0" bIns="0" rtlCol="0" anchor="t"/>
-          <a:lstStyle/>
-          <a:p>
-            <a:pPr indent="0" marL="0">
-              <a:buNone/>
-            </a:pPr>
-            <a:r>
-              <a:rPr lang="en-US" sz="1100" dirty="0">
-                <a:solidFill>
-                  <a:srgbClr val="52514E"/>
-                </a:solidFill>
-                <a:latin typeface="Malgun Gothic" pitchFamily="34" charset="0"/>
-                <a:ea typeface="Malgun Gothic" pitchFamily="34" charset="-122"/>
-                <a:cs typeface="Malgun Gothic" pitchFamily="34" charset="-120"/>
-              </a:rPr>
-              <a:t>OS로 봇 추정, 경로는 추이로만</a:t>
-            </a:r>
-            <a:endParaRPr lang="en-US" sz="1100" dirty="0"/>
-          </a:p>
-        </p:txBody>
-      </p:sp>
-      <p:sp>
-        <p:nvSpPr>
-          <p:cNvPr id="9" name="Text 7"/>
+            <a:endParaRPr lang="en-US" sz="1600" dirty="0"/>
+          </a:p>
+        </p:txBody>
+      </p:sp>
+      <p:sp>
+        <p:nvSpPr>
+          <p:cNvPr id="6" name="Text 4"/>
           <p:cNvSpPr txBox="1"/>
           <p:nvPr/>
         </p:nvSpPr>
@@ -7793,7 +7676,7 @@
       </p:sp>
       <p:sp>
         <p:nvSpPr>
-          <p:cNvPr id="10" name="Shape 8"/>
+          <p:cNvPr id="7" name="Shape 5"/>
           <p:cNvSpPr/>
           <p:nvPr/>
         </p:nvSpPr>
@@ -7818,14 +7701,14 @@
       </p:sp>
       <p:sp>
         <p:nvSpPr>
-          <p:cNvPr id="11" name="Text 9"/>
+          <p:cNvPr id="8" name="Text 6"/>
           <p:cNvSpPr txBox="1"/>
           <p:nvPr/>
         </p:nvSpPr>
         <p:spPr>
           <a:xfrm>
-            <a:off x="2674620" y="1554480"/>
-            <a:ext cx="1668780" cy="320040"/>
+            <a:off x="2674620" y="1417320"/>
+            <a:ext cx="1668780" cy="2194560"/>
           </a:xfrm>
           <a:prstGeom prst="rect">
             <a:avLst/>
@@ -7837,11 +7720,11 @@
           <a:bodyPr wrap="square" lIns="0" tIns="0" rIns="0" bIns="0" rtlCol="0" anchor="ctr"/>
           <a:lstStyle/>
           <a:p>
-            <a:pPr indent="0" marL="0">
+            <a:pPr algn="ctr" indent="0" marL="0">
               <a:buNone/>
             </a:pPr>
             <a:r>
-              <a:rPr lang="en-US" sz="1400" b="1" dirty="0">
+              <a:rPr lang="en-US" sz="1600" b="1" dirty="0">
                 <a:solidFill>
                   <a:srgbClr val="0B0B0B"/>
                 </a:solidFill>
@@ -7851,91 +7734,13 @@
               </a:rPr>
               <a:t>방문당 신청률</a:t>
             </a:r>
-            <a:endParaRPr lang="en-US" sz="1400" dirty="0"/>
-          </a:p>
-        </p:txBody>
-      </p:sp>
-      <p:sp>
-        <p:nvSpPr>
-          <p:cNvPr id="12" name="Text 10"/>
-          <p:cNvSpPr txBox="1"/>
-          <p:nvPr/>
-        </p:nvSpPr>
-        <p:spPr>
-          <a:xfrm>
-            <a:off x="2674620" y="1965960"/>
-            <a:ext cx="1668780" cy="640080"/>
-          </a:xfrm>
-          <a:prstGeom prst="rect">
-            <a:avLst/>
-          </a:prstGeom>
-          <a:noFill/>
-          <a:ln/>
-        </p:spPr>
-        <p:txBody>
-          <a:bodyPr wrap="square" lIns="0" tIns="0" rIns="0" bIns="0" rtlCol="0" anchor="t"/>
-          <a:lstStyle/>
-          <a:p>
-            <a:pPr indent="0" marL="0">
-              <a:buNone/>
-            </a:pPr>
-            <a:r>
-              <a:rPr lang="en-US" sz="1100" dirty="0">
-                <a:solidFill>
-                  <a:srgbClr val="0B0B0B"/>
-                </a:solidFill>
-                <a:latin typeface="Malgun Gothic" pitchFamily="34" charset="0"/>
-                <a:ea typeface="Malgun Gothic" pitchFamily="34" charset="-122"/>
-                <a:cs typeface="Malgun Gothic" pitchFamily="34" charset="-120"/>
-              </a:rPr>
-              <a:t>신청은 정확(알림 문자)</a:t>
-            </a:r>
-            <a:endParaRPr lang="en-US" sz="1100" dirty="0"/>
-          </a:p>
-        </p:txBody>
-      </p:sp>
-      <p:sp>
-        <p:nvSpPr>
-          <p:cNvPr id="13" name="Text 11"/>
-          <p:cNvSpPr txBox="1"/>
-          <p:nvPr/>
-        </p:nvSpPr>
-        <p:spPr>
-          <a:xfrm>
-            <a:off x="2674620" y="2697480"/>
-            <a:ext cx="1668780" cy="640080"/>
-          </a:xfrm>
-          <a:prstGeom prst="rect">
-            <a:avLst/>
-          </a:prstGeom>
-          <a:noFill/>
-          <a:ln/>
-        </p:spPr>
-        <p:txBody>
-          <a:bodyPr wrap="square" lIns="0" tIns="0" rIns="0" bIns="0" rtlCol="0" anchor="t"/>
-          <a:lstStyle/>
-          <a:p>
-            <a:pPr indent="0" marL="0">
-              <a:buNone/>
-            </a:pPr>
-            <a:r>
-              <a:rPr lang="en-US" sz="1100" dirty="0">
-                <a:solidFill>
-                  <a:srgbClr val="52514E"/>
-                </a:solidFill>
-                <a:latin typeface="Malgun Gothic" pitchFamily="34" charset="0"/>
-                <a:ea typeface="Malgun Gothic" pitchFamily="34" charset="-122"/>
-                <a:cs typeface="Malgun Gothic" pitchFamily="34" charset="-120"/>
-              </a:rPr>
-              <a:t>분모인 방문이 추정</a:t>
-            </a:r>
-            <a:endParaRPr lang="en-US" sz="1100" dirty="0"/>
-          </a:p>
-        </p:txBody>
-      </p:sp>
-      <p:sp>
-        <p:nvSpPr>
-          <p:cNvPr id="14" name="Text 12"/>
+            <a:endParaRPr lang="en-US" sz="1600" dirty="0"/>
+          </a:p>
+        </p:txBody>
+      </p:sp>
+      <p:sp>
+        <p:nvSpPr>
+          <p:cNvPr id="9" name="Text 7"/>
           <p:cNvSpPr txBox="1"/>
           <p:nvPr/>
         </p:nvSpPr>
@@ -7974,7 +7779,7 @@
       </p:sp>
       <p:sp>
         <p:nvSpPr>
-          <p:cNvPr id="15" name="Shape 13"/>
+          <p:cNvPr id="10" name="Shape 8"/>
           <p:cNvSpPr/>
           <p:nvPr/>
         </p:nvSpPr>
@@ -7999,14 +7804,14 @@
       </p:sp>
       <p:sp>
         <p:nvSpPr>
-          <p:cNvPr id="16" name="Text 14"/>
+          <p:cNvPr id="11" name="Text 9"/>
           <p:cNvSpPr txBox="1"/>
           <p:nvPr/>
         </p:nvSpPr>
         <p:spPr>
           <a:xfrm>
-            <a:off x="4800600" y="1554480"/>
-            <a:ext cx="1668780" cy="320040"/>
+            <a:off x="4800600" y="1417320"/>
+            <a:ext cx="1668780" cy="2194560"/>
           </a:xfrm>
           <a:prstGeom prst="rect">
             <a:avLst/>
@@ -8018,11 +7823,11 @@
           <a:bodyPr wrap="square" lIns="0" tIns="0" rIns="0" bIns="0" rtlCol="0" anchor="ctr"/>
           <a:lstStyle/>
           <a:p>
-            <a:pPr indent="0" marL="0">
+            <a:pPr algn="ctr" indent="0" marL="0">
               <a:buNone/>
             </a:pPr>
             <a:r>
-              <a:rPr lang="en-US" sz="1400" b="1" dirty="0">
+              <a:rPr lang="en-US" sz="1600" b="1" dirty="0">
                 <a:solidFill>
                   <a:srgbClr val="0B0B0B"/>
                 </a:solidFill>
@@ -8032,91 +7837,13 @@
               </a:rPr>
               <a:t>수임 전환율</a:t>
             </a:r>
-            <a:endParaRPr lang="en-US" sz="1400" dirty="0"/>
-          </a:p>
-        </p:txBody>
-      </p:sp>
-      <p:sp>
-        <p:nvSpPr>
-          <p:cNvPr id="17" name="Text 15"/>
-          <p:cNvSpPr txBox="1"/>
-          <p:nvPr/>
-        </p:nvSpPr>
-        <p:spPr>
-          <a:xfrm>
-            <a:off x="4800600" y="1965960"/>
-            <a:ext cx="1668780" cy="640080"/>
-          </a:xfrm>
-          <a:prstGeom prst="rect">
-            <a:avLst/>
-          </a:prstGeom>
-          <a:noFill/>
-          <a:ln/>
-        </p:spPr>
-        <p:txBody>
-          <a:bodyPr wrap="square" lIns="0" tIns="0" rIns="0" bIns="0" rtlCol="0" anchor="t"/>
-          <a:lstStyle/>
-          <a:p>
-            <a:pPr indent="0" marL="0">
-              <a:buNone/>
-            </a:pPr>
-            <a:r>
-              <a:rPr lang="en-US" sz="1100" dirty="0">
-                <a:solidFill>
-                  <a:srgbClr val="0B0B0B"/>
-                </a:solidFill>
-                <a:latin typeface="Malgun Gothic" pitchFamily="34" charset="0"/>
-                <a:ea typeface="Malgun Gothic" pitchFamily="34" charset="-122"/>
-                <a:cs typeface="Malgun Gothic" pitchFamily="34" charset="-120"/>
-              </a:rPr>
-              <a:t>신청 뒤는 전화라 사이트 밖</a:t>
-            </a:r>
-            <a:endParaRPr lang="en-US" sz="1100" dirty="0"/>
-          </a:p>
-        </p:txBody>
-      </p:sp>
-      <p:sp>
-        <p:nvSpPr>
-          <p:cNvPr id="18" name="Text 16"/>
-          <p:cNvSpPr txBox="1"/>
-          <p:nvPr/>
-        </p:nvSpPr>
-        <p:spPr>
-          <a:xfrm>
-            <a:off x="4800600" y="2697480"/>
-            <a:ext cx="1668780" cy="640080"/>
-          </a:xfrm>
-          <a:prstGeom prst="rect">
-            <a:avLst/>
-          </a:prstGeom>
-          <a:noFill/>
-          <a:ln/>
-        </p:spPr>
-        <p:txBody>
-          <a:bodyPr wrap="square" lIns="0" tIns="0" rIns="0" bIns="0" rtlCol="0" anchor="t"/>
-          <a:lstStyle/>
-          <a:p>
-            <a:pPr indent="0" marL="0">
-              <a:buNone/>
-            </a:pPr>
-            <a:r>
-              <a:rPr lang="en-US" sz="1100" dirty="0">
-                <a:solidFill>
-                  <a:srgbClr val="52514E"/>
-                </a:solidFill>
-                <a:latin typeface="Malgun Gothic" pitchFamily="34" charset="0"/>
-                <a:ea typeface="Malgun Gothic" pitchFamily="34" charset="-122"/>
-                <a:cs typeface="Malgun Gothic" pitchFamily="34" charset="-120"/>
-              </a:rPr>
-              <a:t>기록 없음, 변리사 기억뿐</a:t>
-            </a:r>
-            <a:endParaRPr lang="en-US" sz="1100" dirty="0"/>
-          </a:p>
-        </p:txBody>
-      </p:sp>
-      <p:sp>
-        <p:nvSpPr>
-          <p:cNvPr id="19" name="Text 17"/>
+            <a:endParaRPr lang="en-US" sz="1600" dirty="0"/>
+          </a:p>
+        </p:txBody>
+      </p:sp>
+      <p:sp>
+        <p:nvSpPr>
+          <p:cNvPr id="12" name="Text 10"/>
           <p:cNvSpPr txBox="1"/>
           <p:nvPr/>
         </p:nvSpPr>
@@ -8155,7 +7882,7 @@
       </p:sp>
       <p:sp>
         <p:nvSpPr>
-          <p:cNvPr id="20" name="Shape 18"/>
+          <p:cNvPr id="13" name="Shape 11"/>
           <p:cNvSpPr/>
           <p:nvPr/>
         </p:nvSpPr>
@@ -8180,14 +7907,14 @@
       </p:sp>
       <p:sp>
         <p:nvSpPr>
-          <p:cNvPr id="21" name="Text 19"/>
+          <p:cNvPr id="14" name="Text 12"/>
           <p:cNvSpPr txBox="1"/>
           <p:nvPr/>
         </p:nvSpPr>
         <p:spPr>
           <a:xfrm>
-            <a:off x="6926580" y="1554480"/>
-            <a:ext cx="1668780" cy="320040"/>
+            <a:off x="6926580" y="1417320"/>
+            <a:ext cx="1668780" cy="2194560"/>
           </a:xfrm>
           <a:prstGeom prst="rect">
             <a:avLst/>
@@ -8199,11 +7926,11 @@
           <a:bodyPr wrap="square" lIns="0" tIns="0" rIns="0" bIns="0" rtlCol="0" anchor="ctr"/>
           <a:lstStyle/>
           <a:p>
-            <a:pPr indent="0" marL="0">
+            <a:pPr algn="ctr" indent="0" marL="0">
               <a:buNone/>
             </a:pPr>
             <a:r>
-              <a:rPr lang="en-US" sz="1400" b="1" dirty="0">
+              <a:rPr lang="en-US" sz="1600" b="1" dirty="0">
                 <a:solidFill>
                   <a:srgbClr val="0B0B0B"/>
                 </a:solidFill>
@@ -8213,85 +7940,7 @@
               </a:rPr>
               <a:t>수임당 매출</a:t>
             </a:r>
-            <a:endParaRPr lang="en-US" sz="1400" dirty="0"/>
-          </a:p>
-        </p:txBody>
-      </p:sp>
-      <p:sp>
-        <p:nvSpPr>
-          <p:cNvPr id="22" name="Text 20"/>
-          <p:cNvSpPr txBox="1"/>
-          <p:nvPr/>
-        </p:nvSpPr>
-        <p:spPr>
-          <a:xfrm>
-            <a:off x="6926580" y="1965960"/>
-            <a:ext cx="1668780" cy="640080"/>
-          </a:xfrm>
-          <a:prstGeom prst="rect">
-            <a:avLst/>
-          </a:prstGeom>
-          <a:noFill/>
-          <a:ln/>
-        </p:spPr>
-        <p:txBody>
-          <a:bodyPr wrap="square" lIns="0" tIns="0" rIns="0" bIns="0" rtlCol="0" anchor="t"/>
-          <a:lstStyle/>
-          <a:p>
-            <a:pPr indent="0" marL="0">
-              <a:buNone/>
-            </a:pPr>
-            <a:r>
-              <a:rPr lang="en-US" sz="1100" dirty="0">
-                <a:solidFill>
-                  <a:srgbClr val="0B0B0B"/>
-                </a:solidFill>
-                <a:latin typeface="Malgun Gothic" pitchFamily="34" charset="0"/>
-                <a:ea typeface="Malgun Gothic" pitchFamily="34" charset="-122"/>
-                <a:cs typeface="Malgun Gothic" pitchFamily="34" charset="-120"/>
-              </a:rPr>
-              <a:t>수수료·수임률은 변리사 답</a:t>
-            </a:r>
-            <a:endParaRPr lang="en-US" sz="1100" dirty="0"/>
-          </a:p>
-        </p:txBody>
-      </p:sp>
-      <p:sp>
-        <p:nvSpPr>
-          <p:cNvPr id="23" name="Text 21"/>
-          <p:cNvSpPr txBox="1"/>
-          <p:nvPr/>
-        </p:nvSpPr>
-        <p:spPr>
-          <a:xfrm>
-            <a:off x="6926580" y="2697480"/>
-            <a:ext cx="1668780" cy="640080"/>
-          </a:xfrm>
-          <a:prstGeom prst="rect">
-            <a:avLst/>
-          </a:prstGeom>
-          <a:noFill/>
-          <a:ln/>
-        </p:spPr>
-        <p:txBody>
-          <a:bodyPr wrap="square" lIns="0" tIns="0" rIns="0" bIns="0" rtlCol="0" anchor="t"/>
-          <a:lstStyle/>
-          <a:p>
-            <a:pPr indent="0" marL="0">
-              <a:buNone/>
-            </a:pPr>
-            <a:r>
-              <a:rPr lang="en-US" sz="1100" dirty="0">
-                <a:solidFill>
-                  <a:srgbClr val="52514E"/>
-                </a:solidFill>
-                <a:latin typeface="Malgun Gothic" pitchFamily="34" charset="0"/>
-                <a:ea typeface="Malgun Gothic" pitchFamily="34" charset="-122"/>
-                <a:cs typeface="Malgun Gothic" pitchFamily="34" charset="-120"/>
-              </a:rPr>
-              <a:t>기억에 의한 값</a:t>
-            </a:r>
-            <a:endParaRPr lang="en-US" sz="1100" dirty="0"/>
+            <a:endParaRPr lang="en-US" sz="1600" dirty="0"/>
           </a:p>
         </p:txBody>
       </p:sp>
@@ -8446,48 +8095,9 @@
           </a:p>
         </p:txBody>
       </p:sp>
-      <p:sp>
-        <p:nvSpPr>
-          <p:cNvPr id="4" name="Text 2"/>
-          <p:cNvSpPr txBox="1"/>
-          <p:nvPr/>
-        </p:nvSpPr>
-        <p:spPr>
-          <a:xfrm>
-            <a:off x="411480" y="987552"/>
-            <a:ext cx="4937760" cy="237744"/>
-          </a:xfrm>
-          <a:prstGeom prst="rect">
-            <a:avLst/>
-          </a:prstGeom>
-          <a:noFill/>
-          <a:ln/>
-        </p:spPr>
-        <p:txBody>
-          <a:bodyPr wrap="square" lIns="0" tIns="0" rIns="0" bIns="0" rtlCol="0" anchor="t"/>
-          <a:lstStyle/>
-          <a:p>
-            <a:pPr indent="0" marL="0">
-              <a:buNone/>
-            </a:pPr>
-            <a:r>
-              <a:rPr lang="en-US" sz="1000" dirty="0">
-                <a:solidFill>
-                  <a:srgbClr val="52514E"/>
-                </a:solidFill>
-                <a:latin typeface="Malgun Gothic" pitchFamily="34" charset="0"/>
-                <a:ea typeface="Malgun Gothic" pitchFamily="34" charset="-122"/>
-                <a:cs typeface="Malgun Gothic" pitchFamily="34" charset="-120"/>
-              </a:rPr>
-              <a:t>연도별 신청 건수 (알림 문자 기준, 2026년은 10월까지라 제외)</a:t>
-            </a:r>
-            <a:endParaRPr lang="en-US" sz="1000" dirty="0"/>
-          </a:p>
-        </p:txBody>
-      </p:sp>
       <p:graphicFrame>
         <p:nvGraphicFramePr>
-          <p:cNvPr id="5" name="Chart 0" descr=""/>
+          <p:cNvPr id="4" name="Chart 0" descr=""/>
           <p:cNvGraphicFramePr/>
           <p:nvPr/>
         </p:nvGraphicFramePr>
@@ -8503,7 +8113,7 @@
       </p:graphicFrame>
       <p:sp>
         <p:nvSpPr>
-          <p:cNvPr id="6" name="Shape 3"/>
+          <p:cNvPr id="5" name="Shape 2"/>
           <p:cNvSpPr/>
           <p:nvPr/>
         </p:nvSpPr>
@@ -8528,7 +8138,7 @@
       </p:sp>
       <p:sp>
         <p:nvSpPr>
-          <p:cNvPr id="7" name="Text 4"/>
+          <p:cNvPr id="6" name="Text 3"/>
           <p:cNvSpPr txBox="1"/>
           <p:nvPr/>
         </p:nvSpPr>
@@ -8567,7 +8177,7 @@
       </p:sp>
       <p:sp>
         <p:nvSpPr>
-          <p:cNvPr id="8" name="Text 5"/>
+          <p:cNvPr id="7" name="Text 4"/>
           <p:cNvSpPr txBox="1"/>
           <p:nvPr/>
         </p:nvSpPr>
@@ -8590,7 +8200,7 @@
               <a:buNone/>
             </a:pPr>
             <a:r>
-              <a:rPr lang="en-US" sz="2000" b="1" dirty="0">
+              <a:rPr lang="en-US" sz="1800" b="1" dirty="0">
                 <a:solidFill>
                   <a:srgbClr val="EB6834"/>
                 </a:solidFill>
@@ -8600,13 +8210,13 @@
               </a:rPr>
               <a:t>308건 → 72건</a:t>
             </a:r>
-            <a:endParaRPr lang="en-US" sz="2000" dirty="0"/>
-          </a:p>
-        </p:txBody>
-      </p:sp>
-      <p:sp>
-        <p:nvSpPr>
-          <p:cNvPr id="9" name="Text 6"/>
+            <a:endParaRPr lang="en-US" sz="1800" dirty="0"/>
+          </a:p>
+        </p:txBody>
+      </p:sp>
+      <p:sp>
+        <p:nvSpPr>
+          <p:cNvPr id="8" name="Text 5"/>
           <p:cNvSpPr txBox="1"/>
           <p:nvPr/>
         </p:nvSpPr>
@@ -8628,24 +8238,13 @@
             <a:pPr indent="0" marL="0">
               <a:buNone/>
             </a:pPr>
-            <a:r>
-              <a:rPr lang="en-US" sz="900" dirty="0">
-                <a:solidFill>
-                  <a:srgbClr val="52514E"/>
-                </a:solidFill>
-                <a:latin typeface="Malgun Gothic" pitchFamily="34" charset="0"/>
-                <a:ea typeface="Malgun Gothic" pitchFamily="34" charset="-122"/>
-                <a:cs typeface="Malgun Gothic" pitchFamily="34" charset="-120"/>
-              </a:rPr>
-              <a:t>2020 → 2022, 회복 안 됨</a:t>
-            </a:r>
             <a:endParaRPr lang="en-US" sz="900" dirty="0"/>
           </a:p>
         </p:txBody>
       </p:sp>
       <p:sp>
         <p:nvSpPr>
-          <p:cNvPr id="10" name="Shape 7"/>
+          <p:cNvPr id="9" name="Shape 6"/>
           <p:cNvSpPr/>
           <p:nvPr/>
         </p:nvSpPr>
@@ -8670,7 +8269,7 @@
       </p:sp>
       <p:sp>
         <p:nvSpPr>
-          <p:cNvPr id="11" name="Text 8"/>
+          <p:cNvPr id="10" name="Text 7"/>
           <p:cNvSpPr txBox="1"/>
           <p:nvPr/>
         </p:nvSpPr>
@@ -8709,7 +8308,7 @@
       </p:sp>
       <p:sp>
         <p:nvSpPr>
-          <p:cNvPr id="12" name="Text 9"/>
+          <p:cNvPr id="11" name="Text 8"/>
           <p:cNvSpPr txBox="1"/>
           <p:nvPr/>
         </p:nvSpPr>
@@ -8732,7 +8331,7 @@
               <a:buNone/>
             </a:pPr>
             <a:r>
-              <a:rPr lang="en-US" sz="2000" b="1" dirty="0">
+              <a:rPr lang="en-US" sz="1800" b="1" dirty="0">
                 <a:solidFill>
                   <a:srgbClr val="0B0B0B"/>
                 </a:solidFill>
@@ -8740,15 +8339,15 @@
                 <a:ea typeface="Malgun Gothic" pitchFamily="34" charset="-122"/>
                 <a:cs typeface="Malgun Gothic" pitchFamily="34" charset="-120"/>
               </a:rPr>
-              <a:t>연 6,000만~1.2억 원 손실</a:t>
-            </a:r>
-            <a:endParaRPr lang="en-US" sz="2000" dirty="0"/>
-          </a:p>
-        </p:txBody>
-      </p:sp>
-      <p:sp>
-        <p:nvSpPr>
-          <p:cNvPr id="13" name="Text 10"/>
+              <a:t>연 6,000만~1.2억 원</a:t>
+            </a:r>
+            <a:endParaRPr lang="en-US" sz="1800" dirty="0"/>
+          </a:p>
+        </p:txBody>
+      </p:sp>
+      <p:sp>
+        <p:nvSpPr>
+          <p:cNvPr id="12" name="Text 9"/>
           <p:cNvSpPr txBox="1"/>
           <p:nvPr/>
         </p:nvSpPr>
@@ -8787,7 +8386,7 @@
       </p:sp>
       <p:sp>
         <p:nvSpPr>
-          <p:cNvPr id="14" name="Shape 11"/>
+          <p:cNvPr id="13" name="Shape 10"/>
           <p:cNvSpPr/>
           <p:nvPr/>
         </p:nvSpPr>
@@ -8812,7 +8411,7 @@
       </p:sp>
       <p:sp>
         <p:nvSpPr>
-          <p:cNvPr id="15" name="Text 12"/>
+          <p:cNvPr id="14" name="Text 11"/>
           <p:cNvSpPr txBox="1"/>
           <p:nvPr/>
         </p:nvSpPr>
@@ -8851,7 +8450,7 @@
       </p:sp>
       <p:sp>
         <p:nvSpPr>
-          <p:cNvPr id="16" name="Text 13"/>
+          <p:cNvPr id="15" name="Text 12"/>
           <p:cNvSpPr txBox="1"/>
           <p:nvPr/>
         </p:nvSpPr>
@@ -8874,7 +8473,7 @@
               <a:buNone/>
             </a:pPr>
             <a:r>
-              <a:rPr lang="en-US" sz="2000" b="1" dirty="0">
+              <a:rPr lang="en-US" sz="1800" b="1" dirty="0">
                 <a:solidFill>
                   <a:srgbClr val="2A78D6"/>
                 </a:solidFill>
@@ -8884,13 +8483,13 @@
               </a:rPr>
               <a:t>연 150건</a:t>
             </a:r>
-            <a:endParaRPr lang="en-US" sz="2000" dirty="0"/>
-          </a:p>
-        </p:txBody>
-      </p:sp>
-      <p:sp>
-        <p:nvSpPr>
-          <p:cNvPr id="17" name="Text 14"/>
+            <a:endParaRPr lang="en-US" sz="1800" dirty="0"/>
+          </a:p>
+        </p:txBody>
+      </p:sp>
+      <p:sp>
+        <p:nvSpPr>
+          <p:cNvPr id="16" name="Text 13"/>
           <p:cNvSpPr txBox="1"/>
           <p:nvPr/>
         </p:nvSpPr>
@@ -8912,24 +8511,13 @@
             <a:pPr indent="0" marL="0">
               <a:buNone/>
             </a:pPr>
-            <a:r>
-              <a:rPr lang="en-US" sz="900" dirty="0">
-                <a:solidFill>
-                  <a:srgbClr val="52514E"/>
-                </a:solidFill>
-                <a:latin typeface="Malgun Gothic" pitchFamily="34" charset="0"/>
-                <a:ea typeface="Malgun Gothic" pitchFamily="34" charset="-122"/>
-                <a:cs typeface="Malgun Gothic" pitchFamily="34" charset="-120"/>
-              </a:rPr>
-              <a:t>방문 3,812(2024) 그대로, 신청률만 4.6%로 되돌리면 177건</a:t>
-            </a:r>
             <a:endParaRPr lang="en-US" sz="900" dirty="0"/>
           </a:p>
         </p:txBody>
       </p:sp>
       <p:sp>
         <p:nvSpPr>
-          <p:cNvPr id="18" name="Shape 15"/>
+          <p:cNvPr id="17" name="Shape 14"/>
           <p:cNvSpPr/>
           <p:nvPr/>
         </p:nvSpPr>
@@ -8952,7 +8540,7 @@
       </p:sp>
       <p:sp>
         <p:nvSpPr>
-          <p:cNvPr id="19" name="Text 16"/>
+          <p:cNvPr id="18" name="Text 15"/>
           <p:cNvSpPr txBox="1"/>
           <p:nvPr/>
         </p:nvSpPr>

--- a/slides-v3.pptx
+++ b/slides-v3.pptx
@@ -18,10 +18,9 @@
     <p:sldId id="266" r:id="rId12"/>
     <p:sldId id="267" r:id="rId13"/>
     <p:sldId id="268" r:id="rId14"/>
-    <p:sldId id="269" r:id="rId15"/>
   </p:sldIdLst>
   <p:notesMasterIdLst>
-    <p:notesMasterId r:id="rId16"/>
+    <p:notesMasterId r:id="rId15"/>
   </p:notesMasterIdLst>
   <p:sldSz cx="9144000" cy="5143500"/>
   <p:notesSz cx="5143500" cy="9144000"/>
@@ -569,7 +568,7 @@
               <c:strCache>
                 <c:ptCount val="1"/>
                 <c:pt idx="0">
-                  <c:v>방문</c:v>
+                  <c:v>실제 방문</c:v>
                 </c:pt>
               </c:strCache>
             </c:strRef>
@@ -588,7 +587,7 @@
               <a:lstStyle/>
               <a:p>
                 <a:pPr>
-                  <a:defRPr b="0" i="0" strike="noStrike" sz="900" u="none">
+                  <a:defRPr b="0" i="0" strike="noStrike" sz="800" u="none">
                     <a:solidFill>
                       <a:srgbClr val="0B0B0B"/>
                     </a:solidFill>
@@ -688,7 +687,7 @@
               <c:strCache>
                 <c:ptCount val="1"/>
                 <c:pt idx="0">
-                  <c:v>급감</c:v>
+                  <c:v>급감 구간</c:v>
                 </c:pt>
               </c:strCache>
             </c:strRef>
@@ -707,7 +706,7 @@
               <a:lstStyle/>
               <a:p>
                 <a:pPr>
-                  <a:defRPr b="0" i="0" strike="noStrike" sz="900" u="none">
+                  <a:defRPr b="0" i="0" strike="noStrike" sz="800" u="none">
                     <a:solidFill>
                       <a:srgbClr val="0B0B0B"/>
                     </a:solidFill>
@@ -807,14 +806,14 @@
               <c:strCache>
                 <c:ptCount val="1"/>
                 <c:pt idx="0">
-                  <c:v>신뢰 낮음</c:v>
+                  <c:v>실제 방문(신뢰 낮음)</c:v>
                 </c:pt>
               </c:strCache>
             </c:strRef>
           </c:tx>
           <c:spPr>
             <a:solidFill>
-              <a:srgbClr val="E3E8EA"/>
+              <a:srgbClr val="D5DBDE"/>
             </a:solidFill>
             <a:effectLst/>
           </c:spPr>
@@ -826,7 +825,7 @@
               <a:lstStyle/>
               <a:p>
                 <a:pPr>
-                  <a:defRPr b="0" i="0" strike="noStrike" sz="900" u="none">
+                  <a:defRPr b="0" i="0" strike="noStrike" sz="800" u="none">
                     <a:solidFill>
                       <a:srgbClr val="0B0B0B"/>
                     </a:solidFill>
@@ -917,6 +916,125 @@
             </c:numRef>
           </c:val>
         </c:ser>
+        <c:ser>
+          <c:idx val="3"/>
+          <c:order val="3"/>
+          <c:tx>
+            <c:strRef>
+              <c:f>Sheet1!$E$1</c:f>
+              <c:strCache>
+                <c:ptCount val="1"/>
+                <c:pt idx="0">
+                  <c:v>봇 추정</c:v>
+                </c:pt>
+              </c:strCache>
+            </c:strRef>
+          </c:tx>
+          <c:spPr>
+            <a:solidFill>
+              <a:srgbClr val="F0F2F3"/>
+            </a:solidFill>
+            <a:effectLst/>
+          </c:spPr>
+          <c:invertIfNegative val="0"/>
+          <c:dLbls>
+            <c:numFmt formatCode="#,##0;;;" sourceLinked="0"/>
+            <c:txPr>
+              <a:bodyPr/>
+              <a:lstStyle/>
+              <a:p>
+                <a:pPr>
+                  <a:defRPr b="0" i="0" strike="noStrike" sz="800" u="none">
+                    <a:solidFill>
+                      <a:srgbClr val="0B0B0B"/>
+                    </a:solidFill>
+                    <a:latin typeface="Arial"/>
+                  </a:defRPr>
+                </a:pPr>
+              </a:p>
+            </c:txPr>
+            <c:showLegendKey val="0"/>
+            <c:showVal val="1"/>
+            <c:showCatName val="0"/>
+            <c:showSerName val="0"/>
+            <c:showPercent val="0"/>
+            <c:showBubbleSize val="0"/>
+            <c:showLeaderLines val="0"/>
+          </c:dLbls>
+          <c:cat>
+            <c:multiLvlStrRef>
+              <c:f>Sheet1!$A$2:$A$10</c:f>
+              <c:multiLvlStrCache>
+                <c:ptCount val="9"/>
+                <c:lvl>
+                  <c:pt idx="0">
+                    <c:v>2015</c:v>
+                  </c:pt>
+                  <c:pt idx="1">
+                    <c:v>2018</c:v>
+                  </c:pt>
+                  <c:pt idx="2">
+                    <c:v>2020</c:v>
+                  </c:pt>
+                  <c:pt idx="3">
+                    <c:v>2021</c:v>
+                  </c:pt>
+                  <c:pt idx="4">
+                    <c:v>2022</c:v>
+                  </c:pt>
+                  <c:pt idx="5">
+                    <c:v>2023</c:v>
+                  </c:pt>
+                  <c:pt idx="6">
+                    <c:v>2024</c:v>
+                  </c:pt>
+                  <c:pt idx="7">
+                    <c:v>2025*</c:v>
+                  </c:pt>
+                  <c:pt idx="8">
+                    <c:v>2026*</c:v>
+                  </c:pt>
+                </c:lvl>
+              </c:multiLvlStrCache>
+            </c:multiLvlStrRef>
+          </c:cat>
+          <c:val>
+            <c:numRef>
+              <c:f>Sheet1!$E$2:$E$10</c:f>
+              <c:numCache>
+                <c:formatCode>General</c:formatCode>
+                <c:ptCount val="9"/>
+                <c:pt idx="0">
+                  <c:v>5269</c:v>
+                </c:pt>
+                <c:pt idx="1">
+                  <c:v>5076</c:v>
+                </c:pt>
+                <c:pt idx="2">
+                  <c:v>3702</c:v>
+                </c:pt>
+                <c:pt idx="3">
+                  <c:v>11931</c:v>
+                </c:pt>
+                <c:pt idx="4">
+                  <c:v>22391</c:v>
+                </c:pt>
+                <c:pt idx="5">
+                  <c:v>21942</c:v>
+                </c:pt>
+                <c:pt idx="6">
+                  <c:v>6640</c:v>
+                </c:pt>
+                <c:pt idx="7">
+                  <c:v>11564</c:v>
+                </c:pt>
+                <c:pt idx="8">
+                  <c:v>6402</c:v>
+                </c:pt>
+              </c:numCache>
+            </c:numRef>
+          </c:val>
+        </c:ser>
         <c:dLbls>
           <c:numFmt formatCode="#,##0;;;" sourceLinked="0"/>
           <c:txPr>
@@ -924,7 +1042,7 @@
             <a:lstStyle/>
             <a:p>
               <a:pPr>
-                <a:defRPr b="0" i="0" strike="noStrike" sz="900" u="none">
+                <a:defRPr b="0" i="0" strike="noStrike" sz="800" u="none">
                   <a:solidFill>
                     <a:srgbClr val="0B0B0B"/>
                   </a:solidFill>
@@ -1037,6 +1155,26 @@
         <a:effectLst/>
       </c:spPr>
     </c:plotArea>
+    <c:legend>
+      <c:legendPos val="b"/>
+      <c:overlay val="0"/>
+      <c:txPr>
+        <a:bodyPr/>
+        <a:lstStyle/>
+        <a:p>
+          <a:pPr>
+            <a:defRPr sz="850">
+              <a:solidFill>
+                <a:srgbClr val="0B0B0B"/>
+              </a:solidFill>
+              <a:latin typeface="Malgun Gothic"/>
+              <a:cs typeface="Malgun Gothic"/>
+            </a:defRPr>
+          </a:pPr>
+          <a:endParaRPr lang="en-US"/>
+        </a:p>
+      </c:txPr>
+    </c:legend>
     <c:plotVisOnly val="1"/>
     <c:dispBlanksAs val="span"/>
   </c:chart>
@@ -3923,94 +4061,6 @@
             <a:fld id="{F7021451-1387-4CA6-816F-3879F97B5CBC}" type="slidenum">
               <a:rPr lang="en-US"/>
               <a:t>13</a:t>
-            </a:fld>
-            <a:endParaRPr lang="en-US"/>
-          </a:p>
-        </p:txBody>
-      </p:sp>
-    </p:spTree>
-    <p:extLst>
-      <p:ext uri="{BB962C8B-B14F-4D97-AF65-F5344CB8AC3E}">
-        <p14:creationId xmlns:p14="http://schemas.microsoft.com/office/powerpoint/2010/main" val="1024086991"/>
-      </p:ext>
-    </p:extLst>
-  </p:cSld>
-  <p:clrMapOvr>
-    <a:masterClrMapping/>
-  </p:clrMapOvr>
-</p:notes>
-</file>
-
-<file path=ppt/notesSlides/notesSlide14.xml><?xml version="1.0" encoding="utf-8"?>
-<p:notes xmlns:a="http://schemas.openxmlformats.org/drawingml/2006/main" xmlns:r="http://schemas.openxmlformats.org/officeDocument/2006/relationships" xmlns:p="http://schemas.openxmlformats.org/presentationml/2006/main">
-  <p:cSld>
-    <p:spTree>
-      <p:nvGrpSpPr>
-        <p:cNvPr id="1" name=""/>
-        <p:cNvGrpSpPr/>
-        <p:nvPr/>
-      </p:nvGrpSpPr>
-      <p:grpSpPr>
-        <a:xfrm>
-          <a:off x="0" y="0"/>
-          <a:ext cx="0" cy="0"/>
-          <a:chOff x="0" y="0"/>
-          <a:chExt cx="0" cy="0"/>
-        </a:xfrm>
-      </p:grpSpPr>
-      <p:sp>
-        <p:nvSpPr>
-          <p:cNvPr id="2" name="Slide Image Placeholder 1"/>
-          <p:cNvSpPr>
-            <a:spLocks noGrp="1" noRot="1" noChangeAspect="1"/>
-          </p:cNvSpPr>
-          <p:nvPr>
-            <p:ph type="sldImg"/>
-          </p:nvPr>
-        </p:nvSpPr>
-        <p:spPr/>
-      </p:sp>
-      <p:sp>
-        <p:nvSpPr>
-          <p:cNvPr id="3" name="Notes Placeholder 2"/>
-          <p:cNvSpPr>
-            <a:spLocks noGrp="1"/>
-          </p:cNvSpPr>
-          <p:nvPr>
-            <p:ph type="body" idx="1"/>
-          </p:nvPr>
-        </p:nvSpPr>
-        <p:spPr/>
-        <p:txBody>
-          <a:bodyPr/>
-          <a:lstStyle/>
-          <a:p>
-            <a:r>
-              <a:rPr lang="en-US" dirty="0"/>
-              <a:t/>
-            </a:r>
-            <a:endParaRPr lang="en-US" dirty="0"/>
-          </a:p>
-        </p:txBody>
-      </p:sp>
-      <p:sp>
-        <p:nvSpPr>
-          <p:cNvPr id="4" name="Slide Number Placeholder 3"/>
-          <p:cNvSpPr>
-            <a:spLocks noGrp="1"/>
-          </p:cNvSpPr>
-          <p:nvPr>
-            <p:ph type="sldNum" sz="quarter" idx="10"/>
-          </p:nvPr>
-        </p:nvSpPr>
-        <p:spPr/>
-        <p:txBody>
-          <a:bodyPr/>
-          <a:lstStyle/>
-          <a:p>
-            <a:fld id="{F7021451-1387-4CA6-816F-3879F97B5CBC}" type="slidenum">
-              <a:rPr lang="en-US"/>
-              <a:t>14</a:t>
             </a:fld>
             <a:endParaRPr lang="en-US"/>
           </a:p>
@@ -5526,7 +5576,7 @@
                 <a:ea typeface="Malgun Gothic" pitchFamily="34" charset="-122"/>
                 <a:cs typeface="Malgun Gothic" pitchFamily="34" charset="-120"/>
               </a:rPr>
-              <a:t>검색어 유형별 클릭률</a:t>
+              <a:t>작년 정리로 광고비 −45%에 신청은 −17%</a:t>
             </a:r>
             <a:endParaRPr lang="en-US" sz="2100" dirty="0"/>
           </a:p>
@@ -5565,7 +5615,7 @@
                 <a:ea typeface="Malgun Gothic" pitchFamily="34" charset="-122"/>
                 <a:cs typeface="Malgun Gothic" pitchFamily="34" charset="-120"/>
               </a:rPr>
-              <a:t>괄호는 90일 클릭 수 · 클릭당 비용은 유형과 상관없이 2,000원 안팎 (지역명만 706원)</a:t>
+              <a:t>작년 정리 전후, 같은 90일. 2025년을 100으로</a:t>
             </a:r>
             <a:endParaRPr lang="en-US" sz="1000" dirty="0"/>
           </a:p>
@@ -5578,8 +5628,8 @@
           <p:nvPr/>
         </p:nvGraphicFramePr>
         <p:xfrm>
-          <a:off x="685800" y="1243584"/>
-          <a:ext cx="7772400" cy="3108960"/>
+          <a:off x="868680" y="1243584"/>
+          <a:ext cx="7406640" cy="3108960"/>
         </p:xfrm>
         <a:graphic xmlns:a="http://schemas.openxmlformats.org/drawingml/2006/main">
           <a:graphicData uri="http://schemas.openxmlformats.org/drawingml/2006/chart">
@@ -5643,7 +5693,7 @@
                 <a:ea typeface="Malgun Gothic" pitchFamily="34" charset="-122"/>
                 <a:cs typeface="Malgun Gothic" pitchFamily="34" charset="-120"/>
               </a:rPr>
-              <a:t>출처: 네이버 검색광고 검색어 보고서 2026-07-06 ~ 10-03(90일) · 전처리: 27,277행, 보고서 제목 줄 제거. 검색어 9,383개를 글자 규칙으로 유형 분류(클릭 난 231개는 검산)</a:t>
+              <a:t>출처: 네이버 검색광고 보고서 2025-07-02 ~ 09-29, 2026-07-06 ~ 10-03. 신청은 같은 기간 신청 게시판</a:t>
             </a:r>
             <a:endParaRPr lang="en-US" sz="800" dirty="0"/>
           </a:p>
@@ -5755,7 +5805,7 @@
                 <a:ea typeface="Malgun Gothic" pitchFamily="34" charset="-122"/>
                 <a:cs typeface="Malgun Gothic" pitchFamily="34" charset="-120"/>
               </a:rPr>
-              <a:t>1-6. 광고 키워드</a:t>
+              <a:t>2. 방문당 신청률</a:t>
             </a:r>
             <a:endParaRPr lang="en-US" sz="1000" dirty="0"/>
           </a:p>
@@ -5794,7 +5844,7 @@
                 <a:ea typeface="Malgun Gothic" pitchFamily="34" charset="-122"/>
                 <a:cs typeface="Malgun Gothic" pitchFamily="34" charset="-120"/>
               </a:rPr>
-              <a:t>작년 정리로 광고비 −45%에 신청은 −17%</a:t>
+              <a:t>신청률 4.6% → 2.1%. 광고로 온 4명 중 1명은 5초 안에 나간다</a:t>
             </a:r>
             <a:endParaRPr lang="en-US" sz="2100" dirty="0"/>
           </a:p>
@@ -5833,7 +5883,7 @@
                 <a:ea typeface="Malgun Gothic" pitchFamily="34" charset="-122"/>
                 <a:cs typeface="Malgun Gothic" pitchFamily="34" charset="-120"/>
               </a:rPr>
-              <a:t>작년 정리 전후, 같은 90일. 2025년을 100으로</a:t>
+              <a:t>GA4 광고 유입 120건의 검색어 유형별 체류(%) · 괄호는 사람 수</a:t>
             </a:r>
             <a:endParaRPr lang="en-US" sz="1000" dirty="0"/>
           </a:p>
@@ -5846,8 +5896,8 @@
           <p:nvPr/>
         </p:nvGraphicFramePr>
         <p:xfrm>
-          <a:off x="868680" y="1243584"/>
-          <a:ext cx="7406640" cy="3108960"/>
+          <a:off x="685800" y="1243584"/>
+          <a:ext cx="7772400" cy="2560320"/>
         </p:xfrm>
         <a:graphic xmlns:a="http://schemas.openxmlformats.org/drawingml/2006/main">
           <a:graphicData uri="http://schemas.openxmlformats.org/drawingml/2006/chart">
@@ -5863,6 +5913,84 @@
         </p:nvSpPr>
         <p:spPr>
           <a:xfrm>
+            <a:off x="411480" y="3913632"/>
+            <a:ext cx="8321040" cy="402336"/>
+          </a:xfrm>
+          <a:prstGeom prst="rect">
+            <a:avLst/>
+          </a:prstGeom>
+          <a:solidFill>
+            <a:srgbClr val="EEF4FB"/>
+          </a:solidFill>
+          <a:ln w="12700">
+            <a:solidFill>
+              <a:srgbClr val="EEF4FB"/>
+            </a:solidFill>
+            <a:prstDash val="solid"/>
+          </a:ln>
+        </p:spPr>
+      </p:sp>
+      <p:sp>
+        <p:nvSpPr>
+          <p:cNvPr id="7" name="Text 4"/>
+          <p:cNvSpPr txBox="1"/>
+          <p:nvPr/>
+        </p:nvSpPr>
+        <p:spPr>
+          <a:xfrm>
+            <a:off x="548640" y="3913632"/>
+            <a:ext cx="8046720" cy="402336"/>
+          </a:xfrm>
+          <a:prstGeom prst="rect">
+            <a:avLst/>
+          </a:prstGeom>
+          <a:noFill/>
+          <a:ln/>
+        </p:spPr>
+        <p:txBody>
+          <a:bodyPr wrap="square" lIns="0" tIns="0" rIns="0" bIns="0" rtlCol="0" anchor="ctr"/>
+          <a:lstStyle/>
+          <a:p>
+            <a:pPr indent="0" marL="0">
+              <a:buNone/>
+            </a:pPr>
+            <a:r>
+              <a:rPr lang="en-US" sz="1150" b="1" dirty="0">
+                <a:solidFill>
+                  <a:srgbClr val="2A78D6"/>
+                </a:solidFill>
+                <a:latin typeface="Malgun Gothic" pitchFamily="34" charset="0"/>
+                <a:ea typeface="Malgun Gothic" pitchFamily="34" charset="-122"/>
+                <a:cs typeface="Malgun Gothic" pitchFamily="34" charset="-120"/>
+              </a:rPr>
+              <a:t>action item   </a:t>
+            </a:r>
+            <a:pPr indent="0" marL="0">
+              <a:buNone/>
+            </a:pPr>
+            <a:r>
+              <a:rPr lang="en-US" sz="1150" dirty="0">
+                <a:solidFill>
+                  <a:srgbClr val="0B0B0B"/>
+                </a:solidFill>
+                <a:latin typeface="Malgun Gothic" pitchFamily="34" charset="0"/>
+                <a:ea typeface="Malgun Gothic" pitchFamily="34" charset="-122"/>
+                <a:cs typeface="Malgun Gothic" pitchFamily="34" charset="-120"/>
+              </a:rPr>
+              <a:t>18초 안에 "누가·무엇을·무료로", 읽기 끝에 간편 신청</a:t>
+            </a:r>
+            <a:endParaRPr lang="en-US" sz="1150" dirty="0"/>
+          </a:p>
+        </p:txBody>
+      </p:sp>
+      <p:sp>
+        <p:nvSpPr>
+          <p:cNvPr id="8" name="Shape 5"/>
+          <p:cNvSpPr/>
+          <p:nvPr/>
+        </p:nvSpPr>
+        <p:spPr>
+          <a:xfrm>
             <a:off x="411480" y="4480560"/>
             <a:ext cx="8321040" cy="0"/>
           </a:xfrm>
@@ -5880,7 +6008,7 @@
       </p:sp>
       <p:sp>
         <p:nvSpPr>
-          <p:cNvPr id="7" name="Text 4"/>
+          <p:cNvPr id="9" name="Text 6"/>
           <p:cNvSpPr txBox="1"/>
           <p:nvPr/>
         </p:nvSpPr>
@@ -5911,7 +6039,7 @@
                 <a:ea typeface="Malgun Gothic" pitchFamily="34" charset="-122"/>
                 <a:cs typeface="Malgun Gothic" pitchFamily="34" charset="-120"/>
               </a:rPr>
-              <a:t>출처: 네이버 검색광고 보고서 2025-07-02 ~ 09-29, 2026-07-06 ~ 10-03. 신청은 같은 기간 신청 게시판</a:t>
+              <a:t>출처: 신청률 = 알림 문자 신청 ÷ 봇을 뺀 실제 방문(2020 6,648, 2022 3,397). 체류는 GA4 2026-09-02 ~ 10-01, 광고 주소로 온 120세션</a:t>
             </a:r>
             <a:endParaRPr lang="en-US" sz="800" dirty="0"/>
           </a:p>
@@ -6023,7 +6151,7 @@
                 <a:ea typeface="Malgun Gothic" pitchFamily="34" charset="-122"/>
                 <a:cs typeface="Malgun Gothic" pitchFamily="34" charset="-120"/>
               </a:rPr>
-              <a:t>2. 방문당 신청률</a:t>
+              <a:t>3. 수임 전환율</a:t>
             </a:r>
             <a:endParaRPr lang="en-US" sz="1000" dirty="0"/>
           </a:p>
@@ -6062,7 +6190,7 @@
                 <a:ea typeface="Malgun Gothic" pitchFamily="34" charset="-122"/>
                 <a:cs typeface="Malgun Gothic" pitchFamily="34" charset="-120"/>
               </a:rPr>
-              <a:t>신청률 4.6% → 2.1%. 광고로 온 4명 중 1명은 5초 안에 나간다</a:t>
+              <a:t>수임 전환율은 기록이 없다 — 신청 뒤는 전화</a:t>
             </a:r>
             <a:endParaRPr lang="en-US" sz="2100" dirty="0"/>
           </a:p>
@@ -6076,8 +6204,8 @@
         </p:nvSpPr>
         <p:spPr>
           <a:xfrm>
-            <a:off x="411480" y="987552"/>
-            <a:ext cx="8321040" cy="237744"/>
+            <a:off x="411480" y="1097280"/>
+            <a:ext cx="8321040" cy="274320"/>
           </a:xfrm>
           <a:prstGeom prst="rect">
             <a:avLst/>
@@ -6093,39 +6221,275 @@
               <a:buNone/>
             </a:pPr>
             <a:r>
-              <a:rPr lang="en-US" sz="1000" dirty="0">
-                <a:solidFill>
-                  <a:srgbClr val="52514E"/>
+              <a:rPr lang="en-US" sz="1300" b="1" dirty="0">
+                <a:solidFill>
+                  <a:srgbClr val="2A78D6"/>
                 </a:solidFill>
                 <a:latin typeface="Malgun Gothic" pitchFamily="34" charset="0"/>
                 <a:ea typeface="Malgun Gothic" pitchFamily="34" charset="-122"/>
                 <a:cs typeface="Malgun Gothic" pitchFamily="34" charset="-120"/>
               </a:rPr>
-              <a:t>GA4 광고 유입 120건의 검색어 유형별 체류(%) · 괄호는 사람 수</a:t>
+              <a:t>측정 보완</a:t>
             </a:r>
-            <a:endParaRPr lang="en-US" sz="1000" dirty="0"/>
-          </a:p>
-        </p:txBody>
-      </p:sp>
-      <p:graphicFrame>
-        <p:nvGraphicFramePr>
-          <p:cNvPr id="5" name="Chart 0" descr=""/>
-          <p:cNvGraphicFramePr/>
-          <p:nvPr/>
-        </p:nvGraphicFramePr>
-        <p:xfrm>
-          <a:off x="685800" y="1243584"/>
-          <a:ext cx="7772400" cy="2560320"/>
-        </p:xfrm>
-        <a:graphic xmlns:a="http://schemas.openxmlformats.org/drawingml/2006/main">
-          <a:graphicData uri="http://schemas.openxmlformats.org/drawingml/2006/chart">
-            <c:chart xmlns:c="http://schemas.openxmlformats.org/drawingml/2006/chart" r:id="rId1"/>
-          </a:graphicData>
-        </a:graphic>
-      </p:graphicFrame>
-      <p:sp>
-        <p:nvSpPr>
-          <p:cNvPr id="6" name="Shape 3"/>
+            <a:endParaRPr lang="en-US" sz="1300" dirty="0"/>
+          </a:p>
+        </p:txBody>
+      </p:sp>
+      <p:sp>
+        <p:nvSpPr>
+          <p:cNvPr id="5" name="Shape 3"/>
+          <p:cNvSpPr/>
+          <p:nvPr/>
+        </p:nvSpPr>
+        <p:spPr>
+          <a:xfrm>
+            <a:off x="411480" y="1463040"/>
+            <a:ext cx="3977640" cy="2103120"/>
+          </a:xfrm>
+          <a:prstGeom prst="rect">
+            <a:avLst/>
+          </a:prstGeom>
+          <a:solidFill>
+            <a:srgbClr val="F4F6F7"/>
+          </a:solidFill>
+          <a:ln w="12700">
+            <a:solidFill>
+              <a:srgbClr val="F4F6F7"/>
+            </a:solidFill>
+            <a:prstDash val="solid"/>
+          </a:ln>
+        </p:spPr>
+      </p:sp>
+      <p:sp>
+        <p:nvSpPr>
+          <p:cNvPr id="6" name="Text 4"/>
+          <p:cNvSpPr txBox="1"/>
+          <p:nvPr/>
+        </p:nvSpPr>
+        <p:spPr>
+          <a:xfrm>
+            <a:off x="594360" y="1572768"/>
+            <a:ext cx="3611880" cy="365760"/>
+          </a:xfrm>
+          <a:prstGeom prst="rect">
+            <a:avLst/>
+          </a:prstGeom>
+          <a:noFill/>
+          <a:ln/>
+        </p:spPr>
+        <p:txBody>
+          <a:bodyPr wrap="square" lIns="0" tIns="0" rIns="0" bIns="0" rtlCol="0" anchor="t"/>
+          <a:lstStyle/>
+          <a:p>
+            <a:pPr indent="0" marL="0">
+              <a:buNone/>
+            </a:pPr>
+            <a:r>
+              <a:rPr lang="en-US" sz="1200" b="1" dirty="0">
+                <a:solidFill>
+                  <a:srgbClr val="0B0B0B"/>
+                </a:solidFill>
+                <a:latin typeface="Malgun Gothic" pitchFamily="34" charset="0"/>
+                <a:ea typeface="Malgun Gothic" pitchFamily="34" charset="-122"/>
+                <a:cs typeface="Malgun Gothic" pitchFamily="34" charset="-120"/>
+              </a:rPr>
+              <a:t>광고 유입 → 키워드광고 유입 신청자</a:t>
+            </a:r>
+            <a:endParaRPr lang="en-US" sz="1200" dirty="0"/>
+          </a:p>
+        </p:txBody>
+      </p:sp>
+      <p:sp>
+        <p:nvSpPr>
+          <p:cNvPr id="7" name="Text 5"/>
+          <p:cNvSpPr txBox="1"/>
+          <p:nvPr/>
+        </p:nvSpPr>
+        <p:spPr>
+          <a:xfrm>
+            <a:off x="594360" y="2011680"/>
+            <a:ext cx="3611880" cy="1371600"/>
+          </a:xfrm>
+          <a:prstGeom prst="rect">
+            <a:avLst/>
+          </a:prstGeom>
+          <a:noFill/>
+          <a:ln/>
+        </p:spPr>
+        <p:txBody>
+          <a:bodyPr wrap="square" lIns="0" tIns="0" rIns="0" bIns="0" rtlCol="0" anchor="t"/>
+          <a:lstStyle/>
+          <a:p>
+            <a:pPr indent="0" marL="0">
+              <a:spcAft>
+                <a:spcPts val="300"/>
+              </a:spcAft>
+              <a:buNone/>
+            </a:pPr>
+            <a:r>
+              <a:rPr lang="en-US" sz="1200" dirty="0">
+                <a:solidFill>
+                  <a:srgbClr val="0B0B0B"/>
+                </a:solidFill>
+                <a:latin typeface="Malgun Gothic" pitchFamily="34" charset="0"/>
+                <a:ea typeface="Malgun Gothic" pitchFamily="34" charset="-122"/>
+                <a:cs typeface="Malgun Gothic" pitchFamily="34" charset="-120"/>
+              </a:rPr>
+              <a:t>네이버 전환 추적 코드 설치</a:t>
+            </a:r>
+            <a:endParaRPr lang="en-US" sz="1200" dirty="0"/>
+          </a:p>
+          <a:p>
+            <a:pPr indent="0" marL="0">
+              <a:spcAft>
+                <a:spcPts val="300"/>
+              </a:spcAft>
+              <a:buNone/>
+            </a:pPr>
+            <a:r>
+              <a:rPr lang="en-US" sz="1200" dirty="0">
+                <a:solidFill>
+                  <a:srgbClr val="0B0B0B"/>
+                </a:solidFill>
+                <a:latin typeface="Malgun Gothic" pitchFamily="34" charset="0"/>
+                <a:ea typeface="Malgun Gothic" pitchFamily="34" charset="-122"/>
+                <a:cs typeface="Malgun Gothic" pitchFamily="34" charset="-120"/>
+              </a:rPr>
+              <a:t>신청 → 승인 → 설치</a:t>
+            </a:r>
+            <a:endParaRPr lang="en-US" sz="1200" dirty="0"/>
+          </a:p>
+        </p:txBody>
+      </p:sp>
+      <p:sp>
+        <p:nvSpPr>
+          <p:cNvPr id="8" name="Shape 6"/>
+          <p:cNvSpPr/>
+          <p:nvPr/>
+        </p:nvSpPr>
+        <p:spPr>
+          <a:xfrm>
+            <a:off x="4754880" y="1463040"/>
+            <a:ext cx="3977640" cy="2103120"/>
+          </a:xfrm>
+          <a:prstGeom prst="rect">
+            <a:avLst/>
+          </a:prstGeom>
+          <a:solidFill>
+            <a:srgbClr val="F4F6F7"/>
+          </a:solidFill>
+          <a:ln w="12700">
+            <a:solidFill>
+              <a:srgbClr val="F4F6F7"/>
+            </a:solidFill>
+            <a:prstDash val="solid"/>
+          </a:ln>
+        </p:spPr>
+      </p:sp>
+      <p:sp>
+        <p:nvSpPr>
+          <p:cNvPr id="9" name="Text 7"/>
+          <p:cNvSpPr txBox="1"/>
+          <p:nvPr/>
+        </p:nvSpPr>
+        <p:spPr>
+          <a:xfrm>
+            <a:off x="4937760" y="1572768"/>
+            <a:ext cx="3611880" cy="365760"/>
+          </a:xfrm>
+          <a:prstGeom prst="rect">
+            <a:avLst/>
+          </a:prstGeom>
+          <a:noFill/>
+          <a:ln/>
+        </p:spPr>
+        <p:txBody>
+          <a:bodyPr wrap="square" lIns="0" tIns="0" rIns="0" bIns="0" rtlCol="0" anchor="t"/>
+          <a:lstStyle/>
+          <a:p>
+            <a:pPr indent="0" marL="0">
+              <a:buNone/>
+            </a:pPr>
+            <a:r>
+              <a:rPr lang="en-US" sz="1200" b="1" dirty="0">
+                <a:solidFill>
+                  <a:srgbClr val="0B0B0B"/>
+                </a:solidFill>
+                <a:latin typeface="Malgun Gothic" pitchFamily="34" charset="0"/>
+                <a:ea typeface="Malgun Gothic" pitchFamily="34" charset="-122"/>
+                <a:cs typeface="Malgun Gothic" pitchFamily="34" charset="-120"/>
+              </a:rPr>
+              <a:t>전화로 바로 거는 사람</a:t>
+            </a:r>
+            <a:endParaRPr lang="en-US" sz="1200" dirty="0"/>
+          </a:p>
+        </p:txBody>
+      </p:sp>
+      <p:sp>
+        <p:nvSpPr>
+          <p:cNvPr id="10" name="Text 8"/>
+          <p:cNvSpPr txBox="1"/>
+          <p:nvPr/>
+        </p:nvSpPr>
+        <p:spPr>
+          <a:xfrm>
+            <a:off x="4937760" y="2011680"/>
+            <a:ext cx="3611880" cy="1371600"/>
+          </a:xfrm>
+          <a:prstGeom prst="rect">
+            <a:avLst/>
+          </a:prstGeom>
+          <a:noFill/>
+          <a:ln/>
+        </p:spPr>
+        <p:txBody>
+          <a:bodyPr wrap="square" lIns="0" tIns="0" rIns="0" bIns="0" rtlCol="0" anchor="t"/>
+          <a:lstStyle/>
+          <a:p>
+            <a:pPr indent="0" marL="0">
+              <a:spcAft>
+                <a:spcPts val="300"/>
+              </a:spcAft>
+              <a:buNone/>
+            </a:pPr>
+            <a:r>
+              <a:rPr lang="en-US" sz="1200" dirty="0">
+                <a:solidFill>
+                  <a:srgbClr val="0B0B0B"/>
+                </a:solidFill>
+                <a:latin typeface="Malgun Gothic" pitchFamily="34" charset="0"/>
+                <a:ea typeface="Malgun Gothic" pitchFamily="34" charset="-122"/>
+                <a:cs typeface="Malgun Gothic" pitchFamily="34" charset="-120"/>
+              </a:rPr>
+              <a:t>휴대폰 번호 클릭 기록</a:t>
+            </a:r>
+            <a:endParaRPr lang="en-US" sz="1200" dirty="0"/>
+          </a:p>
+          <a:p>
+            <a:pPr indent="0" marL="0">
+              <a:spcAft>
+                <a:spcPts val="300"/>
+              </a:spcAft>
+              <a:buNone/>
+            </a:pPr>
+            <a:r>
+              <a:rPr lang="en-US" sz="1200" dirty="0">
+                <a:solidFill>
+                  <a:srgbClr val="0B0B0B"/>
+                </a:solidFill>
+                <a:latin typeface="Malgun Gothic" pitchFamily="34" charset="0"/>
+                <a:ea typeface="Malgun Gothic" pitchFamily="34" charset="-122"/>
+                <a:cs typeface="Malgun Gothic" pitchFamily="34" charset="-120"/>
+              </a:rPr>
+              <a:t>사이트 전용 착신 번호</a:t>
+            </a:r>
+            <a:endParaRPr lang="en-US" sz="1200" dirty="0"/>
+          </a:p>
+        </p:txBody>
+      </p:sp>
+      <p:sp>
+        <p:nvSpPr>
+          <p:cNvPr id="11" name="Shape 9"/>
           <p:cNvSpPr/>
           <p:nvPr/>
         </p:nvSpPr>
@@ -6150,7 +6514,7 @@
       </p:sp>
       <p:sp>
         <p:nvSpPr>
-          <p:cNvPr id="7" name="Text 4"/>
+          <p:cNvPr id="12" name="Text 10"/>
           <p:cNvSpPr txBox="1"/>
           <p:nvPr/>
         </p:nvSpPr>
@@ -6195,7 +6559,7 @@
                 <a:ea typeface="Malgun Gothic" pitchFamily="34" charset="-122"/>
                 <a:cs typeface="Malgun Gothic" pitchFamily="34" charset="-120"/>
               </a:rPr>
-              <a:t>18초 안에 "누가·무엇을·무료로", 읽기 끝에 간편 신청</a:t>
+              <a:t>신청마다 수임 여부 기록</a:t>
             </a:r>
             <a:endParaRPr lang="en-US" sz="1150" dirty="0"/>
           </a:p>
@@ -6203,7 +6567,7 @@
       </p:sp>
       <p:sp>
         <p:nvSpPr>
-          <p:cNvPr id="8" name="Shape 5"/>
+          <p:cNvPr id="13" name="Shape 11"/>
           <p:cNvSpPr/>
           <p:nvPr/>
         </p:nvSpPr>
@@ -6226,7 +6590,7 @@
       </p:sp>
       <p:sp>
         <p:nvSpPr>
-          <p:cNvPr id="9" name="Text 6"/>
+          <p:cNvPr id="14" name="Text 12"/>
           <p:cNvSpPr txBox="1"/>
           <p:nvPr/>
         </p:nvSpPr>
@@ -6257,7 +6621,7 @@
                 <a:ea typeface="Malgun Gothic" pitchFamily="34" charset="-122"/>
                 <a:cs typeface="Malgun Gothic" pitchFamily="34" charset="-120"/>
               </a:rPr>
-              <a:t>출처: 신청률 = 알림 문자 신청 ÷ 봇을 뺀 실제 방문(2020 6,648, 2022 3,397). 체류는 GA4 2026-09-02 ~ 10-01, 광고 주소로 온 120세션</a:t>
+              <a:t>출처: 변리사 답(진단은 간편·상세 모두 전화, 수임 10~20%는 기억에 의한 값)</a:t>
             </a:r>
             <a:endParaRPr lang="en-US" sz="800" dirty="0"/>
           </a:p>
@@ -6369,7 +6733,7 @@
                 <a:ea typeface="Malgun Gothic" pitchFamily="34" charset="-122"/>
                 <a:cs typeface="Malgun Gothic" pitchFamily="34" charset="-120"/>
               </a:rPr>
-              <a:t>3. 수임 전환율</a:t>
+              <a:t>4. 수임당 매출</a:t>
             </a:r>
             <a:endParaRPr lang="en-US" sz="1000" dirty="0"/>
           </a:p>
@@ -6408,7 +6772,7 @@
                 <a:ea typeface="Malgun Gothic" pitchFamily="34" charset="-122"/>
                 <a:cs typeface="Malgun Gothic" pitchFamily="34" charset="-120"/>
               </a:rPr>
-              <a:t>수임 전환율은 기록이 없다 — 신청 뒤는 전화</a:t>
+              <a:t>분쟁은 신청의 6%지만 수수료는 출원의 7배</a:t>
             </a:r>
             <a:endParaRPr lang="en-US" sz="2100" dirty="0"/>
           </a:p>
@@ -6416,53 +6780,14 @@
       </p:sp>
       <p:sp>
         <p:nvSpPr>
-          <p:cNvPr id="4" name="Text 2"/>
-          <p:cNvSpPr txBox="1"/>
-          <p:nvPr/>
-        </p:nvSpPr>
-        <p:spPr>
-          <a:xfrm>
-            <a:off x="411480" y="1097280"/>
-            <a:ext cx="8321040" cy="274320"/>
-          </a:xfrm>
-          <a:prstGeom prst="rect">
-            <a:avLst/>
-          </a:prstGeom>
-          <a:noFill/>
-          <a:ln/>
-        </p:spPr>
-        <p:txBody>
-          <a:bodyPr wrap="square" lIns="0" tIns="0" rIns="0" bIns="0" rtlCol="0" anchor="t"/>
-          <a:lstStyle/>
-          <a:p>
-            <a:pPr indent="0" marL="0">
-              <a:buNone/>
-            </a:pPr>
-            <a:r>
-              <a:rPr lang="en-US" sz="1300" b="1" dirty="0">
-                <a:solidFill>
-                  <a:srgbClr val="2A78D6"/>
-                </a:solidFill>
-                <a:latin typeface="Malgun Gothic" pitchFamily="34" charset="0"/>
-                <a:ea typeface="Malgun Gothic" pitchFamily="34" charset="-122"/>
-                <a:cs typeface="Malgun Gothic" pitchFamily="34" charset="-120"/>
-              </a:rPr>
-              <a:t>측정 보완</a:t>
-            </a:r>
-            <a:endParaRPr lang="en-US" sz="1300" dirty="0"/>
-          </a:p>
-        </p:txBody>
-      </p:sp>
-      <p:sp>
-        <p:nvSpPr>
-          <p:cNvPr id="5" name="Shape 3"/>
+          <p:cNvPr id="4" name="Shape 2"/>
           <p:cNvSpPr/>
           <p:nvPr/>
         </p:nvSpPr>
         <p:spPr>
           <a:xfrm>
-            <a:off x="411480" y="1463040"/>
-            <a:ext cx="3977640" cy="2103120"/>
+            <a:off x="411480" y="1188720"/>
+            <a:ext cx="3977640" cy="1097280"/>
           </a:xfrm>
           <a:prstGeom prst="rect">
             <a:avLst/>
@@ -6480,14 +6805,14 @@
       </p:sp>
       <p:sp>
         <p:nvSpPr>
-          <p:cNvPr id="6" name="Text 4"/>
+          <p:cNvPr id="5" name="Text 3"/>
           <p:cNvSpPr txBox="1"/>
           <p:nvPr/>
         </p:nvSpPr>
         <p:spPr>
           <a:xfrm>
-            <a:off x="594360" y="1572768"/>
-            <a:ext cx="3611880" cy="365760"/>
+            <a:off x="548640" y="1280160"/>
+            <a:ext cx="3703320" cy="219456"/>
           </a:xfrm>
           <a:prstGeom prst="rect">
             <a:avLst/>
@@ -6496,37 +6821,37 @@
           <a:ln/>
         </p:spPr>
         <p:txBody>
-          <a:bodyPr wrap="square" lIns="0" tIns="0" rIns="0" bIns="0" rtlCol="0" anchor="t"/>
+          <a:bodyPr wrap="square" lIns="0" tIns="0" rIns="0" bIns="0" rtlCol="0" anchor="ctr"/>
           <a:lstStyle/>
           <a:p>
             <a:pPr indent="0" marL="0">
               <a:buNone/>
             </a:pPr>
             <a:r>
-              <a:rPr lang="en-US" sz="1200" b="1" dirty="0">
-                <a:solidFill>
-                  <a:srgbClr val="0B0B0B"/>
+              <a:rPr lang="en-US" sz="1000" b="1" dirty="0">
+                <a:solidFill>
+                  <a:srgbClr val="52514E"/>
                 </a:solidFill>
                 <a:latin typeface="Malgun Gothic" pitchFamily="34" charset="0"/>
                 <a:ea typeface="Malgun Gothic" pitchFamily="34" charset="-122"/>
                 <a:cs typeface="Malgun Gothic" pitchFamily="34" charset="-120"/>
               </a:rPr>
-              <a:t>광고 유입 → 키워드광고 유입 신청자</a:t>
+              <a:t>출원</a:t>
             </a:r>
-            <a:endParaRPr lang="en-US" sz="1200" dirty="0"/>
-          </a:p>
-        </p:txBody>
-      </p:sp>
-      <p:sp>
-        <p:nvSpPr>
-          <p:cNvPr id="7" name="Text 5"/>
+            <a:endParaRPr lang="en-US" sz="1000" dirty="0"/>
+          </a:p>
+        </p:txBody>
+      </p:sp>
+      <p:sp>
+        <p:nvSpPr>
+          <p:cNvPr id="6" name="Text 4"/>
           <p:cNvSpPr txBox="1"/>
           <p:nvPr/>
         </p:nvSpPr>
         <p:spPr>
           <a:xfrm>
-            <a:off x="594360" y="2011680"/>
-            <a:ext cx="3611880" cy="1371600"/>
+            <a:off x="548640" y="1517904"/>
+            <a:ext cx="3703320" cy="420624"/>
           </a:xfrm>
           <a:prstGeom prst="rect">
             <a:avLst/>
@@ -6535,47 +6860,63 @@
           <a:ln/>
         </p:spPr>
         <p:txBody>
-          <a:bodyPr wrap="square" lIns="0" tIns="0" rIns="0" bIns="0" rtlCol="0" anchor="t"/>
+          <a:bodyPr wrap="square" lIns="0" tIns="0" rIns="0" bIns="0" rtlCol="0" anchor="ctr"/>
           <a:lstStyle/>
           <a:p>
             <a:pPr indent="0" marL="0">
-              <a:spcAft>
-                <a:spcPts val="300"/>
-              </a:spcAft>
               <a:buNone/>
             </a:pPr>
             <a:r>
-              <a:rPr lang="en-US" sz="1200" dirty="0">
-                <a:solidFill>
-                  <a:srgbClr val="0B0B0B"/>
+              <a:rPr lang="en-US" sz="1800" b="1" dirty="0">
+                <a:solidFill>
+                  <a:srgbClr val="2A78D6"/>
                 </a:solidFill>
                 <a:latin typeface="Malgun Gothic" pitchFamily="34" charset="0"/>
                 <a:ea typeface="Malgun Gothic" pitchFamily="34" charset="-122"/>
                 <a:cs typeface="Malgun Gothic" pitchFamily="34" charset="-120"/>
               </a:rPr>
-              <a:t>네이버 전환 추적 코드 설치</a:t>
+              <a:t>300만 원</a:t>
             </a:r>
-            <a:endParaRPr lang="en-US" sz="1200" dirty="0"/>
-          </a:p>
+            <a:endParaRPr lang="en-US" sz="1800" dirty="0"/>
+          </a:p>
+        </p:txBody>
+      </p:sp>
+      <p:sp>
+        <p:nvSpPr>
+          <p:cNvPr id="7" name="Text 5"/>
+          <p:cNvSpPr txBox="1"/>
+          <p:nvPr/>
+        </p:nvSpPr>
+        <p:spPr>
+          <a:xfrm>
+            <a:off x="548640" y="1956816"/>
+            <a:ext cx="3703320" cy="274320"/>
+          </a:xfrm>
+          <a:prstGeom prst="rect">
+            <a:avLst/>
+          </a:prstGeom>
+          <a:noFill/>
+          <a:ln/>
+        </p:spPr>
+        <p:txBody>
+          <a:bodyPr wrap="square" lIns="0" tIns="0" rIns="0" bIns="0" rtlCol="0" anchor="t"/>
+          <a:lstStyle/>
           <a:p>
             <a:pPr indent="0" marL="0">
-              <a:spcAft>
-                <a:spcPts val="300"/>
-              </a:spcAft>
               <a:buNone/>
             </a:pPr>
             <a:r>
-              <a:rPr lang="en-US" sz="1200" dirty="0">
-                <a:solidFill>
-                  <a:srgbClr val="0B0B0B"/>
+              <a:rPr lang="en-US" sz="900" dirty="0">
+                <a:solidFill>
+                  <a:srgbClr val="52514E"/>
                 </a:solidFill>
                 <a:latin typeface="Malgun Gothic" pitchFamily="34" charset="0"/>
                 <a:ea typeface="Malgun Gothic" pitchFamily="34" charset="-122"/>
                 <a:cs typeface="Malgun Gothic" pitchFamily="34" charset="-120"/>
               </a:rPr>
-              <a:t>신청 → 승인 → 설치</a:t>
+              <a:t>신청의 94% (2,021건)</a:t>
             </a:r>
-            <a:endParaRPr lang="en-US" sz="1200" dirty="0"/>
+            <a:endParaRPr lang="en-US" sz="900" dirty="0"/>
           </a:p>
         </p:txBody>
       </p:sp>
@@ -6587,8 +6928,8 @@
         </p:nvSpPr>
         <p:spPr>
           <a:xfrm>
-            <a:off x="4754880" y="1463040"/>
-            <a:ext cx="3977640" cy="2103120"/>
+            <a:off x="4754880" y="1188720"/>
+            <a:ext cx="3977640" cy="1097280"/>
           </a:xfrm>
           <a:prstGeom prst="rect">
             <a:avLst/>
@@ -6612,8 +6953,8 @@
         </p:nvSpPr>
         <p:spPr>
           <a:xfrm>
-            <a:off x="4937760" y="1572768"/>
-            <a:ext cx="3611880" cy="365760"/>
+            <a:off x="4892040" y="1280160"/>
+            <a:ext cx="3703320" cy="219456"/>
           </a:xfrm>
           <a:prstGeom prst="rect">
             <a:avLst/>
@@ -6622,24 +6963,24 @@
           <a:ln/>
         </p:spPr>
         <p:txBody>
-          <a:bodyPr wrap="square" lIns="0" tIns="0" rIns="0" bIns="0" rtlCol="0" anchor="t"/>
+          <a:bodyPr wrap="square" lIns="0" tIns="0" rIns="0" bIns="0" rtlCol="0" anchor="ctr"/>
           <a:lstStyle/>
           <a:p>
             <a:pPr indent="0" marL="0">
               <a:buNone/>
             </a:pPr>
             <a:r>
-              <a:rPr lang="en-US" sz="1200" b="1" dirty="0">
-                <a:solidFill>
-                  <a:srgbClr val="0B0B0B"/>
+              <a:rPr lang="en-US" sz="1000" b="1" dirty="0">
+                <a:solidFill>
+                  <a:srgbClr val="52514E"/>
                 </a:solidFill>
                 <a:latin typeface="Malgun Gothic" pitchFamily="34" charset="0"/>
                 <a:ea typeface="Malgun Gothic" pitchFamily="34" charset="-122"/>
                 <a:cs typeface="Malgun Gothic" pitchFamily="34" charset="-120"/>
               </a:rPr>
-              <a:t>전화로 바로 거는 사람</a:t>
+              <a:t>분쟁</a:t>
             </a:r>
-            <a:endParaRPr lang="en-US" sz="1200" dirty="0"/>
+            <a:endParaRPr lang="en-US" sz="1000" dirty="0"/>
           </a:p>
         </p:txBody>
       </p:sp>
@@ -6651,8 +6992,8 @@
         </p:nvSpPr>
         <p:spPr>
           <a:xfrm>
-            <a:off x="4937760" y="2011680"/>
-            <a:ext cx="3611880" cy="1371600"/>
+            <a:off x="4892040" y="1517904"/>
+            <a:ext cx="3703320" cy="420624"/>
           </a:xfrm>
           <a:prstGeom prst="rect">
             <a:avLst/>
@@ -6661,59 +7002,75 @@
           <a:ln/>
         </p:spPr>
         <p:txBody>
-          <a:bodyPr wrap="square" lIns="0" tIns="0" rIns="0" bIns="0" rtlCol="0" anchor="t"/>
+          <a:bodyPr wrap="square" lIns="0" tIns="0" rIns="0" bIns="0" rtlCol="0" anchor="ctr"/>
           <a:lstStyle/>
           <a:p>
             <a:pPr indent="0" marL="0">
-              <a:spcAft>
-                <a:spcPts val="300"/>
-              </a:spcAft>
               <a:buNone/>
             </a:pPr>
             <a:r>
-              <a:rPr lang="en-US" sz="1200" dirty="0">
-                <a:solidFill>
-                  <a:srgbClr val="0B0B0B"/>
+              <a:rPr lang="en-US" sz="1800" b="1" dirty="0">
+                <a:solidFill>
+                  <a:srgbClr val="EB6834"/>
                 </a:solidFill>
                 <a:latin typeface="Malgun Gothic" pitchFamily="34" charset="0"/>
                 <a:ea typeface="Malgun Gothic" pitchFamily="34" charset="-122"/>
                 <a:cs typeface="Malgun Gothic" pitchFamily="34" charset="-120"/>
               </a:rPr>
-              <a:t>휴대폰 번호 클릭 기록</a:t>
+              <a:t>2,000만 원</a:t>
             </a:r>
-            <a:endParaRPr lang="en-US" sz="1200" dirty="0"/>
-          </a:p>
+            <a:endParaRPr lang="en-US" sz="1800" dirty="0"/>
+          </a:p>
+        </p:txBody>
+      </p:sp>
+      <p:sp>
+        <p:nvSpPr>
+          <p:cNvPr id="11" name="Text 9"/>
+          <p:cNvSpPr txBox="1"/>
+          <p:nvPr/>
+        </p:nvSpPr>
+        <p:spPr>
+          <a:xfrm>
+            <a:off x="4892040" y="1956816"/>
+            <a:ext cx="3703320" cy="274320"/>
+          </a:xfrm>
+          <a:prstGeom prst="rect">
+            <a:avLst/>
+          </a:prstGeom>
+          <a:noFill/>
+          <a:ln/>
+        </p:spPr>
+        <p:txBody>
+          <a:bodyPr wrap="square" lIns="0" tIns="0" rIns="0" bIns="0" rtlCol="0" anchor="t"/>
+          <a:lstStyle/>
           <a:p>
             <a:pPr indent="0" marL="0">
-              <a:spcAft>
-                <a:spcPts val="300"/>
-              </a:spcAft>
               <a:buNone/>
             </a:pPr>
             <a:r>
-              <a:rPr lang="en-US" sz="1200" dirty="0">
-                <a:solidFill>
-                  <a:srgbClr val="0B0B0B"/>
+              <a:rPr lang="en-US" sz="900" dirty="0">
+                <a:solidFill>
+                  <a:srgbClr val="52514E"/>
                 </a:solidFill>
                 <a:latin typeface="Malgun Gothic" pitchFamily="34" charset="0"/>
                 <a:ea typeface="Malgun Gothic" pitchFamily="34" charset="-122"/>
                 <a:cs typeface="Malgun Gothic" pitchFamily="34" charset="-120"/>
               </a:rPr>
-              <a:t>사이트 전용 착신 번호</a:t>
+              <a:t>신청의 6% (120건)</a:t>
             </a:r>
-            <a:endParaRPr lang="en-US" sz="1200" dirty="0"/>
-          </a:p>
-        </p:txBody>
-      </p:sp>
-      <p:sp>
-        <p:nvSpPr>
-          <p:cNvPr id="11" name="Shape 9"/>
+            <a:endParaRPr lang="en-US" sz="900" dirty="0"/>
+          </a:p>
+        </p:txBody>
+      </p:sp>
+      <p:sp>
+        <p:nvSpPr>
+          <p:cNvPr id="12" name="Shape 10"/>
           <p:cNvSpPr/>
           <p:nvPr/>
         </p:nvSpPr>
         <p:spPr>
           <a:xfrm>
-            <a:off x="411480" y="3913632"/>
+            <a:off x="411480" y="2743200"/>
             <a:ext cx="8321040" cy="402336"/>
           </a:xfrm>
           <a:prstGeom prst="rect">
@@ -6732,13 +7089,13 @@
       </p:sp>
       <p:sp>
         <p:nvSpPr>
-          <p:cNvPr id="12" name="Text 10"/>
+          <p:cNvPr id="13" name="Text 11"/>
           <p:cNvSpPr txBox="1"/>
           <p:nvPr/>
         </p:nvSpPr>
         <p:spPr>
           <a:xfrm>
-            <a:off x="548640" y="3913632"/>
+            <a:off x="548640" y="2743200"/>
             <a:ext cx="8046720" cy="402336"/>
           </a:xfrm>
           <a:prstGeom prst="rect">
@@ -6777,7 +7134,7 @@
                 <a:ea typeface="Malgun Gothic" pitchFamily="34" charset="-122"/>
                 <a:cs typeface="Malgun Gothic" pitchFamily="34" charset="-120"/>
               </a:rPr>
-              <a:t>신청마다 수임 여부 기록</a:t>
+              <a:t>분쟁 페이지를 리뉴얼 우선순위에, 폼보다 전화 → 분쟁 광고는 줄이지 않음</a:t>
             </a:r>
             <a:endParaRPr lang="en-US" sz="1150" dirty="0"/>
           </a:p>
@@ -6785,7 +7142,7 @@
       </p:sp>
       <p:sp>
         <p:nvSpPr>
-          <p:cNvPr id="13" name="Shape 11"/>
+          <p:cNvPr id="14" name="Shape 12"/>
           <p:cNvSpPr/>
           <p:nvPr/>
         </p:nvSpPr>
@@ -6808,7 +7165,7 @@
       </p:sp>
       <p:sp>
         <p:nvSpPr>
-          <p:cNvPr id="14" name="Text 12"/>
+          <p:cNvPr id="15" name="Text 13"/>
           <p:cNvSpPr txBox="1"/>
           <p:nvPr/>
         </p:nvSpPr>
@@ -6839,7 +7196,7 @@
                 <a:ea typeface="Malgun Gothic" pitchFamily="34" charset="-122"/>
                 <a:cs typeface="Malgun Gothic" pitchFamily="34" charset="-120"/>
               </a:rPr>
-              <a:t>출처: 변리사 답(진단은 간편·상세 모두 전화, 수임 10~20%는 기억에 의한 값)</a:t>
+              <a:t>출처: 신청 게시판 2,174건 분류 · 전처리: 스팸 10건·휴대폰 형식 아님 23건 제외 → 2,141건. 수수료는 변리사 답</a:t>
             </a:r>
             <a:endParaRPr lang="en-US" sz="800" dirty="0"/>
           </a:p>
@@ -6888,581 +7245,6 @@
             <a:fld id="{F7021451-1387-4CA6-816F-3879F97B5CBC}" type="slidenum">
               <a:rPr b="0" lang="en-US"/>
               <a:t>13</a:t>
-            </a:fld>
-            <a:endParaRPr lang="en-US"/>
-          </a:p>
-        </p:txBody>
-      </p:sp>
-    </p:spTree>
-  </p:cSld>
-  <p:clrMapOvr>
-    <a:masterClrMapping/>
-  </p:clrMapOvr>
-</p:sld>
-</file>
-
-<file path=ppt/slides/slide14.xml><?xml version="1.0" encoding="utf-8"?>
-<p:sld xmlns:a="http://schemas.openxmlformats.org/drawingml/2006/main" xmlns:r="http://schemas.openxmlformats.org/officeDocument/2006/relationships" xmlns:p="http://schemas.openxmlformats.org/presentationml/2006/main">
-  <p:cSld name="Slide 14">
-    <p:spTree>
-      <p:nvGrpSpPr>
-        <p:cNvPr id="1" name=""/>
-        <p:cNvGrpSpPr/>
-        <p:nvPr/>
-      </p:nvGrpSpPr>
-      <p:grpSpPr>
-        <a:xfrm>
-          <a:off x="0" y="0"/>
-          <a:ext cx="0" cy="0"/>
-          <a:chOff x="0" y="0"/>
-          <a:chExt cx="0" cy="0"/>
-        </a:xfrm>
-      </p:grpSpPr>
-      <p:sp>
-        <p:nvSpPr>
-          <p:cNvPr id="2" name="Text 0"/>
-          <p:cNvSpPr txBox="1"/>
-          <p:nvPr/>
-        </p:nvSpPr>
-        <p:spPr>
-          <a:xfrm>
-            <a:off x="411480" y="201168"/>
-            <a:ext cx="8321040" cy="201168"/>
-          </a:xfrm>
-          <a:prstGeom prst="rect">
-            <a:avLst/>
-          </a:prstGeom>
-          <a:noFill/>
-          <a:ln/>
-        </p:spPr>
-        <p:txBody>
-          <a:bodyPr wrap="square" lIns="0" tIns="0" rIns="0" bIns="0" rtlCol="0" anchor="ctr"/>
-          <a:lstStyle/>
-          <a:p>
-            <a:pPr indent="0" marL="0">
-              <a:buNone/>
-            </a:pPr>
-            <a:r>
-              <a:rPr lang="en-US" sz="1000" b="1" spc="100" kern="0" dirty="0">
-                <a:solidFill>
-                  <a:srgbClr val="2A78D6"/>
-                </a:solidFill>
-                <a:latin typeface="Malgun Gothic" pitchFamily="34" charset="0"/>
-                <a:ea typeface="Malgun Gothic" pitchFamily="34" charset="-122"/>
-                <a:cs typeface="Malgun Gothic" pitchFamily="34" charset="-120"/>
-              </a:rPr>
-              <a:t>4. 수임당 매출</a:t>
-            </a:r>
-            <a:endParaRPr lang="en-US" sz="1000" dirty="0"/>
-          </a:p>
-        </p:txBody>
-      </p:sp>
-      <p:sp>
-        <p:nvSpPr>
-          <p:cNvPr id="3" name="Text 1"/>
-          <p:cNvSpPr txBox="1"/>
-          <p:nvPr/>
-        </p:nvSpPr>
-        <p:spPr>
-          <a:xfrm>
-            <a:off x="411480" y="420624"/>
-            <a:ext cx="8321040" cy="502920"/>
-          </a:xfrm>
-          <a:prstGeom prst="rect">
-            <a:avLst/>
-          </a:prstGeom>
-          <a:noFill/>
-          <a:ln/>
-        </p:spPr>
-        <p:txBody>
-          <a:bodyPr wrap="square" lIns="0" tIns="0" rIns="0" bIns="0" rtlCol="0" anchor="ctr"/>
-          <a:lstStyle/>
-          <a:p>
-            <a:pPr indent="0" marL="0">
-              <a:buNone/>
-            </a:pPr>
-            <a:r>
-              <a:rPr lang="en-US" sz="2100" b="1" dirty="0">
-                <a:solidFill>
-                  <a:srgbClr val="0B0B0B"/>
-                </a:solidFill>
-                <a:latin typeface="Malgun Gothic" pitchFamily="34" charset="0"/>
-                <a:ea typeface="Malgun Gothic" pitchFamily="34" charset="-122"/>
-                <a:cs typeface="Malgun Gothic" pitchFamily="34" charset="-120"/>
-              </a:rPr>
-              <a:t>분쟁은 신청의 6%지만 수수료는 출원의 7배</a:t>
-            </a:r>
-            <a:endParaRPr lang="en-US" sz="2100" dirty="0"/>
-          </a:p>
-        </p:txBody>
-      </p:sp>
-      <p:sp>
-        <p:nvSpPr>
-          <p:cNvPr id="4" name="Shape 2"/>
-          <p:cNvSpPr/>
-          <p:nvPr/>
-        </p:nvSpPr>
-        <p:spPr>
-          <a:xfrm>
-            <a:off x="411480" y="1188720"/>
-            <a:ext cx="3977640" cy="1097280"/>
-          </a:xfrm>
-          <a:prstGeom prst="rect">
-            <a:avLst/>
-          </a:prstGeom>
-          <a:solidFill>
-            <a:srgbClr val="F4F6F7"/>
-          </a:solidFill>
-          <a:ln w="12700">
-            <a:solidFill>
-              <a:srgbClr val="F4F6F7"/>
-            </a:solidFill>
-            <a:prstDash val="solid"/>
-          </a:ln>
-        </p:spPr>
-      </p:sp>
-      <p:sp>
-        <p:nvSpPr>
-          <p:cNvPr id="5" name="Text 3"/>
-          <p:cNvSpPr txBox="1"/>
-          <p:nvPr/>
-        </p:nvSpPr>
-        <p:spPr>
-          <a:xfrm>
-            <a:off x="548640" y="1280160"/>
-            <a:ext cx="3703320" cy="219456"/>
-          </a:xfrm>
-          <a:prstGeom prst="rect">
-            <a:avLst/>
-          </a:prstGeom>
-          <a:noFill/>
-          <a:ln/>
-        </p:spPr>
-        <p:txBody>
-          <a:bodyPr wrap="square" lIns="0" tIns="0" rIns="0" bIns="0" rtlCol="0" anchor="ctr"/>
-          <a:lstStyle/>
-          <a:p>
-            <a:pPr indent="0" marL="0">
-              <a:buNone/>
-            </a:pPr>
-            <a:r>
-              <a:rPr lang="en-US" sz="1000" b="1" dirty="0">
-                <a:solidFill>
-                  <a:srgbClr val="52514E"/>
-                </a:solidFill>
-                <a:latin typeface="Malgun Gothic" pitchFamily="34" charset="0"/>
-                <a:ea typeface="Malgun Gothic" pitchFamily="34" charset="-122"/>
-                <a:cs typeface="Malgun Gothic" pitchFamily="34" charset="-120"/>
-              </a:rPr>
-              <a:t>출원</a:t>
-            </a:r>
-            <a:endParaRPr lang="en-US" sz="1000" dirty="0"/>
-          </a:p>
-        </p:txBody>
-      </p:sp>
-      <p:sp>
-        <p:nvSpPr>
-          <p:cNvPr id="6" name="Text 4"/>
-          <p:cNvSpPr txBox="1"/>
-          <p:nvPr/>
-        </p:nvSpPr>
-        <p:spPr>
-          <a:xfrm>
-            <a:off x="548640" y="1517904"/>
-            <a:ext cx="3703320" cy="420624"/>
-          </a:xfrm>
-          <a:prstGeom prst="rect">
-            <a:avLst/>
-          </a:prstGeom>
-          <a:noFill/>
-          <a:ln/>
-        </p:spPr>
-        <p:txBody>
-          <a:bodyPr wrap="square" lIns="0" tIns="0" rIns="0" bIns="0" rtlCol="0" anchor="ctr"/>
-          <a:lstStyle/>
-          <a:p>
-            <a:pPr indent="0" marL="0">
-              <a:buNone/>
-            </a:pPr>
-            <a:r>
-              <a:rPr lang="en-US" sz="1800" b="1" dirty="0">
-                <a:solidFill>
-                  <a:srgbClr val="2A78D6"/>
-                </a:solidFill>
-                <a:latin typeface="Malgun Gothic" pitchFamily="34" charset="0"/>
-                <a:ea typeface="Malgun Gothic" pitchFamily="34" charset="-122"/>
-                <a:cs typeface="Malgun Gothic" pitchFamily="34" charset="-120"/>
-              </a:rPr>
-              <a:t>300만 원</a:t>
-            </a:r>
-            <a:endParaRPr lang="en-US" sz="1800" dirty="0"/>
-          </a:p>
-        </p:txBody>
-      </p:sp>
-      <p:sp>
-        <p:nvSpPr>
-          <p:cNvPr id="7" name="Text 5"/>
-          <p:cNvSpPr txBox="1"/>
-          <p:nvPr/>
-        </p:nvSpPr>
-        <p:spPr>
-          <a:xfrm>
-            <a:off x="548640" y="1956816"/>
-            <a:ext cx="3703320" cy="274320"/>
-          </a:xfrm>
-          <a:prstGeom prst="rect">
-            <a:avLst/>
-          </a:prstGeom>
-          <a:noFill/>
-          <a:ln/>
-        </p:spPr>
-        <p:txBody>
-          <a:bodyPr wrap="square" lIns="0" tIns="0" rIns="0" bIns="0" rtlCol="0" anchor="t"/>
-          <a:lstStyle/>
-          <a:p>
-            <a:pPr indent="0" marL="0">
-              <a:buNone/>
-            </a:pPr>
-            <a:r>
-              <a:rPr lang="en-US" sz="900" dirty="0">
-                <a:solidFill>
-                  <a:srgbClr val="52514E"/>
-                </a:solidFill>
-                <a:latin typeface="Malgun Gothic" pitchFamily="34" charset="0"/>
-                <a:ea typeface="Malgun Gothic" pitchFamily="34" charset="-122"/>
-                <a:cs typeface="Malgun Gothic" pitchFamily="34" charset="-120"/>
-              </a:rPr>
-              <a:t>신청의 94% (2,021건)</a:t>
-            </a:r>
-            <a:endParaRPr lang="en-US" sz="900" dirty="0"/>
-          </a:p>
-        </p:txBody>
-      </p:sp>
-      <p:sp>
-        <p:nvSpPr>
-          <p:cNvPr id="8" name="Shape 6"/>
-          <p:cNvSpPr/>
-          <p:nvPr/>
-        </p:nvSpPr>
-        <p:spPr>
-          <a:xfrm>
-            <a:off x="4754880" y="1188720"/>
-            <a:ext cx="3977640" cy="1097280"/>
-          </a:xfrm>
-          <a:prstGeom prst="rect">
-            <a:avLst/>
-          </a:prstGeom>
-          <a:solidFill>
-            <a:srgbClr val="F4F6F7"/>
-          </a:solidFill>
-          <a:ln w="12700">
-            <a:solidFill>
-              <a:srgbClr val="F4F6F7"/>
-            </a:solidFill>
-            <a:prstDash val="solid"/>
-          </a:ln>
-        </p:spPr>
-      </p:sp>
-      <p:sp>
-        <p:nvSpPr>
-          <p:cNvPr id="9" name="Text 7"/>
-          <p:cNvSpPr txBox="1"/>
-          <p:nvPr/>
-        </p:nvSpPr>
-        <p:spPr>
-          <a:xfrm>
-            <a:off x="4892040" y="1280160"/>
-            <a:ext cx="3703320" cy="219456"/>
-          </a:xfrm>
-          <a:prstGeom prst="rect">
-            <a:avLst/>
-          </a:prstGeom>
-          <a:noFill/>
-          <a:ln/>
-        </p:spPr>
-        <p:txBody>
-          <a:bodyPr wrap="square" lIns="0" tIns="0" rIns="0" bIns="0" rtlCol="0" anchor="ctr"/>
-          <a:lstStyle/>
-          <a:p>
-            <a:pPr indent="0" marL="0">
-              <a:buNone/>
-            </a:pPr>
-            <a:r>
-              <a:rPr lang="en-US" sz="1000" b="1" dirty="0">
-                <a:solidFill>
-                  <a:srgbClr val="52514E"/>
-                </a:solidFill>
-                <a:latin typeface="Malgun Gothic" pitchFamily="34" charset="0"/>
-                <a:ea typeface="Malgun Gothic" pitchFamily="34" charset="-122"/>
-                <a:cs typeface="Malgun Gothic" pitchFamily="34" charset="-120"/>
-              </a:rPr>
-              <a:t>분쟁</a:t>
-            </a:r>
-            <a:endParaRPr lang="en-US" sz="1000" dirty="0"/>
-          </a:p>
-        </p:txBody>
-      </p:sp>
-      <p:sp>
-        <p:nvSpPr>
-          <p:cNvPr id="10" name="Text 8"/>
-          <p:cNvSpPr txBox="1"/>
-          <p:nvPr/>
-        </p:nvSpPr>
-        <p:spPr>
-          <a:xfrm>
-            <a:off x="4892040" y="1517904"/>
-            <a:ext cx="3703320" cy="420624"/>
-          </a:xfrm>
-          <a:prstGeom prst="rect">
-            <a:avLst/>
-          </a:prstGeom>
-          <a:noFill/>
-          <a:ln/>
-        </p:spPr>
-        <p:txBody>
-          <a:bodyPr wrap="square" lIns="0" tIns="0" rIns="0" bIns="0" rtlCol="0" anchor="ctr"/>
-          <a:lstStyle/>
-          <a:p>
-            <a:pPr indent="0" marL="0">
-              <a:buNone/>
-            </a:pPr>
-            <a:r>
-              <a:rPr lang="en-US" sz="1800" b="1" dirty="0">
-                <a:solidFill>
-                  <a:srgbClr val="EB6834"/>
-                </a:solidFill>
-                <a:latin typeface="Malgun Gothic" pitchFamily="34" charset="0"/>
-                <a:ea typeface="Malgun Gothic" pitchFamily="34" charset="-122"/>
-                <a:cs typeface="Malgun Gothic" pitchFamily="34" charset="-120"/>
-              </a:rPr>
-              <a:t>2,000만 원</a:t>
-            </a:r>
-            <a:endParaRPr lang="en-US" sz="1800" dirty="0"/>
-          </a:p>
-        </p:txBody>
-      </p:sp>
-      <p:sp>
-        <p:nvSpPr>
-          <p:cNvPr id="11" name="Text 9"/>
-          <p:cNvSpPr txBox="1"/>
-          <p:nvPr/>
-        </p:nvSpPr>
-        <p:spPr>
-          <a:xfrm>
-            <a:off x="4892040" y="1956816"/>
-            <a:ext cx="3703320" cy="274320"/>
-          </a:xfrm>
-          <a:prstGeom prst="rect">
-            <a:avLst/>
-          </a:prstGeom>
-          <a:noFill/>
-          <a:ln/>
-        </p:spPr>
-        <p:txBody>
-          <a:bodyPr wrap="square" lIns="0" tIns="0" rIns="0" bIns="0" rtlCol="0" anchor="t"/>
-          <a:lstStyle/>
-          <a:p>
-            <a:pPr indent="0" marL="0">
-              <a:buNone/>
-            </a:pPr>
-            <a:r>
-              <a:rPr lang="en-US" sz="900" dirty="0">
-                <a:solidFill>
-                  <a:srgbClr val="52514E"/>
-                </a:solidFill>
-                <a:latin typeface="Malgun Gothic" pitchFamily="34" charset="0"/>
-                <a:ea typeface="Malgun Gothic" pitchFamily="34" charset="-122"/>
-                <a:cs typeface="Malgun Gothic" pitchFamily="34" charset="-120"/>
-              </a:rPr>
-              <a:t>신청의 6% (120건)</a:t>
-            </a:r>
-            <a:endParaRPr lang="en-US" sz="900" dirty="0"/>
-          </a:p>
-        </p:txBody>
-      </p:sp>
-      <p:sp>
-        <p:nvSpPr>
-          <p:cNvPr id="12" name="Shape 10"/>
-          <p:cNvSpPr/>
-          <p:nvPr/>
-        </p:nvSpPr>
-        <p:spPr>
-          <a:xfrm>
-            <a:off x="411480" y="2743200"/>
-            <a:ext cx="8321040" cy="402336"/>
-          </a:xfrm>
-          <a:prstGeom prst="rect">
-            <a:avLst/>
-          </a:prstGeom>
-          <a:solidFill>
-            <a:srgbClr val="EEF4FB"/>
-          </a:solidFill>
-          <a:ln w="12700">
-            <a:solidFill>
-              <a:srgbClr val="EEF4FB"/>
-            </a:solidFill>
-            <a:prstDash val="solid"/>
-          </a:ln>
-        </p:spPr>
-      </p:sp>
-      <p:sp>
-        <p:nvSpPr>
-          <p:cNvPr id="13" name="Text 11"/>
-          <p:cNvSpPr txBox="1"/>
-          <p:nvPr/>
-        </p:nvSpPr>
-        <p:spPr>
-          <a:xfrm>
-            <a:off x="548640" y="2743200"/>
-            <a:ext cx="8046720" cy="402336"/>
-          </a:xfrm>
-          <a:prstGeom prst="rect">
-            <a:avLst/>
-          </a:prstGeom>
-          <a:noFill/>
-          <a:ln/>
-        </p:spPr>
-        <p:txBody>
-          <a:bodyPr wrap="square" lIns="0" tIns="0" rIns="0" bIns="0" rtlCol="0" anchor="ctr"/>
-          <a:lstStyle/>
-          <a:p>
-            <a:pPr indent="0" marL="0">
-              <a:buNone/>
-            </a:pPr>
-            <a:r>
-              <a:rPr lang="en-US" sz="1150" b="1" dirty="0">
-                <a:solidFill>
-                  <a:srgbClr val="2A78D6"/>
-                </a:solidFill>
-                <a:latin typeface="Malgun Gothic" pitchFamily="34" charset="0"/>
-                <a:ea typeface="Malgun Gothic" pitchFamily="34" charset="-122"/>
-                <a:cs typeface="Malgun Gothic" pitchFamily="34" charset="-120"/>
-              </a:rPr>
-              <a:t>action item   </a:t>
-            </a:r>
-            <a:pPr indent="0" marL="0">
-              <a:buNone/>
-            </a:pPr>
-            <a:r>
-              <a:rPr lang="en-US" sz="1150" dirty="0">
-                <a:solidFill>
-                  <a:srgbClr val="0B0B0B"/>
-                </a:solidFill>
-                <a:latin typeface="Malgun Gothic" pitchFamily="34" charset="0"/>
-                <a:ea typeface="Malgun Gothic" pitchFamily="34" charset="-122"/>
-                <a:cs typeface="Malgun Gothic" pitchFamily="34" charset="-120"/>
-              </a:rPr>
-              <a:t>분쟁 페이지를 리뉴얼 우선순위에, 폼보다 전화 → 분쟁 광고는 줄이지 않음</a:t>
-            </a:r>
-            <a:endParaRPr lang="en-US" sz="1150" dirty="0"/>
-          </a:p>
-        </p:txBody>
-      </p:sp>
-      <p:sp>
-        <p:nvSpPr>
-          <p:cNvPr id="14" name="Shape 12"/>
-          <p:cNvSpPr/>
-          <p:nvPr/>
-        </p:nvSpPr>
-        <p:spPr>
-          <a:xfrm>
-            <a:off x="411480" y="4480560"/>
-            <a:ext cx="8321040" cy="0"/>
-          </a:xfrm>
-          <a:prstGeom prst="line">
-            <a:avLst/>
-          </a:prstGeom>
-          <a:noFill/>
-          <a:ln w="12700">
-            <a:solidFill>
-              <a:srgbClr val="DFE3E2"/>
-            </a:solidFill>
-            <a:prstDash val="solid"/>
-          </a:ln>
-        </p:spPr>
-      </p:sp>
-      <p:sp>
-        <p:nvSpPr>
-          <p:cNvPr id="15" name="Text 13"/>
-          <p:cNvSpPr txBox="1"/>
-          <p:nvPr/>
-        </p:nvSpPr>
-        <p:spPr>
-          <a:xfrm>
-            <a:off x="411480" y="4526280"/>
-            <a:ext cx="8046720" cy="548640"/>
-          </a:xfrm>
-          <a:prstGeom prst="rect">
-            <a:avLst/>
-          </a:prstGeom>
-          <a:noFill/>
-          <a:ln/>
-        </p:spPr>
-        <p:txBody>
-          <a:bodyPr wrap="square" lIns="0" tIns="0" rIns="0" bIns="0" rtlCol="0" anchor="t"/>
-          <a:lstStyle/>
-          <a:p>
-            <a:pPr indent="0" marL="0">
-              <a:buNone/>
-            </a:pPr>
-            <a:r>
-              <a:rPr lang="en-US" sz="800" dirty="0">
-                <a:solidFill>
-                  <a:srgbClr val="52514E"/>
-                </a:solidFill>
-                <a:latin typeface="Malgun Gothic" pitchFamily="34" charset="0"/>
-                <a:ea typeface="Malgun Gothic" pitchFamily="34" charset="-122"/>
-                <a:cs typeface="Malgun Gothic" pitchFamily="34" charset="-120"/>
-              </a:rPr>
-              <a:t>출처: 신청 게시판 2,174건 분류 · 전처리: 스팸 10건·휴대폰 형식 아님 23건 제외 → 2,141건. 수수료는 변리사 답</a:t>
-            </a:r>
-            <a:endParaRPr lang="en-US" sz="800" dirty="0"/>
-          </a:p>
-        </p:txBody>
-      </p:sp>
-      <p:sp>
-        <p:nvSpPr>
-          <p:cNvPr id="25" name="Slide Number Placeholder 0"/>
-          <p:cNvSpPr>
-            <a:spLocks noGrp="1"/>
-          </p:cNvSpPr>
-          <p:nvPr>
-            <p:ph type="sldNum" sz="quarter" idx="4294967295"/>
-          </p:nvPr>
-        </p:nvSpPr>
-        <p:spPr>
-          <a:xfrm>
-            <a:off x="8503920" y="4846320"/>
-            <a:ext cx="365760" cy="201168"/>
-          </a:xfrm>
-          <a:prstGeom prst="rect">
-            <a:avLst/>
-          </a:prstGeom>
-          <a:extLst>
-            <a:ext uri="{C572A759-6A51-4108-AA02-DFA0A04FC94B}">
-              <ma14:wrappingTextBoxFlag xmlns:ma14="http://schemas.microsoft.com/office/mac/drawingml/2011/main" val="0"/>
-            </a:ext>
-          </a:extLst>
-        </p:spPr>
-        <p:txBody>
-          <a:bodyPr/>
-          <a:lstStyle>
-            <a:lvl1pPr>
-              <a:defRPr sz="800">
-                <a:solidFill>
-                  <a:srgbClr val="52514E"/>
-                </a:solidFill>
-                <a:latin typeface="Malgun Gothic"/>
-                <a:ea typeface="Malgun Gothic"/>
-                <a:cs typeface="Malgun Gothic"/>
-              </a:defRPr>
-            </a:lvl1pPr>
-          </a:lstStyle>
-          <a:p>
-            <a:pPr algn="l"/>
-            <a:fld id="{F7021451-1387-4CA6-816F-3879F97B5CBC}" type="slidenum">
-              <a:rPr b="0" lang="en-US"/>
-              <a:t>14</a:t>
             </a:fld>
             <a:endParaRPr lang="en-US"/>
           </a:p>
@@ -8728,54 +8510,15 @@
           </a:p>
         </p:txBody>
       </p:sp>
-      <p:sp>
-        <p:nvSpPr>
-          <p:cNvPr id="4" name="Text 2"/>
-          <p:cNvSpPr txBox="1"/>
-          <p:nvPr/>
-        </p:nvSpPr>
-        <p:spPr>
-          <a:xfrm>
-            <a:off x="411480" y="987552"/>
-            <a:ext cx="4937760" cy="237744"/>
-          </a:xfrm>
-          <a:prstGeom prst="rect">
-            <a:avLst/>
-          </a:prstGeom>
-          <a:noFill/>
-          <a:ln/>
-        </p:spPr>
-        <p:txBody>
-          <a:bodyPr wrap="square" lIns="0" tIns="0" rIns="0" bIns="0" rtlCol="0" anchor="t"/>
-          <a:lstStyle/>
-          <a:p>
-            <a:pPr indent="0" marL="0">
-              <a:buNone/>
-            </a:pPr>
-            <a:r>
-              <a:rPr lang="en-US" sz="1000" dirty="0">
-                <a:solidFill>
-                  <a:srgbClr val="52514E"/>
-                </a:solidFill>
-                <a:latin typeface="Malgun Gothic" pitchFamily="34" charset="0"/>
-                <a:ea typeface="Malgun Gothic" pitchFamily="34" charset="-122"/>
-                <a:cs typeface="Malgun Gothic" pitchFamily="34" charset="-120"/>
-              </a:rPr>
-              <a:t>봇을 뺀 실제 방문 추정, 명</a:t>
-            </a:r>
-            <a:endParaRPr lang="en-US" sz="1000" dirty="0"/>
-          </a:p>
-        </p:txBody>
-      </p:sp>
       <p:graphicFrame>
         <p:nvGraphicFramePr>
-          <p:cNvPr id="5" name="Chart 0" descr=""/>
+          <p:cNvPr id="4" name="Chart 0" descr=""/>
           <p:cNvGraphicFramePr/>
           <p:nvPr/>
         </p:nvGraphicFramePr>
         <p:xfrm>
-          <a:off x="338328" y="1243584"/>
-          <a:ext cx="5029200" cy="3108960"/>
+          <a:off x="338328" y="1005840"/>
+          <a:ext cx="5029200" cy="3346704"/>
         </p:xfrm>
         <a:graphic xmlns:a="http://schemas.openxmlformats.org/drawingml/2006/main">
           <a:graphicData uri="http://schemas.openxmlformats.org/drawingml/2006/chart">
@@ -8785,7 +8528,7 @@
       </p:graphicFrame>
       <p:sp>
         <p:nvSpPr>
-          <p:cNvPr id="6" name="Text 3"/>
+          <p:cNvPr id="5" name="Text 2"/>
           <p:cNvSpPr txBox="1"/>
           <p:nvPr/>
         </p:nvSpPr>
@@ -8824,7 +8567,7 @@
       </p:sp>
       <p:sp>
         <p:nvSpPr>
-          <p:cNvPr id="7" name="Text 4"/>
+          <p:cNvPr id="6" name="Text 3"/>
           <p:cNvSpPr txBox="1"/>
           <p:nvPr/>
         </p:nvSpPr>
@@ -8926,7 +8669,7 @@
       </p:sp>
       <p:sp>
         <p:nvSpPr>
-          <p:cNvPr id="8" name="Shape 5"/>
+          <p:cNvPr id="7" name="Shape 4"/>
           <p:cNvSpPr/>
           <p:nvPr/>
         </p:nvSpPr>
@@ -8949,7 +8692,7 @@
       </p:sp>
       <p:sp>
         <p:nvSpPr>
-          <p:cNvPr id="9" name="Text 6"/>
+          <p:cNvPr id="8" name="Text 5"/>
           <p:cNvSpPr txBox="1"/>
           <p:nvPr/>
         </p:nvSpPr>
@@ -9139,46 +8882,7 @@
       </p:sp>
       <p:sp>
         <p:nvSpPr>
-          <p:cNvPr id="4" name="Text 2"/>
-          <p:cNvSpPr txBox="1"/>
-          <p:nvPr/>
-        </p:nvSpPr>
-        <p:spPr>
-          <a:xfrm>
-            <a:off x="411480" y="987552"/>
-            <a:ext cx="8321040" cy="237744"/>
-          </a:xfrm>
-          <a:prstGeom prst="rect">
-            <a:avLst/>
-          </a:prstGeom>
-          <a:noFill/>
-          <a:ln/>
-        </p:spPr>
-        <p:txBody>
-          <a:bodyPr wrap="square" lIns="0" tIns="0" rIns="0" bIns="0" rtlCol="0" anchor="t"/>
-          <a:lstStyle/>
-          <a:p>
-            <a:pPr indent="0" marL="0">
-              <a:buNone/>
-            </a:pPr>
-            <a:r>
-              <a:rPr lang="en-US" sz="1000" dirty="0">
-                <a:solidFill>
-                  <a:srgbClr val="52514E"/>
-                </a:solidFill>
-                <a:latin typeface="Malgun Gothic" pitchFamily="34" charset="0"/>
-                <a:ea typeface="Malgun Gothic" pitchFamily="34" charset="-122"/>
-                <a:cs typeface="Malgun Gothic" pitchFamily="34" charset="-120"/>
-              </a:rPr>
-              <a:t>경로별 연간 방문 (서버 기록, "직접" 제외. 출처를 놓치는 경우가 많아 추이로만 봄)</a:t>
-            </a:r>
-            <a:endParaRPr lang="en-US" sz="1000" dirty="0"/>
-          </a:p>
-        </p:txBody>
-      </p:sp>
-      <p:sp>
-        <p:nvSpPr>
-          <p:cNvPr id="5" name="Shape 3"/>
+          <p:cNvPr id="4" name="Shape 2"/>
           <p:cNvSpPr/>
           <p:nvPr/>
         </p:nvSpPr>
@@ -9203,7 +8907,7 @@
       </p:sp>
       <p:sp>
         <p:nvSpPr>
-          <p:cNvPr id="6" name="Text 4"/>
+          <p:cNvPr id="5" name="Text 3"/>
           <p:cNvSpPr txBox="1"/>
           <p:nvPr/>
         </p:nvSpPr>
@@ -9242,7 +8946,7 @@
       </p:sp>
       <p:graphicFrame>
         <p:nvGraphicFramePr>
-          <p:cNvPr id="7" name="Chart 0" descr=""/>
+          <p:cNvPr id="6" name="Chart 0" descr=""/>
           <p:cNvGraphicFramePr/>
           <p:nvPr/>
         </p:nvGraphicFramePr>
@@ -9258,7 +8962,7 @@
       </p:graphicFrame>
       <p:sp>
         <p:nvSpPr>
-          <p:cNvPr id="8" name="Text 5"/>
+          <p:cNvPr id="7" name="Text 4"/>
           <p:cNvSpPr txBox="1"/>
           <p:nvPr/>
         </p:nvSpPr>
@@ -9297,7 +9001,7 @@
       </p:sp>
       <p:sp>
         <p:nvSpPr>
-          <p:cNvPr id="9" name="Shape 6"/>
+          <p:cNvPr id="8" name="Shape 5"/>
           <p:cNvSpPr/>
           <p:nvPr/>
         </p:nvSpPr>
@@ -9320,7 +9024,7 @@
       </p:sp>
       <p:sp>
         <p:nvSpPr>
-          <p:cNvPr id="10" name="Text 7"/>
+          <p:cNvPr id="9" name="Text 6"/>
           <p:cNvSpPr txBox="1"/>
           <p:nvPr/>
         </p:nvSpPr>
@@ -9352,6 +9056,23 @@
                 <a:cs typeface="Malgun Gothic" pitchFamily="34" charset="-120"/>
               </a:rPr>
               <a:t>출처: 관리자 페이지 접속자통계, 유입 도메인별 방문 2016 ~ 2026-10-06 · 전처리: "직접"(봇 대부분) 제외. 감소율은 2020 → 2022</a:t>
+            </a:r>
+            <a:endParaRPr lang="en-US" sz="800" dirty="0"/>
+          </a:p>
+          <a:p>
+            <a:pPr indent="0" marL="0">
+              <a:buNone/>
+            </a:pPr>
+            <a:r>
+              <a:rPr lang="en-US" sz="800" dirty="0">
+                <a:solidFill>
+                  <a:srgbClr val="52514E"/>
+                </a:solidFill>
+                <a:latin typeface="Malgun Gothic" pitchFamily="34" charset="0"/>
+                <a:ea typeface="Malgun Gothic" pitchFamily="34" charset="-122"/>
+                <a:cs typeface="Malgun Gothic" pitchFamily="34" charset="-120"/>
+              </a:rPr>
+              <a:t>옛 사이트가 http라 네이버(https)에서 올 때 출처(리퍼러 쪽지)가 빠져 "직접"으로 잘못 분류됨. 10-06 전엔 광고 링크에 UTM이 없어 광고가 Organic Search로 들어감</a:t>
             </a:r>
             <a:endParaRPr lang="en-US" sz="800" dirty="0"/>
           </a:p>
@@ -9463,1069 +9184,6 @@
                 <a:ea typeface="Malgun Gothic" pitchFamily="34" charset="-122"/>
                 <a:cs typeface="Malgun Gothic" pitchFamily="34" charset="-120"/>
               </a:rPr>
-              <a:t>1-1. 유입경로별 방문자수 — GA4</a:t>
-            </a:r>
-            <a:endParaRPr lang="en-US" sz="1000" dirty="0"/>
-          </a:p>
-        </p:txBody>
-      </p:sp>
-      <p:sp>
-        <p:nvSpPr>
-          <p:cNvPr id="3" name="Text 1"/>
-          <p:cNvSpPr txBox="1"/>
-          <p:nvPr/>
-        </p:nvSpPr>
-        <p:spPr>
-          <a:xfrm>
-            <a:off x="411480" y="420624"/>
-            <a:ext cx="8321040" cy="502920"/>
-          </a:xfrm>
-          <a:prstGeom prst="rect">
-            <a:avLst/>
-          </a:prstGeom>
-          <a:noFill/>
-          <a:ln/>
-        </p:spPr>
-        <p:txBody>
-          <a:bodyPr wrap="square" lIns="0" tIns="0" rIns="0" bIns="0" rtlCol="0" anchor="ctr"/>
-          <a:lstStyle/>
-          <a:p>
-            <a:pPr indent="0" marL="0">
-              <a:buNone/>
-            </a:pPr>
-            <a:r>
-              <a:rPr lang="en-US" sz="2100" b="1" dirty="0">
-                <a:solidFill>
-                  <a:srgbClr val="0B0B0B"/>
-                </a:solidFill>
-                <a:latin typeface="Malgun Gothic" pitchFamily="34" charset="0"/>
-                <a:ea typeface="Malgun Gothic" pitchFamily="34" charset="-122"/>
-                <a:cs typeface="Malgun Gothic" pitchFamily="34" charset="-120"/>
-              </a:rPr>
-              <a:t>GA4로 다시 본 28일: 세션 215</a:t>
-            </a:r>
-            <a:endParaRPr lang="en-US" sz="2100" dirty="0"/>
-          </a:p>
-        </p:txBody>
-      </p:sp>
-      <p:sp>
-        <p:nvSpPr>
-          <p:cNvPr id="4" name="Text 2"/>
-          <p:cNvSpPr txBox="1"/>
-          <p:nvPr/>
-        </p:nvSpPr>
-        <p:spPr>
-          <a:xfrm>
-            <a:off x="411480" y="987552"/>
-            <a:ext cx="8321040" cy="237744"/>
-          </a:xfrm>
-          <a:prstGeom prst="rect">
-            <a:avLst/>
-          </a:prstGeom>
-          <a:noFill/>
-          <a:ln/>
-        </p:spPr>
-        <p:txBody>
-          <a:bodyPr wrap="square" lIns="0" tIns="0" rIns="0" bIns="0" rtlCol="0" anchor="t"/>
-          <a:lstStyle/>
-          <a:p>
-            <a:pPr indent="0" marL="0">
-              <a:buNone/>
-            </a:pPr>
-            <a:r>
-              <a:rPr lang="en-US" sz="1000" dirty="0">
-                <a:solidFill>
-                  <a:srgbClr val="52514E"/>
-                </a:solidFill>
-                <a:latin typeface="Malgun Gothic" pitchFamily="34" charset="0"/>
-                <a:ea typeface="Malgun Gothic" pitchFamily="34" charset="-122"/>
-                <a:cs typeface="Malgun Gothic" pitchFamily="34" charset="-120"/>
-              </a:rPr>
-              <a:t>2026-09-18 ~ 10-15, 세션 기본 채널 그룹</a:t>
-            </a:r>
-            <a:endParaRPr lang="en-US" sz="1000" dirty="0"/>
-          </a:p>
-        </p:txBody>
-      </p:sp>
-      <p:sp>
-        <p:nvSpPr>
-          <p:cNvPr id="5" name="Shape 3"/>
-          <p:cNvSpPr/>
-          <p:nvPr/>
-        </p:nvSpPr>
-        <p:spPr>
-          <a:xfrm>
-            <a:off x="411480" y="1325880"/>
-            <a:ext cx="1517904" cy="1371600"/>
-          </a:xfrm>
-          <a:prstGeom prst="rect">
-            <a:avLst/>
-          </a:prstGeom>
-          <a:solidFill>
-            <a:srgbClr val="F4F6F7"/>
-          </a:solidFill>
-          <a:ln w="12700">
-            <a:solidFill>
-              <a:srgbClr val="F4F6F7"/>
-            </a:solidFill>
-            <a:prstDash val="solid"/>
-          </a:ln>
-        </p:spPr>
-      </p:sp>
-      <p:sp>
-        <p:nvSpPr>
-          <p:cNvPr id="6" name="Text 4"/>
-          <p:cNvSpPr txBox="1"/>
-          <p:nvPr/>
-        </p:nvSpPr>
-        <p:spPr>
-          <a:xfrm>
-            <a:off x="411480" y="1417320"/>
-            <a:ext cx="1517904" cy="640080"/>
-          </a:xfrm>
-          <a:prstGeom prst="rect">
-            <a:avLst/>
-          </a:prstGeom>
-          <a:noFill/>
-          <a:ln/>
-        </p:spPr>
-        <p:txBody>
-          <a:bodyPr wrap="square" lIns="0" tIns="0" rIns="0" bIns="0" rtlCol="0" anchor="ctr"/>
-          <a:lstStyle/>
-          <a:p>
-            <a:pPr algn="ctr" indent="0" marL="0">
-              <a:buNone/>
-            </a:pPr>
-            <a:r>
-              <a:rPr lang="en-US" sz="3000" b="1" dirty="0">
-                <a:solidFill>
-                  <a:srgbClr val="0B0B0B"/>
-                </a:solidFill>
-                <a:latin typeface="Malgun Gothic" pitchFamily="34" charset="0"/>
-                <a:ea typeface="Malgun Gothic" pitchFamily="34" charset="-122"/>
-                <a:cs typeface="Malgun Gothic" pitchFamily="34" charset="-120"/>
-              </a:rPr>
-              <a:t>94</a:t>
-            </a:r>
-            <a:endParaRPr lang="en-US" sz="3000" dirty="0"/>
-          </a:p>
-        </p:txBody>
-      </p:sp>
-      <p:sp>
-        <p:nvSpPr>
-          <p:cNvPr id="7" name="Text 5"/>
-          <p:cNvSpPr txBox="1"/>
-          <p:nvPr/>
-        </p:nvSpPr>
-        <p:spPr>
-          <a:xfrm>
-            <a:off x="411480" y="2057400"/>
-            <a:ext cx="1517904" cy="274320"/>
-          </a:xfrm>
-          <a:prstGeom prst="rect">
-            <a:avLst/>
-          </a:prstGeom>
-          <a:noFill/>
-          <a:ln/>
-        </p:spPr>
-        <p:txBody>
-          <a:bodyPr wrap="square" lIns="0" tIns="0" rIns="0" bIns="0" rtlCol="0" anchor="t"/>
-          <a:lstStyle/>
-          <a:p>
-            <a:pPr algn="ctr" indent="0" marL="0">
-              <a:buNone/>
-            </a:pPr>
-            <a:r>
-              <a:rPr lang="en-US" sz="1100" b="1" dirty="0">
-                <a:solidFill>
-                  <a:srgbClr val="0B0B0B"/>
-                </a:solidFill>
-                <a:latin typeface="Malgun Gothic" pitchFamily="34" charset="0"/>
-                <a:ea typeface="Malgun Gothic" pitchFamily="34" charset="-122"/>
-                <a:cs typeface="Malgun Gothic" pitchFamily="34" charset="-120"/>
-              </a:rPr>
-              <a:t>Organic Search</a:t>
-            </a:r>
-            <a:endParaRPr lang="en-US" sz="1100" dirty="0"/>
-          </a:p>
-        </p:txBody>
-      </p:sp>
-      <p:sp>
-        <p:nvSpPr>
-          <p:cNvPr id="8" name="Text 6"/>
-          <p:cNvSpPr txBox="1"/>
-          <p:nvPr/>
-        </p:nvSpPr>
-        <p:spPr>
-          <a:xfrm>
-            <a:off x="411480" y="2331720"/>
-            <a:ext cx="1517904" cy="274320"/>
-          </a:xfrm>
-          <a:prstGeom prst="rect">
-            <a:avLst/>
-          </a:prstGeom>
-          <a:noFill/>
-          <a:ln/>
-        </p:spPr>
-        <p:txBody>
-          <a:bodyPr wrap="square" lIns="0" tIns="0" rIns="0" bIns="0" rtlCol="0" anchor="t"/>
-          <a:lstStyle/>
-          <a:p>
-            <a:pPr algn="ctr" indent="0" marL="0">
-              <a:buNone/>
-            </a:pPr>
-            <a:r>
-              <a:rPr lang="en-US" sz="950" dirty="0">
-                <a:solidFill>
-                  <a:srgbClr val="52514E"/>
-                </a:solidFill>
-                <a:latin typeface="Malgun Gothic" pitchFamily="34" charset="0"/>
-                <a:ea typeface="Malgun Gothic" pitchFamily="34" charset="-122"/>
-                <a:cs typeface="Malgun Gothic" pitchFamily="34" charset="-120"/>
-              </a:rPr>
-              <a:t>네이버·구글 검색</a:t>
-            </a:r>
-            <a:endParaRPr lang="en-US" sz="950" dirty="0"/>
-          </a:p>
-        </p:txBody>
-      </p:sp>
-      <p:sp>
-        <p:nvSpPr>
-          <p:cNvPr id="9" name="Shape 7"/>
-          <p:cNvSpPr/>
-          <p:nvPr/>
-        </p:nvSpPr>
-        <p:spPr>
-          <a:xfrm>
-            <a:off x="2112264" y="1325880"/>
-            <a:ext cx="1517904" cy="1371600"/>
-          </a:xfrm>
-          <a:prstGeom prst="rect">
-            <a:avLst/>
-          </a:prstGeom>
-          <a:solidFill>
-            <a:srgbClr val="F4F6F7"/>
-          </a:solidFill>
-          <a:ln w="12700">
-            <a:solidFill>
-              <a:srgbClr val="F4F6F7"/>
-            </a:solidFill>
-            <a:prstDash val="solid"/>
-          </a:ln>
-        </p:spPr>
-      </p:sp>
-      <p:sp>
-        <p:nvSpPr>
-          <p:cNvPr id="10" name="Text 8"/>
-          <p:cNvSpPr txBox="1"/>
-          <p:nvPr/>
-        </p:nvSpPr>
-        <p:spPr>
-          <a:xfrm>
-            <a:off x="2112264" y="1417320"/>
-            <a:ext cx="1517904" cy="640080"/>
-          </a:xfrm>
-          <a:prstGeom prst="rect">
-            <a:avLst/>
-          </a:prstGeom>
-          <a:noFill/>
-          <a:ln/>
-        </p:spPr>
-        <p:txBody>
-          <a:bodyPr wrap="square" lIns="0" tIns="0" rIns="0" bIns="0" rtlCol="0" anchor="ctr"/>
-          <a:lstStyle/>
-          <a:p>
-            <a:pPr algn="ctr" indent="0" marL="0">
-              <a:buNone/>
-            </a:pPr>
-            <a:r>
-              <a:rPr lang="en-US" sz="3000" b="1" dirty="0">
-                <a:solidFill>
-                  <a:srgbClr val="0B0B0B"/>
-                </a:solidFill>
-                <a:latin typeface="Malgun Gothic" pitchFamily="34" charset="0"/>
-                <a:ea typeface="Malgun Gothic" pitchFamily="34" charset="-122"/>
-                <a:cs typeface="Malgun Gothic" pitchFamily="34" charset="-120"/>
-              </a:rPr>
-              <a:t>78</a:t>
-            </a:r>
-            <a:endParaRPr lang="en-US" sz="3000" dirty="0"/>
-          </a:p>
-        </p:txBody>
-      </p:sp>
-      <p:sp>
-        <p:nvSpPr>
-          <p:cNvPr id="11" name="Text 9"/>
-          <p:cNvSpPr txBox="1"/>
-          <p:nvPr/>
-        </p:nvSpPr>
-        <p:spPr>
-          <a:xfrm>
-            <a:off x="2112264" y="2057400"/>
-            <a:ext cx="1517904" cy="274320"/>
-          </a:xfrm>
-          <a:prstGeom prst="rect">
-            <a:avLst/>
-          </a:prstGeom>
-          <a:noFill/>
-          <a:ln/>
-        </p:spPr>
-        <p:txBody>
-          <a:bodyPr wrap="square" lIns="0" tIns="0" rIns="0" bIns="0" rtlCol="0" anchor="t"/>
-          <a:lstStyle/>
-          <a:p>
-            <a:pPr algn="ctr" indent="0" marL="0">
-              <a:buNone/>
-            </a:pPr>
-            <a:r>
-              <a:rPr lang="en-US" sz="1100" b="1" dirty="0">
-                <a:solidFill>
-                  <a:srgbClr val="0B0B0B"/>
-                </a:solidFill>
-                <a:latin typeface="Malgun Gothic" pitchFamily="34" charset="0"/>
-                <a:ea typeface="Malgun Gothic" pitchFamily="34" charset="-122"/>
-                <a:cs typeface="Malgun Gothic" pitchFamily="34" charset="-120"/>
-              </a:rPr>
-              <a:t>Direct</a:t>
-            </a:r>
-            <a:endParaRPr lang="en-US" sz="1100" dirty="0"/>
-          </a:p>
-        </p:txBody>
-      </p:sp>
-      <p:sp>
-        <p:nvSpPr>
-          <p:cNvPr id="12" name="Text 10"/>
-          <p:cNvSpPr txBox="1"/>
-          <p:nvPr/>
-        </p:nvSpPr>
-        <p:spPr>
-          <a:xfrm>
-            <a:off x="2112264" y="2331720"/>
-            <a:ext cx="1517904" cy="274320"/>
-          </a:xfrm>
-          <a:prstGeom prst="rect">
-            <a:avLst/>
-          </a:prstGeom>
-          <a:noFill/>
-          <a:ln/>
-        </p:spPr>
-        <p:txBody>
-          <a:bodyPr wrap="square" lIns="0" tIns="0" rIns="0" bIns="0" rtlCol="0" anchor="t"/>
-          <a:lstStyle/>
-          <a:p>
-            <a:pPr algn="ctr" indent="0" marL="0">
-              <a:buNone/>
-            </a:pPr>
-            <a:r>
-              <a:rPr lang="en-US" sz="950" dirty="0">
-                <a:solidFill>
-                  <a:srgbClr val="52514E"/>
-                </a:solidFill>
-                <a:latin typeface="Malgun Gothic" pitchFamily="34" charset="0"/>
-                <a:ea typeface="Malgun Gothic" pitchFamily="34" charset="-122"/>
-                <a:cs typeface="Malgun Gothic" pitchFamily="34" charset="-120"/>
-              </a:rPr>
-              <a:t>직접</a:t>
-            </a:r>
-            <a:endParaRPr lang="en-US" sz="950" dirty="0"/>
-          </a:p>
-        </p:txBody>
-      </p:sp>
-      <p:sp>
-        <p:nvSpPr>
-          <p:cNvPr id="13" name="Shape 11"/>
-          <p:cNvSpPr/>
-          <p:nvPr/>
-        </p:nvSpPr>
-        <p:spPr>
-          <a:xfrm>
-            <a:off x="3813048" y="1325880"/>
-            <a:ext cx="1517904" cy="1371600"/>
-          </a:xfrm>
-          <a:prstGeom prst="rect">
-            <a:avLst/>
-          </a:prstGeom>
-          <a:solidFill>
-            <a:srgbClr val="F4F6F7"/>
-          </a:solidFill>
-          <a:ln w="12700">
-            <a:solidFill>
-              <a:srgbClr val="F4F6F7"/>
-            </a:solidFill>
-            <a:prstDash val="solid"/>
-          </a:ln>
-        </p:spPr>
-      </p:sp>
-      <p:sp>
-        <p:nvSpPr>
-          <p:cNvPr id="14" name="Text 12"/>
-          <p:cNvSpPr txBox="1"/>
-          <p:nvPr/>
-        </p:nvSpPr>
-        <p:spPr>
-          <a:xfrm>
-            <a:off x="3813048" y="1417320"/>
-            <a:ext cx="1517904" cy="640080"/>
-          </a:xfrm>
-          <a:prstGeom prst="rect">
-            <a:avLst/>
-          </a:prstGeom>
-          <a:noFill/>
-          <a:ln/>
-        </p:spPr>
-        <p:txBody>
-          <a:bodyPr wrap="square" lIns="0" tIns="0" rIns="0" bIns="0" rtlCol="0" anchor="ctr"/>
-          <a:lstStyle/>
-          <a:p>
-            <a:pPr algn="ctr" indent="0" marL="0">
-              <a:buNone/>
-            </a:pPr>
-            <a:r>
-              <a:rPr lang="en-US" sz="3000" b="1" dirty="0">
-                <a:solidFill>
-                  <a:srgbClr val="2A78D6"/>
-                </a:solidFill>
-                <a:latin typeface="Malgun Gothic" pitchFamily="34" charset="0"/>
-                <a:ea typeface="Malgun Gothic" pitchFamily="34" charset="-122"/>
-                <a:cs typeface="Malgun Gothic" pitchFamily="34" charset="-120"/>
-              </a:rPr>
-              <a:t>32</a:t>
-            </a:r>
-            <a:endParaRPr lang="en-US" sz="3000" dirty="0"/>
-          </a:p>
-        </p:txBody>
-      </p:sp>
-      <p:sp>
-        <p:nvSpPr>
-          <p:cNvPr id="15" name="Text 13"/>
-          <p:cNvSpPr txBox="1"/>
-          <p:nvPr/>
-        </p:nvSpPr>
-        <p:spPr>
-          <a:xfrm>
-            <a:off x="3813048" y="2057400"/>
-            <a:ext cx="1517904" cy="274320"/>
-          </a:xfrm>
-          <a:prstGeom prst="rect">
-            <a:avLst/>
-          </a:prstGeom>
-          <a:noFill/>
-          <a:ln/>
-        </p:spPr>
-        <p:txBody>
-          <a:bodyPr wrap="square" lIns="0" tIns="0" rIns="0" bIns="0" rtlCol="0" anchor="t"/>
-          <a:lstStyle/>
-          <a:p>
-            <a:pPr algn="ctr" indent="0" marL="0">
-              <a:buNone/>
-            </a:pPr>
-            <a:r>
-              <a:rPr lang="en-US" sz="1100" b="1" dirty="0">
-                <a:solidFill>
-                  <a:srgbClr val="0B0B0B"/>
-                </a:solidFill>
-                <a:latin typeface="Malgun Gothic" pitchFamily="34" charset="0"/>
-                <a:ea typeface="Malgun Gothic" pitchFamily="34" charset="-122"/>
-                <a:cs typeface="Malgun Gothic" pitchFamily="34" charset="-120"/>
-              </a:rPr>
-              <a:t>Paid Search</a:t>
-            </a:r>
-            <a:endParaRPr lang="en-US" sz="1100" dirty="0"/>
-          </a:p>
-        </p:txBody>
-      </p:sp>
-      <p:sp>
-        <p:nvSpPr>
-          <p:cNvPr id="16" name="Text 14"/>
-          <p:cNvSpPr txBox="1"/>
-          <p:nvPr/>
-        </p:nvSpPr>
-        <p:spPr>
-          <a:xfrm>
-            <a:off x="3813048" y="2331720"/>
-            <a:ext cx="1517904" cy="274320"/>
-          </a:xfrm>
-          <a:prstGeom prst="rect">
-            <a:avLst/>
-          </a:prstGeom>
-          <a:noFill/>
-          <a:ln/>
-        </p:spPr>
-        <p:txBody>
-          <a:bodyPr wrap="square" lIns="0" tIns="0" rIns="0" bIns="0" rtlCol="0" anchor="t"/>
-          <a:lstStyle/>
-          <a:p>
-            <a:pPr algn="ctr" indent="0" marL="0">
-              <a:buNone/>
-            </a:pPr>
-            <a:r>
-              <a:rPr lang="en-US" sz="950" dirty="0">
-                <a:solidFill>
-                  <a:srgbClr val="52514E"/>
-                </a:solidFill>
-                <a:latin typeface="Malgun Gothic" pitchFamily="34" charset="0"/>
-                <a:ea typeface="Malgun Gothic" pitchFamily="34" charset="-122"/>
-                <a:cs typeface="Malgun Gothic" pitchFamily="34" charset="-120"/>
-              </a:rPr>
-              <a:t>네이버 광고</a:t>
-            </a:r>
-            <a:endParaRPr lang="en-US" sz="950" dirty="0"/>
-          </a:p>
-        </p:txBody>
-      </p:sp>
-      <p:sp>
-        <p:nvSpPr>
-          <p:cNvPr id="17" name="Shape 15"/>
-          <p:cNvSpPr/>
-          <p:nvPr/>
-        </p:nvSpPr>
-        <p:spPr>
-          <a:xfrm>
-            <a:off x="5513832" y="1325880"/>
-            <a:ext cx="1517904" cy="1371600"/>
-          </a:xfrm>
-          <a:prstGeom prst="rect">
-            <a:avLst/>
-          </a:prstGeom>
-          <a:solidFill>
-            <a:srgbClr val="F4F6F7"/>
-          </a:solidFill>
-          <a:ln w="12700">
-            <a:solidFill>
-              <a:srgbClr val="F4F6F7"/>
-            </a:solidFill>
-            <a:prstDash val="solid"/>
-          </a:ln>
-        </p:spPr>
-      </p:sp>
-      <p:sp>
-        <p:nvSpPr>
-          <p:cNvPr id="18" name="Text 16"/>
-          <p:cNvSpPr txBox="1"/>
-          <p:nvPr/>
-        </p:nvSpPr>
-        <p:spPr>
-          <a:xfrm>
-            <a:off x="5513832" y="1417320"/>
-            <a:ext cx="1517904" cy="640080"/>
-          </a:xfrm>
-          <a:prstGeom prst="rect">
-            <a:avLst/>
-          </a:prstGeom>
-          <a:noFill/>
-          <a:ln/>
-        </p:spPr>
-        <p:txBody>
-          <a:bodyPr wrap="square" lIns="0" tIns="0" rIns="0" bIns="0" rtlCol="0" anchor="ctr"/>
-          <a:lstStyle/>
-          <a:p>
-            <a:pPr algn="ctr" indent="0" marL="0">
-              <a:buNone/>
-            </a:pPr>
-            <a:r>
-              <a:rPr lang="en-US" sz="3000" b="1" dirty="0">
-                <a:solidFill>
-                  <a:srgbClr val="0B0B0B"/>
-                </a:solidFill>
-                <a:latin typeface="Malgun Gothic" pitchFamily="34" charset="0"/>
-                <a:ea typeface="Malgun Gothic" pitchFamily="34" charset="-122"/>
-                <a:cs typeface="Malgun Gothic" pitchFamily="34" charset="-120"/>
-              </a:rPr>
-              <a:t>5</a:t>
-            </a:r>
-            <a:endParaRPr lang="en-US" sz="3000" dirty="0"/>
-          </a:p>
-        </p:txBody>
-      </p:sp>
-      <p:sp>
-        <p:nvSpPr>
-          <p:cNvPr id="19" name="Text 17"/>
-          <p:cNvSpPr txBox="1"/>
-          <p:nvPr/>
-        </p:nvSpPr>
-        <p:spPr>
-          <a:xfrm>
-            <a:off x="5513832" y="2057400"/>
-            <a:ext cx="1517904" cy="274320"/>
-          </a:xfrm>
-          <a:prstGeom prst="rect">
-            <a:avLst/>
-          </a:prstGeom>
-          <a:noFill/>
-          <a:ln/>
-        </p:spPr>
-        <p:txBody>
-          <a:bodyPr wrap="square" lIns="0" tIns="0" rIns="0" bIns="0" rtlCol="0" anchor="t"/>
-          <a:lstStyle/>
-          <a:p>
-            <a:pPr algn="ctr" indent="0" marL="0">
-              <a:buNone/>
-            </a:pPr>
-            <a:r>
-              <a:rPr lang="en-US" sz="1100" b="1" dirty="0">
-                <a:solidFill>
-                  <a:srgbClr val="0B0B0B"/>
-                </a:solidFill>
-                <a:latin typeface="Malgun Gothic" pitchFamily="34" charset="0"/>
-                <a:ea typeface="Malgun Gothic" pitchFamily="34" charset="-122"/>
-                <a:cs typeface="Malgun Gothic" pitchFamily="34" charset="-120"/>
-              </a:rPr>
-              <a:t>Organic Social</a:t>
-            </a:r>
-            <a:endParaRPr lang="en-US" sz="1100" dirty="0"/>
-          </a:p>
-        </p:txBody>
-      </p:sp>
-      <p:sp>
-        <p:nvSpPr>
-          <p:cNvPr id="20" name="Text 18"/>
-          <p:cNvSpPr txBox="1"/>
-          <p:nvPr/>
-        </p:nvSpPr>
-        <p:spPr>
-          <a:xfrm>
-            <a:off x="5513832" y="2331720"/>
-            <a:ext cx="1517904" cy="274320"/>
-          </a:xfrm>
-          <a:prstGeom prst="rect">
-            <a:avLst/>
-          </a:prstGeom>
-          <a:noFill/>
-          <a:ln/>
-        </p:spPr>
-        <p:txBody>
-          <a:bodyPr wrap="square" lIns="0" tIns="0" rIns="0" bIns="0" rtlCol="0" anchor="t"/>
-          <a:lstStyle/>
-          <a:p>
-            <a:pPr algn="ctr" indent="0" marL="0">
-              <a:buNone/>
-            </a:pPr>
-            <a:r>
-              <a:rPr lang="en-US" sz="950" dirty="0">
-                <a:solidFill>
-                  <a:srgbClr val="52514E"/>
-                </a:solidFill>
-                <a:latin typeface="Malgun Gothic" pitchFamily="34" charset="0"/>
-                <a:ea typeface="Malgun Gothic" pitchFamily="34" charset="-122"/>
-                <a:cs typeface="Malgun Gothic" pitchFamily="34" charset="-120"/>
-              </a:rPr>
-              <a:t>블로그 등</a:t>
-            </a:r>
-            <a:endParaRPr lang="en-US" sz="950" dirty="0"/>
-          </a:p>
-        </p:txBody>
-      </p:sp>
-      <p:sp>
-        <p:nvSpPr>
-          <p:cNvPr id="21" name="Shape 19"/>
-          <p:cNvSpPr/>
-          <p:nvPr/>
-        </p:nvSpPr>
-        <p:spPr>
-          <a:xfrm>
-            <a:off x="7214616" y="1325880"/>
-            <a:ext cx="1517904" cy="1371600"/>
-          </a:xfrm>
-          <a:prstGeom prst="rect">
-            <a:avLst/>
-          </a:prstGeom>
-          <a:solidFill>
-            <a:srgbClr val="F4F6F7"/>
-          </a:solidFill>
-          <a:ln w="12700">
-            <a:solidFill>
-              <a:srgbClr val="F4F6F7"/>
-            </a:solidFill>
-            <a:prstDash val="solid"/>
-          </a:ln>
-        </p:spPr>
-      </p:sp>
-      <p:sp>
-        <p:nvSpPr>
-          <p:cNvPr id="22" name="Text 20"/>
-          <p:cNvSpPr txBox="1"/>
-          <p:nvPr/>
-        </p:nvSpPr>
-        <p:spPr>
-          <a:xfrm>
-            <a:off x="7214616" y="1417320"/>
-            <a:ext cx="1517904" cy="640080"/>
-          </a:xfrm>
-          <a:prstGeom prst="rect">
-            <a:avLst/>
-          </a:prstGeom>
-          <a:noFill/>
-          <a:ln/>
-        </p:spPr>
-        <p:txBody>
-          <a:bodyPr wrap="square" lIns="0" tIns="0" rIns="0" bIns="0" rtlCol="0" anchor="ctr"/>
-          <a:lstStyle/>
-          <a:p>
-            <a:pPr algn="ctr" indent="0" marL="0">
-              <a:buNone/>
-            </a:pPr>
-            <a:r>
-              <a:rPr lang="en-US" sz="3000" b="1" dirty="0">
-                <a:solidFill>
-                  <a:srgbClr val="0B0B0B"/>
-                </a:solidFill>
-                <a:latin typeface="Malgun Gothic" pitchFamily="34" charset="0"/>
-                <a:ea typeface="Malgun Gothic" pitchFamily="34" charset="-122"/>
-                <a:cs typeface="Malgun Gothic" pitchFamily="34" charset="-120"/>
-              </a:rPr>
-              <a:t>5</a:t>
-            </a:r>
-            <a:endParaRPr lang="en-US" sz="3000" dirty="0"/>
-          </a:p>
-        </p:txBody>
-      </p:sp>
-      <p:sp>
-        <p:nvSpPr>
-          <p:cNvPr id="23" name="Text 21"/>
-          <p:cNvSpPr txBox="1"/>
-          <p:nvPr/>
-        </p:nvSpPr>
-        <p:spPr>
-          <a:xfrm>
-            <a:off x="7214616" y="2057400"/>
-            <a:ext cx="1517904" cy="274320"/>
-          </a:xfrm>
-          <a:prstGeom prst="rect">
-            <a:avLst/>
-          </a:prstGeom>
-          <a:noFill/>
-          <a:ln/>
-        </p:spPr>
-        <p:txBody>
-          <a:bodyPr wrap="square" lIns="0" tIns="0" rIns="0" bIns="0" rtlCol="0" anchor="t"/>
-          <a:lstStyle/>
-          <a:p>
-            <a:pPr algn="ctr" indent="0" marL="0">
-              <a:buNone/>
-            </a:pPr>
-            <a:r>
-              <a:rPr lang="en-US" sz="1100" b="1" dirty="0">
-                <a:solidFill>
-                  <a:srgbClr val="0B0B0B"/>
-                </a:solidFill>
-                <a:latin typeface="Malgun Gothic" pitchFamily="34" charset="0"/>
-                <a:ea typeface="Malgun Gothic" pitchFamily="34" charset="-122"/>
-                <a:cs typeface="Malgun Gothic" pitchFamily="34" charset="-120"/>
-              </a:rPr>
-              <a:t>Referral</a:t>
-            </a:r>
-            <a:endParaRPr lang="en-US" sz="1100" dirty="0"/>
-          </a:p>
-        </p:txBody>
-      </p:sp>
-      <p:sp>
-        <p:nvSpPr>
-          <p:cNvPr id="24" name="Text 22"/>
-          <p:cNvSpPr txBox="1"/>
-          <p:nvPr/>
-        </p:nvSpPr>
-        <p:spPr>
-          <a:xfrm>
-            <a:off x="7214616" y="2331720"/>
-            <a:ext cx="1517904" cy="274320"/>
-          </a:xfrm>
-          <a:prstGeom prst="rect">
-            <a:avLst/>
-          </a:prstGeom>
-          <a:noFill/>
-          <a:ln/>
-        </p:spPr>
-        <p:txBody>
-          <a:bodyPr wrap="square" lIns="0" tIns="0" rIns="0" bIns="0" rtlCol="0" anchor="t"/>
-          <a:lstStyle/>
-          <a:p>
-            <a:pPr algn="ctr" indent="0" marL="0">
-              <a:buNone/>
-            </a:pPr>
-            <a:r>
-              <a:rPr lang="en-US" sz="950" dirty="0">
-                <a:solidFill>
-                  <a:srgbClr val="52514E"/>
-                </a:solidFill>
-                <a:latin typeface="Malgun Gothic" pitchFamily="34" charset="0"/>
-                <a:ea typeface="Malgun Gothic" pitchFamily="34" charset="-122"/>
-                <a:cs typeface="Malgun Gothic" pitchFamily="34" charset="-120"/>
-              </a:rPr>
-              <a:t>다른 사이트 링크</a:t>
-            </a:r>
-            <a:endParaRPr lang="en-US" sz="950" dirty="0"/>
-          </a:p>
-        </p:txBody>
-      </p:sp>
-      <p:sp>
-        <p:nvSpPr>
-          <p:cNvPr id="25" name="Text 23"/>
-          <p:cNvSpPr txBox="1"/>
-          <p:nvPr/>
-        </p:nvSpPr>
-        <p:spPr>
-          <a:xfrm>
-            <a:off x="411480" y="2880360"/>
-            <a:ext cx="8321040" cy="237744"/>
-          </a:xfrm>
-          <a:prstGeom prst="rect">
-            <a:avLst/>
-          </a:prstGeom>
-          <a:noFill/>
-          <a:ln/>
-        </p:spPr>
-        <p:txBody>
-          <a:bodyPr wrap="square" lIns="0" tIns="0" rIns="0" bIns="0" rtlCol="0" anchor="t"/>
-          <a:lstStyle/>
-          <a:p>
-            <a:pPr indent="0" marL="0">
-              <a:buNone/>
-            </a:pPr>
-            <a:r>
-              <a:rPr lang="en-US" sz="1100" b="1" dirty="0">
-                <a:solidFill>
-                  <a:srgbClr val="EB6834"/>
-                </a:solidFill>
-                <a:latin typeface="Malgun Gothic" pitchFamily="34" charset="0"/>
-                <a:ea typeface="Malgun Gothic" pitchFamily="34" charset="-122"/>
-                <a:cs typeface="Malgun Gothic" pitchFamily="34" charset="-120"/>
-              </a:rPr>
-              <a:t>한계</a:t>
-            </a:r>
-            <a:endParaRPr lang="en-US" sz="1100" dirty="0"/>
-          </a:p>
-        </p:txBody>
-      </p:sp>
-      <p:sp>
-        <p:nvSpPr>
-          <p:cNvPr id="26" name="Text 24"/>
-          <p:cNvSpPr txBox="1"/>
-          <p:nvPr/>
-        </p:nvSpPr>
-        <p:spPr>
-          <a:xfrm>
-            <a:off x="411480" y="3154680"/>
-            <a:ext cx="8321040" cy="822960"/>
-          </a:xfrm>
-          <a:prstGeom prst="rect">
-            <a:avLst/>
-          </a:prstGeom>
-          <a:noFill/>
-          <a:ln/>
-        </p:spPr>
-        <p:txBody>
-          <a:bodyPr wrap="square" lIns="0" tIns="0" rIns="0" bIns="0" rtlCol="0" anchor="t"/>
-          <a:lstStyle/>
-          <a:p>
-            <a:pPr indent="0" marL="0">
-              <a:spcAft>
-                <a:spcPts val="300"/>
-              </a:spcAft>
-              <a:buNone/>
-            </a:pPr>
-            <a:r>
-              <a:rPr lang="en-US" sz="1150" dirty="0">
-                <a:solidFill>
-                  <a:srgbClr val="0B0B0B"/>
-                </a:solidFill>
-                <a:latin typeface="Malgun Gothic" pitchFamily="34" charset="0"/>
-                <a:ea typeface="Malgun Gothic" pitchFamily="34" charset="-122"/>
-                <a:cs typeface="Malgun Gothic" pitchFamily="34" charset="-120"/>
-              </a:rPr>
-              <a:t>옛 사이트가 http라 네이버(https)에서 올 때 출처(리퍼러 쪽지)가 빠져 "직접"으로 잘못 분류됨</a:t>
-            </a:r>
-            <a:endParaRPr lang="en-US" sz="1150" dirty="0"/>
-          </a:p>
-          <a:p>
-            <a:pPr indent="0" marL="0">
-              <a:spcAft>
-                <a:spcPts val="300"/>
-              </a:spcAft>
-              <a:buNone/>
-            </a:pPr>
-            <a:r>
-              <a:rPr lang="en-US" sz="1150" dirty="0">
-                <a:solidFill>
-                  <a:srgbClr val="0B0B0B"/>
-                </a:solidFill>
-                <a:latin typeface="Malgun Gothic" pitchFamily="34" charset="0"/>
-                <a:ea typeface="Malgun Gothic" pitchFamily="34" charset="-122"/>
-                <a:cs typeface="Malgun Gothic" pitchFamily="34" charset="-120"/>
-              </a:rPr>
-              <a:t>10-06 전엔 광고 링크에 UTM이 없어 광고가 Organic Search로 들어감 (10-06 수정)</a:t>
-            </a:r>
-            <a:endParaRPr lang="en-US" sz="1150" dirty="0"/>
-          </a:p>
-        </p:txBody>
-      </p:sp>
-      <p:sp>
-        <p:nvSpPr>
-          <p:cNvPr id="27" name="Shape 25"/>
-          <p:cNvSpPr/>
-          <p:nvPr/>
-        </p:nvSpPr>
-        <p:spPr>
-          <a:xfrm>
-            <a:off x="411480" y="4480560"/>
-            <a:ext cx="8321040" cy="0"/>
-          </a:xfrm>
-          <a:prstGeom prst="line">
-            <a:avLst/>
-          </a:prstGeom>
-          <a:noFill/>
-          <a:ln w="12700">
-            <a:solidFill>
-              <a:srgbClr val="DFE3E2"/>
-            </a:solidFill>
-            <a:prstDash val="solid"/>
-          </a:ln>
-        </p:spPr>
-      </p:sp>
-      <p:sp>
-        <p:nvSpPr>
-          <p:cNvPr id="28" name="Text 26"/>
-          <p:cNvSpPr txBox="1"/>
-          <p:nvPr/>
-        </p:nvSpPr>
-        <p:spPr>
-          <a:xfrm>
-            <a:off x="411480" y="4526280"/>
-            <a:ext cx="8046720" cy="548640"/>
-          </a:xfrm>
-          <a:prstGeom prst="rect">
-            <a:avLst/>
-          </a:prstGeom>
-          <a:noFill/>
-          <a:ln/>
-        </p:spPr>
-        <p:txBody>
-          <a:bodyPr wrap="square" lIns="0" tIns="0" rIns="0" bIns="0" rtlCol="0" anchor="t"/>
-          <a:lstStyle/>
-          <a:p>
-            <a:pPr indent="0" marL="0">
-              <a:buNone/>
-            </a:pPr>
-            <a:r>
-              <a:rPr lang="en-US" sz="800" dirty="0">
-                <a:solidFill>
-                  <a:srgbClr val="52514E"/>
-                </a:solidFill>
-                <a:latin typeface="Malgun Gothic" pitchFamily="34" charset="0"/>
-                <a:ea typeface="Malgun Gothic" pitchFamily="34" charset="-122"/>
-                <a:cs typeface="Malgun Gothic" pitchFamily="34" charset="-120"/>
-              </a:rPr>
-              <a:t>출처: GA4 트래픽 획득 보고서 2026-09-18 ~ 10-15</a:t>
-            </a:r>
-            <a:endParaRPr lang="en-US" sz="800" dirty="0"/>
-          </a:p>
-        </p:txBody>
-      </p:sp>
-      <p:sp>
-        <p:nvSpPr>
-          <p:cNvPr id="25" name="Slide Number Placeholder 0"/>
-          <p:cNvSpPr>
-            <a:spLocks noGrp="1"/>
-          </p:cNvSpPr>
-          <p:nvPr>
-            <p:ph type="sldNum" sz="quarter" idx="4294967295"/>
-          </p:nvPr>
-        </p:nvSpPr>
-        <p:spPr>
-          <a:xfrm>
-            <a:off x="8503920" y="4846320"/>
-            <a:ext cx="365760" cy="201168"/>
-          </a:xfrm>
-          <a:prstGeom prst="rect">
-            <a:avLst/>
-          </a:prstGeom>
-          <a:extLst>
-            <a:ext uri="{C572A759-6A51-4108-AA02-DFA0A04FC94B}">
-              <ma14:wrappingTextBoxFlag xmlns:ma14="http://schemas.microsoft.com/office/mac/drawingml/2011/main" val="0"/>
-            </a:ext>
-          </a:extLst>
-        </p:spPr>
-        <p:txBody>
-          <a:bodyPr/>
-          <a:lstStyle>
-            <a:lvl1pPr>
-              <a:defRPr sz="800">
-                <a:solidFill>
-                  <a:srgbClr val="52514E"/>
-                </a:solidFill>
-                <a:latin typeface="Malgun Gothic"/>
-                <a:ea typeface="Malgun Gothic"/>
-                <a:cs typeface="Malgun Gothic"/>
-              </a:defRPr>
-            </a:lvl1pPr>
-          </a:lstStyle>
-          <a:p>
-            <a:pPr algn="l"/>
-            <a:fld id="{F7021451-1387-4CA6-816F-3879F97B5CBC}" type="slidenum">
-              <a:rPr b="0" lang="en-US"/>
-              <a:t>6</a:t>
-            </a:fld>
-            <a:endParaRPr lang="en-US"/>
-          </a:p>
-        </p:txBody>
-      </p:sp>
-    </p:spTree>
-  </p:cSld>
-  <p:clrMapOvr>
-    <a:masterClrMapping/>
-  </p:clrMapOvr>
-</p:sld>
-</file>
-
-<file path=ppt/slides/slide7.xml><?xml version="1.0" encoding="utf-8"?>
-<p:sld xmlns:a="http://schemas.openxmlformats.org/drawingml/2006/main" xmlns:r="http://schemas.openxmlformats.org/officeDocument/2006/relationships" xmlns:p="http://schemas.openxmlformats.org/presentationml/2006/main">
-  <p:cSld name="Slide 7">
-    <p:spTree>
-      <p:nvGrpSpPr>
-        <p:cNvPr id="1" name=""/>
-        <p:cNvGrpSpPr/>
-        <p:nvPr/>
-      </p:nvGrpSpPr>
-      <p:grpSpPr>
-        <a:xfrm>
-          <a:off x="0" y="0"/>
-          <a:ext cx="0" cy="0"/>
-          <a:chOff x="0" y="0"/>
-          <a:chExt cx="0" cy="0"/>
-        </a:xfrm>
-      </p:grpSpPr>
-      <p:sp>
-        <p:nvSpPr>
-          <p:cNvPr id="2" name="Text 0"/>
-          <p:cNvSpPr txBox="1"/>
-          <p:nvPr/>
-        </p:nvSpPr>
-        <p:spPr>
-          <a:xfrm>
-            <a:off x="411480" y="201168"/>
-            <a:ext cx="8321040" cy="201168"/>
-          </a:xfrm>
-          <a:prstGeom prst="rect">
-            <a:avLst/>
-          </a:prstGeom>
-          <a:noFill/>
-          <a:ln/>
-        </p:spPr>
-        <p:txBody>
-          <a:bodyPr wrap="square" lIns="0" tIns="0" rIns="0" bIns="0" rtlCol="0" anchor="ctr"/>
-          <a:lstStyle/>
-          <a:p>
-            <a:pPr indent="0" marL="0">
-              <a:buNone/>
-            </a:pPr>
-            <a:r>
-              <a:rPr lang="en-US" sz="1000" b="1" spc="100" kern="0" dirty="0">
-                <a:solidFill>
-                  <a:srgbClr val="2A78D6"/>
-                </a:solidFill>
-                <a:latin typeface="Malgun Gothic" pitchFamily="34" charset="0"/>
-                <a:ea typeface="Malgun Gothic" pitchFamily="34" charset="-122"/>
-                <a:cs typeface="Malgun Gothic" pitchFamily="34" charset="-120"/>
-              </a:rPr>
               <a:t>1-2. 다음</a:t>
             </a:r>
             <a:endParaRPr lang="en-US" sz="1000" dirty="0"/>
@@ -10612,7 +9270,7 @@
       </p:sp>
       <p:graphicFrame>
         <p:nvGraphicFramePr>
-          <p:cNvPr id="8" name="Table 0"/>
+          <p:cNvPr id="7" name="Table 0"/>
           <p:cNvGraphicFramePr>
             <a:graphicFrameLocks noGrp="1"/>
           </p:cNvGraphicFramePr>
@@ -11774,6 +10432,462 @@
             <a:pPr algn="l"/>
             <a:fld id="{F7021451-1387-4CA6-816F-3879F97B5CBC}" type="slidenum">
               <a:rPr b="0" lang="en-US"/>
+              <a:t>6</a:t>
+            </a:fld>
+            <a:endParaRPr lang="en-US"/>
+          </a:p>
+        </p:txBody>
+      </p:sp>
+    </p:spTree>
+  </p:cSld>
+  <p:clrMapOvr>
+    <a:masterClrMapping/>
+  </p:clrMapOvr>
+</p:sld>
+</file>
+
+<file path=ppt/slides/slide7.xml><?xml version="1.0" encoding="utf-8"?>
+<p:sld xmlns:a="http://schemas.openxmlformats.org/drawingml/2006/main" xmlns:r="http://schemas.openxmlformats.org/officeDocument/2006/relationships" xmlns:p="http://schemas.openxmlformats.org/presentationml/2006/main">
+  <p:cSld name="Slide 7">
+    <p:spTree>
+      <p:nvGrpSpPr>
+        <p:cNvPr id="1" name=""/>
+        <p:cNvGrpSpPr/>
+        <p:nvPr/>
+      </p:nvGrpSpPr>
+      <p:grpSpPr>
+        <a:xfrm>
+          <a:off x="0" y="0"/>
+          <a:ext cx="0" cy="0"/>
+          <a:chOff x="0" y="0"/>
+          <a:chExt cx="0" cy="0"/>
+        </a:xfrm>
+      </p:grpSpPr>
+      <p:sp>
+        <p:nvSpPr>
+          <p:cNvPr id="2" name="Text 0"/>
+          <p:cNvSpPr txBox="1"/>
+          <p:nvPr/>
+        </p:nvSpPr>
+        <p:spPr>
+          <a:xfrm>
+            <a:off x="411480" y="201168"/>
+            <a:ext cx="8321040" cy="201168"/>
+          </a:xfrm>
+          <a:prstGeom prst="rect">
+            <a:avLst/>
+          </a:prstGeom>
+          <a:noFill/>
+          <a:ln/>
+        </p:spPr>
+        <p:txBody>
+          <a:bodyPr wrap="square" lIns="0" tIns="0" rIns="0" bIns="0" rtlCol="0" anchor="ctr"/>
+          <a:lstStyle/>
+          <a:p>
+            <a:pPr indent="0" marL="0">
+              <a:buNone/>
+            </a:pPr>
+            <a:r>
+              <a:rPr lang="en-US" sz="1000" b="1" spc="100" kern="0" dirty="0">
+                <a:solidFill>
+                  <a:srgbClr val="2A78D6"/>
+                </a:solidFill>
+                <a:latin typeface="Malgun Gothic" pitchFamily="34" charset="0"/>
+                <a:ea typeface="Malgun Gothic" pitchFamily="34" charset="-122"/>
+                <a:cs typeface="Malgun Gothic" pitchFamily="34" charset="-120"/>
+              </a:rPr>
+              <a:t>1-3. 블로그</a:t>
+            </a:r>
+            <a:endParaRPr lang="en-US" sz="1000" dirty="0"/>
+          </a:p>
+        </p:txBody>
+      </p:sp>
+      <p:sp>
+        <p:nvSpPr>
+          <p:cNvPr id="3" name="Text 1"/>
+          <p:cNvSpPr txBox="1"/>
+          <p:nvPr/>
+        </p:nvSpPr>
+        <p:spPr>
+          <a:xfrm>
+            <a:off x="411480" y="420624"/>
+            <a:ext cx="8321040" cy="502920"/>
+          </a:xfrm>
+          <a:prstGeom prst="rect">
+            <a:avLst/>
+          </a:prstGeom>
+          <a:noFill/>
+          <a:ln/>
+        </p:spPr>
+        <p:txBody>
+          <a:bodyPr wrap="square" lIns="0" tIns="0" rIns="0" bIns="0" rtlCol="0" anchor="ctr"/>
+          <a:lstStyle/>
+          <a:p>
+            <a:pPr indent="0" marL="0">
+              <a:buNone/>
+            </a:pPr>
+            <a:r>
+              <a:rPr lang="en-US" sz="2100" b="1" dirty="0">
+                <a:solidFill>
+                  <a:srgbClr val="0B0B0B"/>
+                </a:solidFill>
+                <a:latin typeface="Malgun Gothic" pitchFamily="34" charset="0"/>
+                <a:ea typeface="Malgun Gothic" pitchFamily="34" charset="-122"/>
+                <a:cs typeface="Malgun Gothic" pitchFamily="34" charset="-120"/>
+              </a:rPr>
+              <a:t>글은 계속 썼는데 블로그에서 오는 방문은 끊겼다</a:t>
+            </a:r>
+            <a:endParaRPr lang="en-US" sz="2100" dirty="0"/>
+          </a:p>
+        </p:txBody>
+      </p:sp>
+      <p:sp>
+        <p:nvSpPr>
+          <p:cNvPr id="4" name="Text 2"/>
+          <p:cNvSpPr txBox="1"/>
+          <p:nvPr/>
+        </p:nvSpPr>
+        <p:spPr>
+          <a:xfrm>
+            <a:off x="411480" y="987552"/>
+            <a:ext cx="4937760" cy="237744"/>
+          </a:xfrm>
+          <a:prstGeom prst="rect">
+            <a:avLst/>
+          </a:prstGeom>
+          <a:noFill/>
+          <a:ln/>
+        </p:spPr>
+        <p:txBody>
+          <a:bodyPr wrap="square" lIns="0" tIns="0" rIns="0" bIns="0" rtlCol="0" anchor="t"/>
+          <a:lstStyle/>
+          <a:p>
+            <a:pPr indent="0" marL="0">
+              <a:buNone/>
+            </a:pPr>
+            <a:r>
+              <a:rPr lang="en-US" sz="1000" dirty="0">
+                <a:solidFill>
+                  <a:srgbClr val="52514E"/>
+                </a:solidFill>
+                <a:latin typeface="Malgun Gothic" pitchFamily="34" charset="0"/>
+                <a:ea typeface="Malgun Gothic" pitchFamily="34" charset="-122"/>
+                <a:cs typeface="Malgun Gothic" pitchFamily="34" charset="-120"/>
+              </a:rPr>
+              <a:t>연도별 블로그 글 수(건)</a:t>
+            </a:r>
+            <a:endParaRPr lang="en-US" sz="1000" dirty="0"/>
+          </a:p>
+        </p:txBody>
+      </p:sp>
+      <p:graphicFrame>
+        <p:nvGraphicFramePr>
+          <p:cNvPr id="5" name="Chart 0" descr=""/>
+          <p:cNvGraphicFramePr/>
+          <p:nvPr/>
+        </p:nvGraphicFramePr>
+        <p:xfrm>
+          <a:off x="338328" y="1243584"/>
+          <a:ext cx="5029200" cy="2560320"/>
+        </p:xfrm>
+        <a:graphic xmlns:a="http://schemas.openxmlformats.org/drawingml/2006/main">
+          <a:graphicData uri="http://schemas.openxmlformats.org/drawingml/2006/chart">
+            <c:chart xmlns:c="http://schemas.openxmlformats.org/drawingml/2006/chart" r:id="rId1"/>
+          </a:graphicData>
+        </a:graphic>
+      </p:graphicFrame>
+      <p:sp>
+        <p:nvSpPr>
+          <p:cNvPr id="6" name="Text 3"/>
+          <p:cNvSpPr txBox="1"/>
+          <p:nvPr/>
+        </p:nvSpPr>
+        <p:spPr>
+          <a:xfrm>
+            <a:off x="411480" y="1005840"/>
+            <a:ext cx="8321040" cy="91440"/>
+          </a:xfrm>
+          <a:prstGeom prst="rect">
+            <a:avLst/>
+          </a:prstGeom>
+          <a:noFill/>
+          <a:ln/>
+        </p:spPr>
+        <p:txBody>
+          <a:bodyPr wrap="square" lIns="0" tIns="0" rIns="0" bIns="0" rtlCol="0" anchor="t"/>
+          <a:lstStyle/>
+          <a:p>
+            <a:pPr indent="0" marL="0">
+              <a:buNone/>
+            </a:pPr>
+            <a:endParaRPr lang="en-US" dirty="0"/>
+          </a:p>
+        </p:txBody>
+      </p:sp>
+      <p:sp>
+        <p:nvSpPr>
+          <p:cNvPr id="7" name="Text 4"/>
+          <p:cNvSpPr txBox="1"/>
+          <p:nvPr/>
+        </p:nvSpPr>
+        <p:spPr>
+          <a:xfrm>
+            <a:off x="5577840" y="1051560"/>
+            <a:ext cx="3154680" cy="2743200"/>
+          </a:xfrm>
+          <a:prstGeom prst="rect">
+            <a:avLst/>
+          </a:prstGeom>
+          <a:noFill/>
+          <a:ln/>
+        </p:spPr>
+        <p:txBody>
+          <a:bodyPr wrap="square" lIns="0" tIns="0" rIns="0" bIns="0" rtlCol="0" anchor="t"/>
+          <a:lstStyle/>
+          <a:p>
+            <a:pPr indent="0" marL="0">
+              <a:spcAft>
+                <a:spcPts val="300"/>
+              </a:spcAft>
+              <a:buNone/>
+            </a:pPr>
+            <a:r>
+              <a:rPr lang="en-US" sz="1100" b="1" dirty="0">
+                <a:solidFill>
+                  <a:srgbClr val="0B0B0B"/>
+                </a:solidFill>
+                <a:latin typeface="Malgun Gothic" pitchFamily="34" charset="0"/>
+                <a:ea typeface="Malgun Gothic" pitchFamily="34" charset="-122"/>
+                <a:cs typeface="Malgun Gothic" pitchFamily="34" charset="-120"/>
+              </a:rPr>
+              <a:t>블로그에서 온 방문: 2,555(2016) → 600(2020) → 118(2021) → 43(2022)</a:t>
+            </a:r>
+            <a:endParaRPr lang="en-US" sz="1100" dirty="0"/>
+          </a:p>
+          <a:p>
+            <a:pPr indent="0" marL="0">
+              <a:spcAft>
+                <a:spcPts val="300"/>
+              </a:spcAft>
+              <a:buNone/>
+            </a:pPr>
+            <a:r>
+              <a:rPr lang="en-US" sz="1100" dirty="0">
+                <a:solidFill>
+                  <a:srgbClr val="0B0B0B"/>
+                </a:solidFill>
+                <a:latin typeface="Malgun Gothic" pitchFamily="34" charset="0"/>
+                <a:ea typeface="Malgun Gothic" pitchFamily="34" charset="-122"/>
+                <a:cs typeface="Malgun Gothic" pitchFamily="34" charset="-120"/>
+              </a:rPr>
+              <a:t>글의 성격: 승소율·FAQ·제도 안내 — 읽을 글 → 등록/승소 리스트 (2015 이후 계속)</a:t>
+            </a:r>
+            <a:endParaRPr lang="en-US" sz="1100" dirty="0"/>
+          </a:p>
+          <a:p>
+            <a:pPr indent="0" marL="0">
+              <a:spcAft>
+                <a:spcPts val="300"/>
+              </a:spcAft>
+              <a:buNone/>
+            </a:pPr>
+            <a:r>
+              <a:rPr lang="en-US" sz="1100" dirty="0">
+                <a:solidFill>
+                  <a:srgbClr val="0B0B0B"/>
+                </a:solidFill>
+                <a:latin typeface="Malgun Gothic" pitchFamily="34" charset="0"/>
+                <a:ea typeface="Malgun Gothic" pitchFamily="34" charset="-122"/>
+                <a:cs typeface="Malgun Gothic" pitchFamily="34" charset="-120"/>
+              </a:rPr>
+              <a:t>네이버 노출 방식 변화: 2016 C-Rank, 2018 VIEW, 2021-10 스마트블록</a:t>
+            </a:r>
+            <a:endParaRPr lang="en-US" sz="1100" dirty="0"/>
+          </a:p>
+        </p:txBody>
+      </p:sp>
+      <p:sp>
+        <p:nvSpPr>
+          <p:cNvPr id="8" name="Shape 5"/>
+          <p:cNvSpPr/>
+          <p:nvPr/>
+        </p:nvSpPr>
+        <p:spPr>
+          <a:xfrm>
+            <a:off x="411480" y="3913632"/>
+            <a:ext cx="8321040" cy="402336"/>
+          </a:xfrm>
+          <a:prstGeom prst="rect">
+            <a:avLst/>
+          </a:prstGeom>
+          <a:solidFill>
+            <a:srgbClr val="EEF4FB"/>
+          </a:solidFill>
+          <a:ln w="12700">
+            <a:solidFill>
+              <a:srgbClr val="EEF4FB"/>
+            </a:solidFill>
+            <a:prstDash val="solid"/>
+          </a:ln>
+        </p:spPr>
+      </p:sp>
+      <p:sp>
+        <p:nvSpPr>
+          <p:cNvPr id="9" name="Text 6"/>
+          <p:cNvSpPr txBox="1"/>
+          <p:nvPr/>
+        </p:nvSpPr>
+        <p:spPr>
+          <a:xfrm>
+            <a:off x="548640" y="3913632"/>
+            <a:ext cx="8046720" cy="402336"/>
+          </a:xfrm>
+          <a:prstGeom prst="rect">
+            <a:avLst/>
+          </a:prstGeom>
+          <a:noFill/>
+          <a:ln/>
+        </p:spPr>
+        <p:txBody>
+          <a:bodyPr wrap="square" lIns="0" tIns="0" rIns="0" bIns="0" rtlCol="0" anchor="ctr"/>
+          <a:lstStyle/>
+          <a:p>
+            <a:pPr indent="0" marL="0">
+              <a:buNone/>
+            </a:pPr>
+            <a:r>
+              <a:rPr lang="en-US" sz="1150" b="1" dirty="0">
+                <a:solidFill>
+                  <a:srgbClr val="2A78D6"/>
+                </a:solidFill>
+                <a:latin typeface="Malgun Gothic" pitchFamily="34" charset="0"/>
+                <a:ea typeface="Malgun Gothic" pitchFamily="34" charset="-122"/>
+                <a:cs typeface="Malgun Gothic" pitchFamily="34" charset="-120"/>
+              </a:rPr>
+              <a:t>action item   </a:t>
+            </a:r>
+            <a:pPr indent="0" marL="0">
+              <a:buNone/>
+            </a:pPr>
+            <a:r>
+              <a:rPr lang="en-US" sz="1150" dirty="0">
+                <a:solidFill>
+                  <a:srgbClr val="0B0B0B"/>
+                </a:solidFill>
+                <a:latin typeface="Malgun Gothic" pitchFamily="34" charset="0"/>
+                <a:ea typeface="Malgun Gothic" pitchFamily="34" charset="-122"/>
+                <a:cs typeface="Malgun Gothic" pitchFamily="34" charset="-120"/>
+              </a:rPr>
+              <a:t>읽을 내용이 있는 글로</a:t>
+            </a:r>
+            <a:endParaRPr lang="en-US" sz="1150" dirty="0"/>
+          </a:p>
+        </p:txBody>
+      </p:sp>
+      <p:sp>
+        <p:nvSpPr>
+          <p:cNvPr id="10" name="Shape 7"/>
+          <p:cNvSpPr/>
+          <p:nvPr/>
+        </p:nvSpPr>
+        <p:spPr>
+          <a:xfrm>
+            <a:off x="411480" y="4480560"/>
+            <a:ext cx="8321040" cy="0"/>
+          </a:xfrm>
+          <a:prstGeom prst="line">
+            <a:avLst/>
+          </a:prstGeom>
+          <a:noFill/>
+          <a:ln w="12700">
+            <a:solidFill>
+              <a:srgbClr val="DFE3E2"/>
+            </a:solidFill>
+            <a:prstDash val="solid"/>
+          </a:ln>
+        </p:spPr>
+      </p:sp>
+      <p:sp>
+        <p:nvSpPr>
+          <p:cNvPr id="11" name="Text 8"/>
+          <p:cNvSpPr txBox="1"/>
+          <p:nvPr/>
+        </p:nvSpPr>
+        <p:spPr>
+          <a:xfrm>
+            <a:off x="411480" y="4526280"/>
+            <a:ext cx="8046720" cy="548640"/>
+          </a:xfrm>
+          <a:prstGeom prst="rect">
+            <a:avLst/>
+          </a:prstGeom>
+          <a:noFill/>
+          <a:ln/>
+        </p:spPr>
+        <p:txBody>
+          <a:bodyPr wrap="square" lIns="0" tIns="0" rIns="0" bIns="0" rtlCol="0" anchor="t"/>
+          <a:lstStyle/>
+          <a:p>
+            <a:pPr indent="0" marL="0">
+              <a:buNone/>
+            </a:pPr>
+            <a:r>
+              <a:rPr lang="en-US" sz="800" dirty="0">
+                <a:solidFill>
+                  <a:srgbClr val="52514E"/>
+                </a:solidFill>
+                <a:latin typeface="Malgun Gothic" pitchFamily="34" charset="0"/>
+                <a:ea typeface="Malgun Gothic" pitchFamily="34" charset="-122"/>
+                <a:cs typeface="Malgun Gothic" pitchFamily="34" charset="-120"/>
+              </a:rPr>
+              <a:t>출처: 사무소 네이버 블로그 글 목록 2,736건(공개 RSS·글 목록) 2014 ~ 2026, 접속자통계 유입 도메인별 방문</a:t>
+            </a:r>
+            <a:endParaRPr lang="en-US" sz="800" dirty="0"/>
+          </a:p>
+        </p:txBody>
+      </p:sp>
+      <p:sp>
+        <p:nvSpPr>
+          <p:cNvPr id="25" name="Slide Number Placeholder 0"/>
+          <p:cNvSpPr>
+            <a:spLocks noGrp="1"/>
+          </p:cNvSpPr>
+          <p:nvPr>
+            <p:ph type="sldNum" sz="quarter" idx="4294967295"/>
+          </p:nvPr>
+        </p:nvSpPr>
+        <p:spPr>
+          <a:xfrm>
+            <a:off x="8503920" y="4846320"/>
+            <a:ext cx="365760" cy="201168"/>
+          </a:xfrm>
+          <a:prstGeom prst="rect">
+            <a:avLst/>
+          </a:prstGeom>
+          <a:extLst>
+            <a:ext uri="{C572A759-6A51-4108-AA02-DFA0A04FC94B}">
+              <ma14:wrappingTextBoxFlag xmlns:ma14="http://schemas.microsoft.com/office/mac/drawingml/2011/main" val="0"/>
+            </a:ext>
+          </a:extLst>
+        </p:spPr>
+        <p:txBody>
+          <a:bodyPr/>
+          <a:lstStyle>
+            <a:lvl1pPr>
+              <a:defRPr sz="800">
+                <a:solidFill>
+                  <a:srgbClr val="52514E"/>
+                </a:solidFill>
+                <a:latin typeface="Malgun Gothic"/>
+                <a:ea typeface="Malgun Gothic"/>
+                <a:cs typeface="Malgun Gothic"/>
+              </a:defRPr>
+            </a:lvl1pPr>
+          </a:lstStyle>
+          <a:p>
+            <a:pPr algn="l"/>
+            <a:fld id="{F7021451-1387-4CA6-816F-3879F97B5CBC}" type="slidenum">
+              <a:rPr b="0" lang="en-US"/>
               <a:t>7</a:t>
             </a:fld>
             <a:endParaRPr lang="en-US"/>
@@ -11838,7 +10952,7 @@
                 <a:ea typeface="Malgun Gothic" pitchFamily="34" charset="-122"/>
                 <a:cs typeface="Malgun Gothic" pitchFamily="34" charset="-120"/>
               </a:rPr>
-              <a:t>1-3. 블로그</a:t>
+              <a:t>1-4. 네이버 검색 · 1-5. 네이버 광고</a:t>
             </a:r>
             <a:endParaRPr lang="en-US" sz="1000" dirty="0"/>
           </a:p>
@@ -11877,7 +10991,7 @@
                 <a:ea typeface="Malgun Gothic" pitchFamily="34" charset="-122"/>
                 <a:cs typeface="Malgun Gothic" pitchFamily="34" charset="-120"/>
               </a:rPr>
-              <a:t>글은 계속 썼는데 블로그에서 오는 방문은 끊겼다</a:t>
+              <a:t>검색은 사이트가 못 읽히는 문제, 광고는 남은 방문의 3분의 2</a:t>
             </a:r>
             <a:endParaRPr lang="en-US" sz="2100" dirty="0"/>
           </a:p>
@@ -11885,14 +10999,39 @@
       </p:sp>
       <p:sp>
         <p:nvSpPr>
-          <p:cNvPr id="4" name="Text 2"/>
+          <p:cNvPr id="4" name="Shape 2"/>
+          <p:cNvSpPr/>
+          <p:nvPr/>
+        </p:nvSpPr>
+        <p:spPr>
+          <a:xfrm>
+            <a:off x="411480" y="1097280"/>
+            <a:ext cx="3977640" cy="2697480"/>
+          </a:xfrm>
+          <a:prstGeom prst="rect">
+            <a:avLst/>
+          </a:prstGeom>
+          <a:solidFill>
+            <a:srgbClr val="F4F6F7"/>
+          </a:solidFill>
+          <a:ln w="12700">
+            <a:solidFill>
+              <a:srgbClr val="F4F6F7"/>
+            </a:solidFill>
+            <a:prstDash val="solid"/>
+          </a:ln>
+        </p:spPr>
+      </p:sp>
+      <p:sp>
+        <p:nvSpPr>
+          <p:cNvPr id="5" name="Text 3"/>
           <p:cNvSpPr txBox="1"/>
           <p:nvPr/>
         </p:nvSpPr>
         <p:spPr>
           <a:xfrm>
-            <a:off x="411480" y="987552"/>
-            <a:ext cx="4937760" cy="237744"/>
+            <a:off x="594360" y="1188720"/>
+            <a:ext cx="3611880" cy="365760"/>
           </a:xfrm>
           <a:prstGeom prst="rect">
             <a:avLst/>
@@ -11908,74 +11047,30 @@
               <a:buNone/>
             </a:pPr>
             <a:r>
-              <a:rPr lang="en-US" sz="1000" dirty="0">
-                <a:solidFill>
-                  <a:srgbClr val="52514E"/>
+              <a:rPr lang="en-US" sz="1500" b="1" dirty="0">
+                <a:solidFill>
+                  <a:srgbClr val="2A78D6"/>
                 </a:solidFill>
                 <a:latin typeface="Malgun Gothic" pitchFamily="34" charset="0"/>
                 <a:ea typeface="Malgun Gothic" pitchFamily="34" charset="-122"/>
                 <a:cs typeface="Malgun Gothic" pitchFamily="34" charset="-120"/>
               </a:rPr>
-              <a:t>연도별 블로그 글 수(건)</a:t>
+              <a:t>네이버 검색  −54%</a:t>
             </a:r>
-            <a:endParaRPr lang="en-US" sz="1000" dirty="0"/>
-          </a:p>
-        </p:txBody>
-      </p:sp>
-      <p:graphicFrame>
-        <p:nvGraphicFramePr>
-          <p:cNvPr id="5" name="Chart 0" descr=""/>
-          <p:cNvGraphicFramePr/>
-          <p:nvPr/>
-        </p:nvGraphicFramePr>
-        <p:xfrm>
-          <a:off x="338328" y="1243584"/>
-          <a:ext cx="5029200" cy="2560320"/>
-        </p:xfrm>
-        <a:graphic xmlns:a="http://schemas.openxmlformats.org/drawingml/2006/main">
-          <a:graphicData uri="http://schemas.openxmlformats.org/drawingml/2006/chart">
-            <c:chart xmlns:c="http://schemas.openxmlformats.org/drawingml/2006/chart" r:id="rId1"/>
-          </a:graphicData>
-        </a:graphic>
-      </p:graphicFrame>
-      <p:sp>
-        <p:nvSpPr>
-          <p:cNvPr id="6" name="Text 3"/>
+            <a:endParaRPr lang="en-US" sz="1500" dirty="0"/>
+          </a:p>
+        </p:txBody>
+      </p:sp>
+      <p:sp>
+        <p:nvSpPr>
+          <p:cNvPr id="6" name="Text 4"/>
           <p:cNvSpPr txBox="1"/>
           <p:nvPr/>
         </p:nvSpPr>
         <p:spPr>
           <a:xfrm>
-            <a:off x="411480" y="1005840"/>
-            <a:ext cx="8321040" cy="91440"/>
-          </a:xfrm>
-          <a:prstGeom prst="rect">
-            <a:avLst/>
-          </a:prstGeom>
-          <a:noFill/>
-          <a:ln/>
-        </p:spPr>
-        <p:txBody>
-          <a:bodyPr wrap="square" lIns="0" tIns="0" rIns="0" bIns="0" rtlCol="0" anchor="t"/>
-          <a:lstStyle/>
-          <a:p>
-            <a:pPr indent="0" marL="0">
-              <a:buNone/>
-            </a:pPr>
-            <a:endParaRPr lang="en-US" dirty="0"/>
-          </a:p>
-        </p:txBody>
-      </p:sp>
-      <p:sp>
-        <p:nvSpPr>
-          <p:cNvPr id="7" name="Text 4"/>
-          <p:cNvSpPr txBox="1"/>
-          <p:nvPr/>
-        </p:nvSpPr>
-        <p:spPr>
-          <a:xfrm>
-            <a:off x="5577840" y="1051560"/>
-            <a:ext cx="3154680" cy="2743200"/>
+            <a:off x="594360" y="1645920"/>
+            <a:ext cx="3611880" cy="1280160"/>
           </a:xfrm>
           <a:prstGeom prst="rect">
             <a:avLst/>
@@ -11994,7 +11089,7 @@
               <a:buNone/>
             </a:pPr>
             <a:r>
-              <a:rPr lang="en-US" sz="1100" b="1" dirty="0">
+              <a:rPr lang="en-US" sz="1200" dirty="0">
                 <a:solidFill>
                   <a:srgbClr val="0B0B0B"/>
                 </a:solidFill>
@@ -12002,10 +11097,135 @@
                 <a:ea typeface="Malgun Gothic" pitchFamily="34" charset="-122"/>
                 <a:cs typeface="Malgun Gothic" pitchFamily="34" charset="-120"/>
               </a:rPr>
-              <a:t>블로그에서 온 방문: 2,555(2016) → 600(2020) → 118(2021) → 43(2022)</a:t>
+              <a:t>사이트 쪽: 글자가 전부 이미지라 검색엔진이 못 읽음</a:t>
             </a:r>
-            <a:endParaRPr lang="en-US" sz="1100" dirty="0"/>
-          </a:p>
+            <a:endParaRPr lang="en-US" sz="1200" dirty="0"/>
+          </a:p>
+        </p:txBody>
+      </p:sp>
+      <p:sp>
+        <p:nvSpPr>
+          <p:cNvPr id="7" name="Text 5"/>
+          <p:cNvSpPr txBox="1"/>
+          <p:nvPr/>
+        </p:nvSpPr>
+        <p:spPr>
+          <a:xfrm>
+            <a:off x="594360" y="3291840"/>
+            <a:ext cx="3611880" cy="365760"/>
+          </a:xfrm>
+          <a:prstGeom prst="rect">
+            <a:avLst/>
+          </a:prstGeom>
+          <a:noFill/>
+          <a:ln/>
+        </p:spPr>
+        <p:txBody>
+          <a:bodyPr wrap="square" lIns="0" tIns="0" rIns="0" bIns="0" rtlCol="0" anchor="t"/>
+          <a:lstStyle/>
+          <a:p>
+            <a:pPr indent="0" marL="0">
+              <a:buNone/>
+            </a:pPr>
+            <a:r>
+              <a:rPr lang="en-US" sz="1200" b="1" dirty="0">
+                <a:solidFill>
+                  <a:srgbClr val="2A78D6"/>
+                </a:solidFill>
+                <a:latin typeface="Malgun Gothic" pitchFamily="34" charset="0"/>
+                <a:ea typeface="Malgun Gothic" pitchFamily="34" charset="-122"/>
+                <a:cs typeface="Malgun Gothic" pitchFamily="34" charset="-120"/>
+              </a:rPr>
+              <a:t>→ 리뉴얼로 글자를 텍스트로</a:t>
+            </a:r>
+            <a:endParaRPr lang="en-US" sz="1200" dirty="0"/>
+          </a:p>
+        </p:txBody>
+      </p:sp>
+      <p:sp>
+        <p:nvSpPr>
+          <p:cNvPr id="8" name="Shape 6"/>
+          <p:cNvSpPr/>
+          <p:nvPr/>
+        </p:nvSpPr>
+        <p:spPr>
+          <a:xfrm>
+            <a:off x="4754880" y="1097280"/>
+            <a:ext cx="3977640" cy="2697480"/>
+          </a:xfrm>
+          <a:prstGeom prst="rect">
+            <a:avLst/>
+          </a:prstGeom>
+          <a:solidFill>
+            <a:srgbClr val="F4F6F7"/>
+          </a:solidFill>
+          <a:ln w="12700">
+            <a:solidFill>
+              <a:srgbClr val="F4F6F7"/>
+            </a:solidFill>
+            <a:prstDash val="solid"/>
+          </a:ln>
+        </p:spPr>
+      </p:sp>
+      <p:sp>
+        <p:nvSpPr>
+          <p:cNvPr id="9" name="Text 7"/>
+          <p:cNvSpPr txBox="1"/>
+          <p:nvPr/>
+        </p:nvSpPr>
+        <p:spPr>
+          <a:xfrm>
+            <a:off x="4937760" y="1188720"/>
+            <a:ext cx="3611880" cy="365760"/>
+          </a:xfrm>
+          <a:prstGeom prst="rect">
+            <a:avLst/>
+          </a:prstGeom>
+          <a:noFill/>
+          <a:ln/>
+        </p:spPr>
+        <p:txBody>
+          <a:bodyPr wrap="square" lIns="0" tIns="0" rIns="0" bIns="0" rtlCol="0" anchor="t"/>
+          <a:lstStyle/>
+          <a:p>
+            <a:pPr indent="0" marL="0">
+              <a:buNone/>
+            </a:pPr>
+            <a:r>
+              <a:rPr lang="en-US" sz="1500" b="1" dirty="0">
+                <a:solidFill>
+                  <a:srgbClr val="C08A00"/>
+                </a:solidFill>
+                <a:latin typeface="Malgun Gothic" pitchFamily="34" charset="0"/>
+                <a:ea typeface="Malgun Gothic" pitchFamily="34" charset="-122"/>
+                <a:cs typeface="Malgun Gothic" pitchFamily="34" charset="-120"/>
+              </a:rPr>
+              <a:t>네이버 광고  −40%</a:t>
+            </a:r>
+            <a:endParaRPr lang="en-US" sz="1500" dirty="0"/>
+          </a:p>
+        </p:txBody>
+      </p:sp>
+      <p:sp>
+        <p:nvSpPr>
+          <p:cNvPr id="10" name="Text 8"/>
+          <p:cNvSpPr txBox="1"/>
+          <p:nvPr/>
+        </p:nvSpPr>
+        <p:spPr>
+          <a:xfrm>
+            <a:off x="4937760" y="1645920"/>
+            <a:ext cx="3611880" cy="1280160"/>
+          </a:xfrm>
+          <a:prstGeom prst="rect">
+            <a:avLst/>
+          </a:prstGeom>
+          <a:noFill/>
+          <a:ln/>
+        </p:spPr>
+        <p:txBody>
+          <a:bodyPr wrap="square" lIns="0" tIns="0" rIns="0" bIns="0" rtlCol="0" anchor="t"/>
+          <a:lstStyle/>
           <a:p>
             <a:pPr indent="0" marL="0">
               <a:spcAft>
@@ -12014,7 +11234,7 @@
               <a:buNone/>
             </a:pPr>
             <a:r>
-              <a:rPr lang="en-US" sz="1100" dirty="0">
+              <a:rPr lang="en-US" sz="1200" dirty="0">
                 <a:solidFill>
                   <a:srgbClr val="0B0B0B"/>
                 </a:solidFill>
@@ -12022,9 +11242,9 @@
                 <a:ea typeface="Malgun Gothic" pitchFamily="34" charset="-122"/>
                 <a:cs typeface="Malgun Gothic" pitchFamily="34" charset="-120"/>
               </a:rPr>
-              <a:t>글의 성격: 승소율·FAQ·제도 안내 — 읽을 글 → 등록/승소 리스트 (2015 이후 계속)</a:t>
+              <a:t>옛 사이트 세션(1개월) 약 180, 그중 광고 주소로 온 방문 120 (GA4)</a:t>
             </a:r>
-            <a:endParaRPr lang="en-US" sz="1100" dirty="0"/>
+            <a:endParaRPr lang="en-US" sz="1200" dirty="0"/>
           </a:p>
           <a:p>
             <a:pPr indent="0" marL="0">
@@ -12034,7 +11254,7 @@
               <a:buNone/>
             </a:pPr>
             <a:r>
-              <a:rPr lang="en-US" sz="1100" dirty="0">
+              <a:rPr lang="en-US" sz="1200" dirty="0">
                 <a:solidFill>
                   <a:srgbClr val="0B0B0B"/>
                 </a:solidFill>
@@ -12042,47 +11262,22 @@
                 <a:ea typeface="Malgun Gothic" pitchFamily="34" charset="-122"/>
                 <a:cs typeface="Malgun Gothic" pitchFamily="34" charset="-120"/>
               </a:rPr>
-              <a:t>네이버 노출 방식 변화: 2016 C-Rank, 2018 VIEW, 2021-10 스마트블록</a:t>
+              <a:t>기기: 신청 페이지 142명 중 모바일 62 (44%)</a:t>
             </a:r>
-            <a:endParaRPr lang="en-US" sz="1100" dirty="0"/>
-          </a:p>
-        </p:txBody>
-      </p:sp>
-      <p:sp>
-        <p:nvSpPr>
-          <p:cNvPr id="8" name="Shape 5"/>
-          <p:cNvSpPr/>
-          <p:nvPr/>
-        </p:nvSpPr>
-        <p:spPr>
-          <a:xfrm>
-            <a:off x="411480" y="3913632"/>
-            <a:ext cx="8321040" cy="402336"/>
-          </a:xfrm>
-          <a:prstGeom prst="rect">
-            <a:avLst/>
-          </a:prstGeom>
-          <a:solidFill>
-            <a:srgbClr val="EEF4FB"/>
-          </a:solidFill>
-          <a:ln w="12700">
-            <a:solidFill>
-              <a:srgbClr val="EEF4FB"/>
-            </a:solidFill>
-            <a:prstDash val="solid"/>
-          </a:ln>
-        </p:spPr>
-      </p:sp>
-      <p:sp>
-        <p:nvSpPr>
-          <p:cNvPr id="9" name="Text 6"/>
+            <a:endParaRPr lang="en-US" sz="1200" dirty="0"/>
+          </a:p>
+        </p:txBody>
+      </p:sp>
+      <p:sp>
+        <p:nvSpPr>
+          <p:cNvPr id="11" name="Text 9"/>
           <p:cNvSpPr txBox="1"/>
           <p:nvPr/>
         </p:nvSpPr>
         <p:spPr>
           <a:xfrm>
-            <a:off x="548640" y="3913632"/>
-            <a:ext cx="8046720" cy="402336"/>
+            <a:off x="4937760" y="3291840"/>
+            <a:ext cx="3611880" cy="365760"/>
           </a:xfrm>
           <a:prstGeom prst="rect">
             <a:avLst/>
@@ -12091,14 +11286,14 @@
           <a:ln/>
         </p:spPr>
         <p:txBody>
-          <a:bodyPr wrap="square" lIns="0" tIns="0" rIns="0" bIns="0" rtlCol="0" anchor="ctr"/>
+          <a:bodyPr wrap="square" lIns="0" tIns="0" rIns="0" bIns="0" rtlCol="0" anchor="t"/>
           <a:lstStyle/>
           <a:p>
             <a:pPr indent="0" marL="0">
               <a:buNone/>
             </a:pPr>
             <a:r>
-              <a:rPr lang="en-US" sz="1150" b="1" dirty="0">
+              <a:rPr lang="en-US" sz="1200" b="1" dirty="0">
                 <a:solidFill>
                   <a:srgbClr val="2A78D6"/>
                 </a:solidFill>
@@ -12106,29 +11301,15 @@
                 <a:ea typeface="Malgun Gothic" pitchFamily="34" charset="-122"/>
                 <a:cs typeface="Malgun Gothic" pitchFamily="34" charset="-120"/>
               </a:rPr>
-              <a:t>action item   </a:t>
+              <a:t>→ 다음 장에서 광고 검색어를 봄</a:t>
             </a:r>
-            <a:pPr indent="0" marL="0">
-              <a:buNone/>
-            </a:pPr>
-            <a:r>
-              <a:rPr lang="en-US" sz="1150" dirty="0">
-                <a:solidFill>
-                  <a:srgbClr val="0B0B0B"/>
-                </a:solidFill>
-                <a:latin typeface="Malgun Gothic" pitchFamily="34" charset="0"/>
-                <a:ea typeface="Malgun Gothic" pitchFamily="34" charset="-122"/>
-                <a:cs typeface="Malgun Gothic" pitchFamily="34" charset="-120"/>
-              </a:rPr>
-              <a:t>읽을 내용이 있는 글로</a:t>
-            </a:r>
-            <a:endParaRPr lang="en-US" sz="1150" dirty="0"/>
-          </a:p>
-        </p:txBody>
-      </p:sp>
-      <p:sp>
-        <p:nvSpPr>
-          <p:cNvPr id="10" name="Shape 7"/>
+            <a:endParaRPr lang="en-US" sz="1200" dirty="0"/>
+          </a:p>
+        </p:txBody>
+      </p:sp>
+      <p:sp>
+        <p:nvSpPr>
+          <p:cNvPr id="12" name="Shape 10"/>
           <p:cNvSpPr/>
           <p:nvPr/>
         </p:nvSpPr>
@@ -12151,7 +11332,7 @@
       </p:sp>
       <p:sp>
         <p:nvSpPr>
-          <p:cNvPr id="11" name="Text 8"/>
+          <p:cNvPr id="13" name="Text 11"/>
           <p:cNvSpPr txBox="1"/>
           <p:nvPr/>
         </p:nvSpPr>
@@ -12182,7 +11363,7 @@
                 <a:ea typeface="Malgun Gothic" pitchFamily="34" charset="-122"/>
                 <a:cs typeface="Malgun Gothic" pitchFamily="34" charset="-120"/>
               </a:rPr>
-              <a:t>출처: 사무소 네이버 블로그 글 목록 2,736건(공개 RSS·글 목록) 2014 ~ 2026, 접속자통계 유입 도메인별 방문</a:t>
+              <a:t>출처: 접속자통계 유입 도메인별 방문, GA4 2026-09-02 ~ 10-01 · 전처리: GA4는 작업자 접속이 섞인 "직접" 69세션 제외</a:t>
             </a:r>
             <a:endParaRPr lang="en-US" sz="800" dirty="0"/>
           </a:p>
@@ -12294,7 +11475,7 @@
                 <a:ea typeface="Malgun Gothic" pitchFamily="34" charset="-122"/>
                 <a:cs typeface="Malgun Gothic" pitchFamily="34" charset="-120"/>
               </a:rPr>
-              <a:t>1-4. 네이버 검색 · 1-5. 네이버 광고</a:t>
+              <a:t>1-6. 광고 키워드</a:t>
             </a:r>
             <a:endParaRPr lang="en-US" sz="1000" dirty="0"/>
           </a:p>
@@ -12333,7 +11514,7 @@
                 <a:ea typeface="Malgun Gothic" pitchFamily="34" charset="-122"/>
                 <a:cs typeface="Malgun Gothic" pitchFamily="34" charset="-120"/>
               </a:rPr>
-              <a:t>검색은 사이트가 못 읽히는 문제, 광고는 남은 방문의 3분의 2</a:t>
+              <a:t>검색어 유형별 클릭률</a:t>
             </a:r>
             <a:endParaRPr lang="en-US" sz="2100" dirty="0"/>
           </a:p>
@@ -12341,39 +11522,14 @@
       </p:sp>
       <p:sp>
         <p:nvSpPr>
-          <p:cNvPr id="4" name="Shape 2"/>
-          <p:cNvSpPr/>
-          <p:nvPr/>
-        </p:nvSpPr>
-        <p:spPr>
-          <a:xfrm>
-            <a:off x="411480" y="1097280"/>
-            <a:ext cx="3977640" cy="2697480"/>
-          </a:xfrm>
-          <a:prstGeom prst="rect">
-            <a:avLst/>
-          </a:prstGeom>
-          <a:solidFill>
-            <a:srgbClr val="F4F6F7"/>
-          </a:solidFill>
-          <a:ln w="12700">
-            <a:solidFill>
-              <a:srgbClr val="F4F6F7"/>
-            </a:solidFill>
-            <a:prstDash val="solid"/>
-          </a:ln>
-        </p:spPr>
-      </p:sp>
-      <p:sp>
-        <p:nvSpPr>
-          <p:cNvPr id="5" name="Text 3"/>
+          <p:cNvPr id="4" name="Text 2"/>
           <p:cNvSpPr txBox="1"/>
           <p:nvPr/>
         </p:nvSpPr>
         <p:spPr>
           <a:xfrm>
-            <a:off x="594360" y="1188720"/>
-            <a:ext cx="3611880" cy="365760"/>
+            <a:off x="411480" y="987552"/>
+            <a:ext cx="8321040" cy="237744"/>
           </a:xfrm>
           <a:prstGeom prst="rect">
             <a:avLst/>
@@ -12389,269 +11545,39 @@
               <a:buNone/>
             </a:pPr>
             <a:r>
-              <a:rPr lang="en-US" sz="1500" b="1" dirty="0">
-                <a:solidFill>
-                  <a:srgbClr val="2A78D6"/>
+              <a:rPr lang="en-US" sz="1000" dirty="0">
+                <a:solidFill>
+                  <a:srgbClr val="52514E"/>
                 </a:solidFill>
                 <a:latin typeface="Malgun Gothic" pitchFamily="34" charset="0"/>
                 <a:ea typeface="Malgun Gothic" pitchFamily="34" charset="-122"/>
                 <a:cs typeface="Malgun Gothic" pitchFamily="34" charset="-120"/>
               </a:rPr>
-              <a:t>네이버 검색  −54%</a:t>
+              <a:t>괄호는 90일 클릭 수 · 클릭당 비용은 유형과 상관없이 2,000원 안팎 (지역명만 706원)</a:t>
             </a:r>
-            <a:endParaRPr lang="en-US" sz="1500" dirty="0"/>
-          </a:p>
-        </p:txBody>
-      </p:sp>
-      <p:sp>
-        <p:nvSpPr>
-          <p:cNvPr id="6" name="Text 4"/>
-          <p:cNvSpPr txBox="1"/>
-          <p:nvPr/>
-        </p:nvSpPr>
-        <p:spPr>
-          <a:xfrm>
-            <a:off x="594360" y="1645920"/>
-            <a:ext cx="3611880" cy="1280160"/>
-          </a:xfrm>
-          <a:prstGeom prst="rect">
-            <a:avLst/>
-          </a:prstGeom>
-          <a:noFill/>
-          <a:ln/>
-        </p:spPr>
-        <p:txBody>
-          <a:bodyPr wrap="square" lIns="0" tIns="0" rIns="0" bIns="0" rtlCol="0" anchor="t"/>
-          <a:lstStyle/>
-          <a:p>
-            <a:pPr indent="0" marL="0">
-              <a:spcAft>
-                <a:spcPts val="300"/>
-              </a:spcAft>
-              <a:buNone/>
-            </a:pPr>
-            <a:r>
-              <a:rPr lang="en-US" sz="1200" dirty="0">
-                <a:solidFill>
-                  <a:srgbClr val="0B0B0B"/>
-                </a:solidFill>
-                <a:latin typeface="Malgun Gothic" pitchFamily="34" charset="0"/>
-                <a:ea typeface="Malgun Gothic" pitchFamily="34" charset="-122"/>
-                <a:cs typeface="Malgun Gothic" pitchFamily="34" charset="-120"/>
-              </a:rPr>
-              <a:t>사이트 쪽: 글자가 전부 이미지라 검색엔진이 못 읽음</a:t>
-            </a:r>
-            <a:endParaRPr lang="en-US" sz="1200" dirty="0"/>
-          </a:p>
-        </p:txBody>
-      </p:sp>
-      <p:sp>
-        <p:nvSpPr>
-          <p:cNvPr id="7" name="Text 5"/>
-          <p:cNvSpPr txBox="1"/>
-          <p:nvPr/>
-        </p:nvSpPr>
-        <p:spPr>
-          <a:xfrm>
-            <a:off x="594360" y="3291840"/>
-            <a:ext cx="3611880" cy="365760"/>
-          </a:xfrm>
-          <a:prstGeom prst="rect">
-            <a:avLst/>
-          </a:prstGeom>
-          <a:noFill/>
-          <a:ln/>
-        </p:spPr>
-        <p:txBody>
-          <a:bodyPr wrap="square" lIns="0" tIns="0" rIns="0" bIns="0" rtlCol="0" anchor="t"/>
-          <a:lstStyle/>
-          <a:p>
-            <a:pPr indent="0" marL="0">
-              <a:buNone/>
-            </a:pPr>
-            <a:r>
-              <a:rPr lang="en-US" sz="1200" b="1" dirty="0">
-                <a:solidFill>
-                  <a:srgbClr val="2A78D6"/>
-                </a:solidFill>
-                <a:latin typeface="Malgun Gothic" pitchFamily="34" charset="0"/>
-                <a:ea typeface="Malgun Gothic" pitchFamily="34" charset="-122"/>
-                <a:cs typeface="Malgun Gothic" pitchFamily="34" charset="-120"/>
-              </a:rPr>
-              <a:t>→ 리뉴얼로 글자를 텍스트로</a:t>
-            </a:r>
-            <a:endParaRPr lang="en-US" sz="1200" dirty="0"/>
-          </a:p>
-        </p:txBody>
-      </p:sp>
-      <p:sp>
-        <p:nvSpPr>
-          <p:cNvPr id="8" name="Shape 6"/>
-          <p:cNvSpPr/>
-          <p:nvPr/>
-        </p:nvSpPr>
-        <p:spPr>
-          <a:xfrm>
-            <a:off x="4754880" y="1097280"/>
-            <a:ext cx="3977640" cy="2697480"/>
-          </a:xfrm>
-          <a:prstGeom prst="rect">
-            <a:avLst/>
-          </a:prstGeom>
-          <a:solidFill>
-            <a:srgbClr val="F4F6F7"/>
-          </a:solidFill>
-          <a:ln w="12700">
-            <a:solidFill>
-              <a:srgbClr val="F4F6F7"/>
-            </a:solidFill>
-            <a:prstDash val="solid"/>
-          </a:ln>
-        </p:spPr>
-      </p:sp>
-      <p:sp>
-        <p:nvSpPr>
-          <p:cNvPr id="9" name="Text 7"/>
-          <p:cNvSpPr txBox="1"/>
-          <p:nvPr/>
-        </p:nvSpPr>
-        <p:spPr>
-          <a:xfrm>
-            <a:off x="4937760" y="1188720"/>
-            <a:ext cx="3611880" cy="365760"/>
-          </a:xfrm>
-          <a:prstGeom prst="rect">
-            <a:avLst/>
-          </a:prstGeom>
-          <a:noFill/>
-          <a:ln/>
-        </p:spPr>
-        <p:txBody>
-          <a:bodyPr wrap="square" lIns="0" tIns="0" rIns="0" bIns="0" rtlCol="0" anchor="t"/>
-          <a:lstStyle/>
-          <a:p>
-            <a:pPr indent="0" marL="0">
-              <a:buNone/>
-            </a:pPr>
-            <a:r>
-              <a:rPr lang="en-US" sz="1500" b="1" dirty="0">
-                <a:solidFill>
-                  <a:srgbClr val="C08A00"/>
-                </a:solidFill>
-                <a:latin typeface="Malgun Gothic" pitchFamily="34" charset="0"/>
-                <a:ea typeface="Malgun Gothic" pitchFamily="34" charset="-122"/>
-                <a:cs typeface="Malgun Gothic" pitchFamily="34" charset="-120"/>
-              </a:rPr>
-              <a:t>네이버 광고  −40%</a:t>
-            </a:r>
-            <a:endParaRPr lang="en-US" sz="1500" dirty="0"/>
-          </a:p>
-        </p:txBody>
-      </p:sp>
-      <p:sp>
-        <p:nvSpPr>
-          <p:cNvPr id="10" name="Text 8"/>
-          <p:cNvSpPr txBox="1"/>
-          <p:nvPr/>
-        </p:nvSpPr>
-        <p:spPr>
-          <a:xfrm>
-            <a:off x="4937760" y="1645920"/>
-            <a:ext cx="3611880" cy="1280160"/>
-          </a:xfrm>
-          <a:prstGeom prst="rect">
-            <a:avLst/>
-          </a:prstGeom>
-          <a:noFill/>
-          <a:ln/>
-        </p:spPr>
-        <p:txBody>
-          <a:bodyPr wrap="square" lIns="0" tIns="0" rIns="0" bIns="0" rtlCol="0" anchor="t"/>
-          <a:lstStyle/>
-          <a:p>
-            <a:pPr indent="0" marL="0">
-              <a:spcAft>
-                <a:spcPts val="300"/>
-              </a:spcAft>
-              <a:buNone/>
-            </a:pPr>
-            <a:r>
-              <a:rPr lang="en-US" sz="1200" dirty="0">
-                <a:solidFill>
-                  <a:srgbClr val="0B0B0B"/>
-                </a:solidFill>
-                <a:latin typeface="Malgun Gothic" pitchFamily="34" charset="0"/>
-                <a:ea typeface="Malgun Gothic" pitchFamily="34" charset="-122"/>
-                <a:cs typeface="Malgun Gothic" pitchFamily="34" charset="-120"/>
-              </a:rPr>
-              <a:t>옛 사이트 세션(1개월) 약 180, 그중 광고 주소로 온 방문 120 (GA4)</a:t>
-            </a:r>
-            <a:endParaRPr lang="en-US" sz="1200" dirty="0"/>
-          </a:p>
-          <a:p>
-            <a:pPr indent="0" marL="0">
-              <a:spcAft>
-                <a:spcPts val="300"/>
-              </a:spcAft>
-              <a:buNone/>
-            </a:pPr>
-            <a:r>
-              <a:rPr lang="en-US" sz="1200" dirty="0">
-                <a:solidFill>
-                  <a:srgbClr val="0B0B0B"/>
-                </a:solidFill>
-                <a:latin typeface="Malgun Gothic" pitchFamily="34" charset="0"/>
-                <a:ea typeface="Malgun Gothic" pitchFamily="34" charset="-122"/>
-                <a:cs typeface="Malgun Gothic" pitchFamily="34" charset="-120"/>
-              </a:rPr>
-              <a:t>기기: 신청 페이지 142명 중 모바일 62 (44%)</a:t>
-            </a:r>
-            <a:endParaRPr lang="en-US" sz="1200" dirty="0"/>
-          </a:p>
-        </p:txBody>
-      </p:sp>
-      <p:sp>
-        <p:nvSpPr>
-          <p:cNvPr id="11" name="Text 9"/>
-          <p:cNvSpPr txBox="1"/>
-          <p:nvPr/>
-        </p:nvSpPr>
-        <p:spPr>
-          <a:xfrm>
-            <a:off x="4937760" y="3291840"/>
-            <a:ext cx="3611880" cy="365760"/>
-          </a:xfrm>
-          <a:prstGeom prst="rect">
-            <a:avLst/>
-          </a:prstGeom>
-          <a:noFill/>
-          <a:ln/>
-        </p:spPr>
-        <p:txBody>
-          <a:bodyPr wrap="square" lIns="0" tIns="0" rIns="0" bIns="0" rtlCol="0" anchor="t"/>
-          <a:lstStyle/>
-          <a:p>
-            <a:pPr indent="0" marL="0">
-              <a:buNone/>
-            </a:pPr>
-            <a:r>
-              <a:rPr lang="en-US" sz="1200" b="1" dirty="0">
-                <a:solidFill>
-                  <a:srgbClr val="2A78D6"/>
-                </a:solidFill>
-                <a:latin typeface="Malgun Gothic" pitchFamily="34" charset="0"/>
-                <a:ea typeface="Malgun Gothic" pitchFamily="34" charset="-122"/>
-                <a:cs typeface="Malgun Gothic" pitchFamily="34" charset="-120"/>
-              </a:rPr>
-              <a:t>→ 다음 장에서 광고 검색어를 봄</a:t>
-            </a:r>
-            <a:endParaRPr lang="en-US" sz="1200" dirty="0"/>
-          </a:p>
-        </p:txBody>
-      </p:sp>
-      <p:sp>
-        <p:nvSpPr>
-          <p:cNvPr id="12" name="Shape 10"/>
+            <a:endParaRPr lang="en-US" sz="1000" dirty="0"/>
+          </a:p>
+        </p:txBody>
+      </p:sp>
+      <p:graphicFrame>
+        <p:nvGraphicFramePr>
+          <p:cNvPr id="5" name="Chart 0" descr=""/>
+          <p:cNvGraphicFramePr/>
+          <p:nvPr/>
+        </p:nvGraphicFramePr>
+        <p:xfrm>
+          <a:off x="685800" y="1243584"/>
+          <a:ext cx="7772400" cy="3108960"/>
+        </p:xfrm>
+        <a:graphic xmlns:a="http://schemas.openxmlformats.org/drawingml/2006/main">
+          <a:graphicData uri="http://schemas.openxmlformats.org/drawingml/2006/chart">
+            <c:chart xmlns:c="http://schemas.openxmlformats.org/drawingml/2006/chart" r:id="rId1"/>
+          </a:graphicData>
+        </a:graphic>
+      </p:graphicFrame>
+      <p:sp>
+        <p:nvSpPr>
+          <p:cNvPr id="6" name="Shape 3"/>
           <p:cNvSpPr/>
           <p:nvPr/>
         </p:nvSpPr>
@@ -12674,7 +11600,7 @@
       </p:sp>
       <p:sp>
         <p:nvSpPr>
-          <p:cNvPr id="13" name="Text 11"/>
+          <p:cNvPr id="7" name="Text 4"/>
           <p:cNvSpPr txBox="1"/>
           <p:nvPr/>
         </p:nvSpPr>
@@ -12705,7 +11631,7 @@
                 <a:ea typeface="Malgun Gothic" pitchFamily="34" charset="-122"/>
                 <a:cs typeface="Malgun Gothic" pitchFamily="34" charset="-120"/>
               </a:rPr>
-              <a:t>출처: 접속자통계 유입 도메인별 방문, GA4 2026-09-02 ~ 10-01 · 전처리: GA4는 작업자 접속이 섞인 "직접" 69세션 제외</a:t>
+              <a:t>출처: 네이버 검색광고 검색어 보고서 2026-07-06 ~ 10-03(90일) · 전처리: 27,277행, 보고서 제목 줄 제거. 검색어 9,383개를 글자 규칙으로 유형 분류(클릭 난 231개는 검산)</a:t>
             </a:r>
             <a:endParaRPr lang="en-US" sz="800" dirty="0"/>
           </a:p>
